--- a/output/wordlabs-test-3day.pptx
+++ b/output/wordlabs-test-3day.pptx
@@ -6071,7 +6071,7 @@
                 <a:ea typeface="Calibri" pitchFamily="34" charset="-122"/>
                 <a:cs typeface="Calibri" pitchFamily="34" charset="-120"/>
               </a:rPr>
-              <a:t> was nervous, but her performance was a </a:t>
+              <a:t> had to </a:t>
             </a:r>
             <a:pPr algn="l" indent="0" marL="0">
               <a:buNone/>
@@ -6088,7 +6088,7 @@
                 <a:ea typeface="Calibri" pitchFamily="34" charset="-122"/>
                 <a:cs typeface="Calibri" pitchFamily="34" charset="-120"/>
               </a:rPr>
-              <a:t>testament</a:t>
+              <a:t>detest</a:t>
             </a:r>
             <a:pPr algn="l" indent="0" marL="0">
               <a:buNone/>
@@ -6102,7 +6102,7 @@
                 <a:ea typeface="Calibri" pitchFamily="34" charset="-122"/>
                 <a:cs typeface="Calibri" pitchFamily="34" charset="-120"/>
               </a:rPr>
-              <a:t> to months of hard work.</a:t>
+              <a:t> giving up, so she kept trying until she won the contest.</a:t>
             </a:r>
             <a:endParaRPr lang="en-US" sz="1800" dirty="0"/>
           </a:p>
@@ -6385,7 +6385,7 @@
                 <a:ea typeface="Trebuchet MS" pitchFamily="34" charset="-122"/>
                 <a:cs typeface="Trebuchet MS" pitchFamily="34" charset="-120"/>
               </a:rPr>
-              <a:t>testament</a:t>
+              <a:t>detest</a:t>
             </a:r>
             <a:endParaRPr lang="en-US" sz="1400" dirty="0"/>
           </a:p>
@@ -7972,7 +7972,7 @@
                 <a:ea typeface="Calibri" pitchFamily="34" charset="-122"/>
                 <a:cs typeface="Calibri" pitchFamily="34" charset="-120"/>
               </a:rPr>
-              <a:t>to try, witness</a:t>
+              <a:t>to try, examine, witness</a:t>
             </a:r>
             <a:endParaRPr lang="en-US" sz="850" dirty="0"/>
           </a:p>
@@ -8084,7 +8084,7 @@
                 <a:ea typeface="Calibri" pitchFamily="34" charset="-122"/>
                 <a:cs typeface="Calibri" pitchFamily="34" charset="-120"/>
               </a:rPr>
-              <a:t>a person who does something</a:t>
+              <a:t>one who does</a:t>
             </a:r>
             <a:endParaRPr lang="en-US" sz="850" dirty="0"/>
           </a:p>
@@ -9069,7 +9069,7 @@
                 <a:ea typeface="Calibri" pitchFamily="34" charset="-122"/>
                 <a:cs typeface="Calibri" pitchFamily="34" charset="-120"/>
               </a:rPr>
-              <a:t>to try, witness</a:t>
+              <a:t>to try, examine, witness</a:t>
             </a:r>
             <a:endParaRPr lang="en-US" sz="850" dirty="0"/>
           </a:p>
@@ -9181,7 +9181,7 @@
                 <a:ea typeface="Calibri" pitchFamily="34" charset="-122"/>
                 <a:cs typeface="Calibri" pitchFamily="34" charset="-120"/>
               </a:rPr>
-              <a:t>a person who does something</a:t>
+              <a:t>one who does</a:t>
             </a:r>
             <a:endParaRPr lang="en-US" sz="850" dirty="0"/>
           </a:p>
@@ -10403,7 +10403,7 @@
                 <a:ea typeface="Calibri" pitchFamily="34" charset="-122"/>
                 <a:cs typeface="Calibri" pitchFamily="34" charset="-120"/>
               </a:rPr>
-              <a:t>to try, witness</a:t>
+              <a:t>to try, examine, witness</a:t>
             </a:r>
             <a:endParaRPr lang="en-US" sz="850" dirty="0"/>
           </a:p>
@@ -10515,7 +10515,7 @@
                 <a:ea typeface="Calibri" pitchFamily="34" charset="-122"/>
                 <a:cs typeface="Calibri" pitchFamily="34" charset="-120"/>
               </a:rPr>
-              <a:t>a person who does something</a:t>
+              <a:t>one who does</a:t>
             </a:r>
             <a:endParaRPr lang="en-US" sz="850" dirty="0"/>
           </a:p>
@@ -12107,7 +12107,7 @@
                 <a:ea typeface="Trebuchet MS" pitchFamily="34" charset="-122"/>
                 <a:cs typeface="Trebuchet MS" pitchFamily="34" charset="-120"/>
               </a:rPr>
-              <a:t>testament</a:t>
+              <a:t>detest</a:t>
             </a:r>
             <a:endParaRPr lang="en-US" sz="2800" dirty="0"/>
           </a:p>
@@ -12934,7 +12934,7 @@
                 <a:ea typeface="Trebuchet MS" pitchFamily="34" charset="-122"/>
                 <a:cs typeface="Trebuchet MS" pitchFamily="34" charset="-120"/>
               </a:rPr>
-              <a:t>testament</a:t>
+              <a:t>detest</a:t>
             </a:r>
             <a:endParaRPr lang="en-US" sz="2800" dirty="0"/>
           </a:p>
@@ -13014,7 +13014,7 @@
         </p:nvSpPr>
         <p:spPr>
           <a:xfrm>
-            <a:off x="2221992" y="2258568"/>
+            <a:off x="2938272" y="2258568"/>
             <a:ext cx="1828800" cy="292608"/>
           </a:xfrm>
           <a:prstGeom prst="rect">
@@ -13023,11 +13023,11 @@
             </a:avLst>
           </a:prstGeom>
           <a:solidFill>
-            <a:srgbClr val="CCFBF1"/>
+            <a:srgbClr val="DDD6FE"/>
           </a:solidFill>
           <a:ln w="19050">
             <a:solidFill>
-              <a:srgbClr val="0D9488"/>
+              <a:srgbClr val="7C3AED"/>
             </a:solidFill>
             <a:prstDash val="solid"/>
           </a:ln>
@@ -13048,7 +13048,7 @@
         </p:nvSpPr>
         <p:spPr>
           <a:xfrm>
-            <a:off x="2221992" y="2258568"/>
+            <a:off x="2938272" y="2258568"/>
             <a:ext cx="1828800" cy="292608"/>
           </a:xfrm>
           <a:prstGeom prst="rect">
@@ -13067,13 +13067,13 @@
             <a:r>
               <a:rPr lang="en-US" sz="1300" b="1" dirty="0">
                 <a:solidFill>
-                  <a:srgbClr val="0F766E"/>
+                  <a:srgbClr val="4C1D95"/>
                 </a:solidFill>
                 <a:latin typeface="Trebuchet MS" pitchFamily="34" charset="0"/>
                 <a:ea typeface="Trebuchet MS" pitchFamily="34" charset="-122"/>
                 <a:cs typeface="Trebuchet MS" pitchFamily="34" charset="-120"/>
               </a:rPr>
-              <a:t>test</a:t>
+              <a:t>de</a:t>
             </a:r>
             <a:endParaRPr lang="en-US" sz="1300" dirty="0"/>
           </a:p>
@@ -13087,7 +13087,7 @@
         </p:nvSpPr>
         <p:spPr>
           <a:xfrm>
-            <a:off x="2221992" y="2569464"/>
+            <a:off x="2938272" y="2569464"/>
             <a:ext cx="1828800" cy="201168"/>
           </a:xfrm>
           <a:prstGeom prst="rect">
@@ -13112,7 +13112,7 @@
                 <a:ea typeface="Calibri" pitchFamily="34" charset="-122"/>
                 <a:cs typeface="Calibri" pitchFamily="34" charset="-120"/>
               </a:rPr>
-              <a:t>to try, witness</a:t>
+              <a:t>away from, against</a:t>
             </a:r>
             <a:endParaRPr lang="en-US" sz="850" dirty="0"/>
           </a:p>
@@ -13126,7 +13126,7 @@
         </p:nvSpPr>
         <p:spPr>
           <a:xfrm>
-            <a:off x="4370832" y="2258568"/>
+            <a:off x="5803392" y="2258568"/>
             <a:ext cx="1828800" cy="292608"/>
           </a:xfrm>
           <a:prstGeom prst="rect">
@@ -13135,11 +13135,11 @@
             </a:avLst>
           </a:prstGeom>
           <a:solidFill>
-            <a:srgbClr val="FCE7F3"/>
+            <a:srgbClr val="CCFBF1"/>
           </a:solidFill>
           <a:ln w="19050">
             <a:solidFill>
-              <a:srgbClr val="DB2777"/>
+              <a:srgbClr val="0D9488"/>
             </a:solidFill>
             <a:prstDash val="solid"/>
           </a:ln>
@@ -13160,7 +13160,7 @@
         </p:nvSpPr>
         <p:spPr>
           <a:xfrm>
-            <a:off x="4370832" y="2258568"/>
+            <a:off x="5803392" y="2258568"/>
             <a:ext cx="1828800" cy="292608"/>
           </a:xfrm>
           <a:prstGeom prst="rect">
@@ -13179,13 +13179,13 @@
             <a:r>
               <a:rPr lang="en-US" sz="1300" b="1" dirty="0">
                 <a:solidFill>
-                  <a:srgbClr val="9D174D"/>
+                  <a:srgbClr val="0F766E"/>
                 </a:solidFill>
                 <a:latin typeface="Trebuchet MS" pitchFamily="34" charset="0"/>
                 <a:ea typeface="Trebuchet MS" pitchFamily="34" charset="-122"/>
                 <a:cs typeface="Trebuchet MS" pitchFamily="34" charset="-120"/>
               </a:rPr>
-              <a:t>a</a:t>
+              <a:t>test</a:t>
             </a:r>
             <a:endParaRPr lang="en-US" sz="1300" dirty="0"/>
           </a:p>
@@ -13199,7 +13199,7 @@
         </p:nvSpPr>
         <p:spPr>
           <a:xfrm>
-            <a:off x="4370832" y="2569464"/>
+            <a:off x="5803392" y="2569464"/>
             <a:ext cx="1828800" cy="201168"/>
           </a:xfrm>
           <a:prstGeom prst="rect">
@@ -13224,7 +13224,7 @@
                 <a:ea typeface="Calibri" pitchFamily="34" charset="-122"/>
                 <a:cs typeface="Calibri" pitchFamily="34" charset="-120"/>
               </a:rPr>
-              <a:t>connecting vowel</a:t>
+              <a:t>to try, examine, witness</a:t>
             </a:r>
             <a:endParaRPr lang="en-US" sz="850" dirty="0"/>
           </a:p>
@@ -13232,216 +13232,197 @@
       </p:sp>
       <p:sp>
         <p:nvSpPr>
-          <p:cNvPr id="22" name="Text 20"/>
-          <p:cNvSpPr/>
-          <p:nvPr/>
-        </p:nvSpPr>
-        <p:spPr>
-          <a:xfrm>
-            <a:off x="4370832" y="2752344"/>
-            <a:ext cx="1828800" cy="182880"/>
-          </a:xfrm>
-          <a:prstGeom prst="rect">
-            <a:avLst/>
-          </a:prstGeom>
-          <a:noFill/>
-          <a:ln/>
-        </p:spPr>
-        <p:txBody>
-          <a:bodyPr wrap="square" lIns="0" tIns="0" rIns="0" bIns="0" rtlCol="0" anchor="t"/>
-          <a:lstStyle/>
-          <a:p>
-            <a:pPr algn="ctr" indent="0" marL="0">
-              <a:buNone/>
-            </a:pPr>
-            <a:r>
-              <a:rPr lang="en-US" sz="700" i="1" dirty="0">
-                <a:solidFill>
-                  <a:srgbClr val="94A3B8"/>
+          <p:cNvPr id="22" name="Shape 20"/>
+          <p:cNvSpPr/>
+          <p:nvPr/>
+        </p:nvSpPr>
+        <p:spPr>
+          <a:xfrm>
+            <a:off x="365760" y="3273552"/>
+            <a:ext cx="1371600" cy="658368"/>
+          </a:xfrm>
+          <a:prstGeom prst="rect">
+            <a:avLst>
+              <a:gd name="adj" fmla="val 8333"/>
+            </a:avLst>
+          </a:prstGeom>
+          <a:solidFill>
+            <a:srgbClr val="E2E8F0"/>
+          </a:solidFill>
+          <a:ln w="12700">
+            <a:solidFill>
+              <a:srgbClr val="E2E8F0"/>
+            </a:solidFill>
+            <a:prstDash val="solid"/>
+          </a:ln>
+        </p:spPr>
+      </p:sp>
+      <p:sp>
+        <p:nvSpPr>
+          <p:cNvPr id="23" name="Text 21"/>
+          <p:cNvSpPr/>
+          <p:nvPr/>
+        </p:nvSpPr>
+        <p:spPr>
+          <a:xfrm>
+            <a:off x="365760" y="3273552"/>
+            <a:ext cx="1371600" cy="658368"/>
+          </a:xfrm>
+          <a:prstGeom prst="rect">
+            <a:avLst/>
+          </a:prstGeom>
+          <a:noFill/>
+          <a:ln/>
+        </p:spPr>
+        <p:txBody>
+          <a:bodyPr wrap="square" lIns="0" tIns="0" rIns="0" bIns="0" rtlCol="0" anchor="ctr"/>
+          <a:lstStyle/>
+          <a:p>
+            <a:pPr algn="ctr" indent="0" marL="0">
+              <a:buNone/>
+            </a:pPr>
+            <a:r>
+              <a:rPr lang="en-US" sz="1100" b="1" dirty="0">
+                <a:solidFill>
+                  <a:srgbClr val="475569"/>
+                </a:solidFill>
+                <a:latin typeface="Trebuchet MS" pitchFamily="34" charset="0"/>
+                <a:ea typeface="Trebuchet MS" pitchFamily="34" charset="-122"/>
+                <a:cs typeface="Trebuchet MS" pitchFamily="34" charset="-120"/>
+              </a:rPr>
+              <a:t>Syllables</a:t>
+            </a:r>
+            <a:endParaRPr lang="en-US" sz="1100" dirty="0"/>
+          </a:p>
+        </p:txBody>
+      </p:sp>
+      <p:sp>
+        <p:nvSpPr>
+          <p:cNvPr id="24" name="Shape 22"/>
+          <p:cNvSpPr/>
+          <p:nvPr/>
+        </p:nvSpPr>
+        <p:spPr>
+          <a:xfrm>
+            <a:off x="1874520" y="3273552"/>
+            <a:ext cx="6903720" cy="658368"/>
+          </a:xfrm>
+          <a:prstGeom prst="rect">
+            <a:avLst>
+              <a:gd name="adj" fmla="val 8333"/>
+            </a:avLst>
+          </a:prstGeom>
+          <a:solidFill>
+            <a:srgbClr val="F8FAFC"/>
+          </a:solidFill>
+          <a:ln w="12700">
+            <a:solidFill>
+              <a:srgbClr val="E2E8F0"/>
+            </a:solidFill>
+            <a:prstDash val="dash"/>
+          </a:ln>
+        </p:spPr>
+      </p:sp>
+      <p:sp>
+        <p:nvSpPr>
+          <p:cNvPr id="25" name="Text 23"/>
+          <p:cNvSpPr/>
+          <p:nvPr/>
+        </p:nvSpPr>
+        <p:spPr>
+          <a:xfrm>
+            <a:off x="1874520" y="3273552"/>
+            <a:ext cx="6903720" cy="658368"/>
+          </a:xfrm>
+          <a:prstGeom prst="rect">
+            <a:avLst/>
+          </a:prstGeom>
+          <a:noFill/>
+          <a:ln/>
+        </p:spPr>
+        <p:txBody>
+          <a:bodyPr wrap="square" rtlCol="0" anchor="ctr"/>
+          <a:lstStyle/>
+          <a:p>
+            <a:pPr algn="ctr" indent="0" marL="0">
+              <a:buNone/>
+            </a:pPr>
+            <a:r>
+              <a:rPr lang="en-US" sz="1100" i="1" dirty="0">
+                <a:solidFill>
+                  <a:srgbClr val="CBD5E1"/>
                 </a:solidFill>
                 <a:latin typeface="Calibri" pitchFamily="34" charset="0"/>
                 <a:ea typeface="Calibri" pitchFamily="34" charset="-122"/>
                 <a:cs typeface="Calibri" pitchFamily="34" charset="-120"/>
               </a:rPr>
-              <a:t>links base to suffix</a:t>
-            </a:r>
-            <a:endParaRPr lang="en-US" sz="700" dirty="0"/>
-          </a:p>
-        </p:txBody>
-      </p:sp>
-      <p:sp>
-        <p:nvSpPr>
-          <p:cNvPr id="23" name="Shape 21"/>
-          <p:cNvSpPr/>
-          <p:nvPr/>
-        </p:nvSpPr>
-        <p:spPr>
-          <a:xfrm>
-            <a:off x="6519672" y="2258568"/>
-            <a:ext cx="1828800" cy="292608"/>
+              <a:t>Write here...</a:t>
+            </a:r>
+            <a:endParaRPr lang="en-US" sz="1100" dirty="0"/>
+          </a:p>
+        </p:txBody>
+      </p:sp>
+      <p:sp>
+        <p:nvSpPr>
+          <p:cNvPr id="26" name="Shape 24"/>
+          <p:cNvSpPr/>
+          <p:nvPr/>
+        </p:nvSpPr>
+        <p:spPr>
+          <a:xfrm>
+            <a:off x="365760" y="4096512"/>
+            <a:ext cx="1371600" cy="804672"/>
           </a:xfrm>
           <a:prstGeom prst="rect">
             <a:avLst>
-              <a:gd name="adj" fmla="val 25000"/>
+              <a:gd name="adj" fmla="val 6818"/>
             </a:avLst>
           </a:prstGeom>
           <a:solidFill>
-            <a:srgbClr val="FCE7F3"/>
-          </a:solidFill>
-          <a:ln w="19050">
-            <a:solidFill>
-              <a:srgbClr val="DB2777"/>
-            </a:solidFill>
-            <a:prstDash val="solid"/>
-          </a:ln>
-          <a:effectLst>
-            <a:outerShdw sx="100000" sy="100000" kx="0" ky="0" algn="bl" rotWithShape="0" blurRad="101600" dist="38100" dir="8100000">
-              <a:srgbClr val="000000">
-                <a:alpha val="12000"/>
-              </a:srgbClr>
-            </a:outerShdw>
-          </a:effectLst>
-        </p:spPr>
-      </p:sp>
-      <p:sp>
-        <p:nvSpPr>
-          <p:cNvPr id="24" name="Text 22"/>
-          <p:cNvSpPr/>
-          <p:nvPr/>
-        </p:nvSpPr>
-        <p:spPr>
-          <a:xfrm>
-            <a:off x="6519672" y="2258568"/>
-            <a:ext cx="1828800" cy="292608"/>
-          </a:xfrm>
-          <a:prstGeom prst="rect">
-            <a:avLst/>
-          </a:prstGeom>
-          <a:noFill/>
-          <a:ln/>
-        </p:spPr>
-        <p:txBody>
-          <a:bodyPr wrap="square" lIns="0" tIns="0" rIns="0" bIns="0" rtlCol="0" anchor="ctr"/>
-          <a:lstStyle/>
-          <a:p>
-            <a:pPr algn="ctr" indent="0" marL="0">
-              <a:buNone/>
-            </a:pPr>
-            <a:r>
-              <a:rPr lang="en-US" sz="1300" b="1" dirty="0">
-                <a:solidFill>
-                  <a:srgbClr val="9D174D"/>
+            <a:srgbClr val="E2E8F0"/>
+          </a:solidFill>
+          <a:ln w="12700">
+            <a:solidFill>
+              <a:srgbClr val="E2E8F0"/>
+            </a:solidFill>
+            <a:prstDash val="solid"/>
+          </a:ln>
+        </p:spPr>
+      </p:sp>
+      <p:sp>
+        <p:nvSpPr>
+          <p:cNvPr id="27" name="Text 25"/>
+          <p:cNvSpPr/>
+          <p:nvPr/>
+        </p:nvSpPr>
+        <p:spPr>
+          <a:xfrm>
+            <a:off x="365760" y="4096512"/>
+            <a:ext cx="1371600" cy="804672"/>
+          </a:xfrm>
+          <a:prstGeom prst="rect">
+            <a:avLst/>
+          </a:prstGeom>
+          <a:noFill/>
+          <a:ln/>
+        </p:spPr>
+        <p:txBody>
+          <a:bodyPr wrap="square" lIns="0" tIns="0" rIns="0" bIns="0" rtlCol="0" anchor="ctr"/>
+          <a:lstStyle/>
+          <a:p>
+            <a:pPr algn="ctr" indent="0" marL="0">
+              <a:buNone/>
+            </a:pPr>
+            <a:r>
+              <a:rPr lang="en-US" sz="1100" b="1" dirty="0">
+                <a:solidFill>
+                  <a:srgbClr val="475569"/>
                 </a:solidFill>
                 <a:latin typeface="Trebuchet MS" pitchFamily="34" charset="0"/>
                 <a:ea typeface="Trebuchet MS" pitchFamily="34" charset="-122"/>
                 <a:cs typeface="Trebuchet MS" pitchFamily="34" charset="-120"/>
               </a:rPr>
-              <a:t>ment</a:t>
-            </a:r>
-            <a:endParaRPr lang="en-US" sz="1300" dirty="0"/>
-          </a:p>
-        </p:txBody>
-      </p:sp>
-      <p:sp>
-        <p:nvSpPr>
-          <p:cNvPr id="25" name="Text 23"/>
-          <p:cNvSpPr/>
-          <p:nvPr/>
-        </p:nvSpPr>
-        <p:spPr>
-          <a:xfrm>
-            <a:off x="6519672" y="2569464"/>
-            <a:ext cx="1828800" cy="201168"/>
-          </a:xfrm>
-          <a:prstGeom prst="rect">
-            <a:avLst/>
-          </a:prstGeom>
-          <a:noFill/>
-          <a:ln/>
-        </p:spPr>
-        <p:txBody>
-          <a:bodyPr wrap="square" lIns="0" tIns="0" rIns="0" bIns="0" rtlCol="0" anchor="t"/>
-          <a:lstStyle/>
-          <a:p>
-            <a:pPr algn="ctr" indent="0" marL="0">
-              <a:buNone/>
-            </a:pPr>
-            <a:r>
-              <a:rPr lang="en-US" sz="850" dirty="0">
-                <a:solidFill>
-                  <a:srgbClr val="475569"/>
-                </a:solidFill>
-                <a:latin typeface="Calibri" pitchFamily="34" charset="0"/>
-                <a:ea typeface="Calibri" pitchFamily="34" charset="-122"/>
-                <a:cs typeface="Calibri" pitchFamily="34" charset="-120"/>
-              </a:rPr>
-              <a:t>result or means of an action</a:t>
-            </a:r>
-            <a:endParaRPr lang="en-US" sz="850" dirty="0"/>
-          </a:p>
-        </p:txBody>
-      </p:sp>
-      <p:sp>
-        <p:nvSpPr>
-          <p:cNvPr id="26" name="Shape 24"/>
-          <p:cNvSpPr/>
-          <p:nvPr/>
-        </p:nvSpPr>
-        <p:spPr>
-          <a:xfrm>
-            <a:off x="365760" y="3273552"/>
-            <a:ext cx="1371600" cy="658368"/>
-          </a:xfrm>
-          <a:prstGeom prst="rect">
-            <a:avLst>
-              <a:gd name="adj" fmla="val 8333"/>
-            </a:avLst>
-          </a:prstGeom>
-          <a:solidFill>
-            <a:srgbClr val="E2E8F0"/>
-          </a:solidFill>
-          <a:ln w="12700">
-            <a:solidFill>
-              <a:srgbClr val="E2E8F0"/>
-            </a:solidFill>
-            <a:prstDash val="solid"/>
-          </a:ln>
-        </p:spPr>
-      </p:sp>
-      <p:sp>
-        <p:nvSpPr>
-          <p:cNvPr id="27" name="Text 25"/>
-          <p:cNvSpPr/>
-          <p:nvPr/>
-        </p:nvSpPr>
-        <p:spPr>
-          <a:xfrm>
-            <a:off x="365760" y="3273552"/>
-            <a:ext cx="1371600" cy="658368"/>
-          </a:xfrm>
-          <a:prstGeom prst="rect">
-            <a:avLst/>
-          </a:prstGeom>
-          <a:noFill/>
-          <a:ln/>
-        </p:spPr>
-        <p:txBody>
-          <a:bodyPr wrap="square" lIns="0" tIns="0" rIns="0" bIns="0" rtlCol="0" anchor="ctr"/>
-          <a:lstStyle/>
-          <a:p>
-            <a:pPr algn="ctr" indent="0" marL="0">
-              <a:buNone/>
-            </a:pPr>
-            <a:r>
-              <a:rPr lang="en-US" sz="1100" b="1" dirty="0">
-                <a:solidFill>
-                  <a:srgbClr val="475569"/>
-                </a:solidFill>
-                <a:latin typeface="Trebuchet MS" pitchFamily="34" charset="0"/>
-                <a:ea typeface="Trebuchet MS" pitchFamily="34" charset="-122"/>
-                <a:cs typeface="Trebuchet MS" pitchFamily="34" charset="-120"/>
-              </a:rPr>
-              <a:t>Syllables</a:t>
+              <a:t>Phonemes</a:t>
             </a:r>
             <a:endParaRPr lang="en-US" sz="1100" dirty="0"/>
           </a:p>
@@ -13455,74 +13436,8 @@
         </p:nvSpPr>
         <p:spPr>
           <a:xfrm>
-            <a:off x="1874520" y="3273552"/>
-            <a:ext cx="6903720" cy="658368"/>
-          </a:xfrm>
-          <a:prstGeom prst="rect">
-            <a:avLst>
-              <a:gd name="adj" fmla="val 8333"/>
-            </a:avLst>
-          </a:prstGeom>
-          <a:solidFill>
-            <a:srgbClr val="F8FAFC"/>
-          </a:solidFill>
-          <a:ln w="12700">
-            <a:solidFill>
-              <a:srgbClr val="E2E8F0"/>
-            </a:solidFill>
-            <a:prstDash val="dash"/>
-          </a:ln>
-        </p:spPr>
-      </p:sp>
-      <p:sp>
-        <p:nvSpPr>
-          <p:cNvPr id="29" name="Text 27"/>
-          <p:cNvSpPr/>
-          <p:nvPr/>
-        </p:nvSpPr>
-        <p:spPr>
-          <a:xfrm>
-            <a:off x="1874520" y="3273552"/>
-            <a:ext cx="6903720" cy="658368"/>
-          </a:xfrm>
-          <a:prstGeom prst="rect">
-            <a:avLst/>
-          </a:prstGeom>
-          <a:noFill/>
-          <a:ln/>
-        </p:spPr>
-        <p:txBody>
-          <a:bodyPr wrap="square" rtlCol="0" anchor="ctr"/>
-          <a:lstStyle/>
-          <a:p>
-            <a:pPr algn="ctr" indent="0" marL="0">
-              <a:buNone/>
-            </a:pPr>
-            <a:r>
-              <a:rPr lang="en-US" sz="1100" i="1" dirty="0">
-                <a:solidFill>
-                  <a:srgbClr val="CBD5E1"/>
-                </a:solidFill>
-                <a:latin typeface="Calibri" pitchFamily="34" charset="0"/>
-                <a:ea typeface="Calibri" pitchFamily="34" charset="-122"/>
-                <a:cs typeface="Calibri" pitchFamily="34" charset="-120"/>
-              </a:rPr>
-              <a:t>Write here...</a:t>
-            </a:r>
-            <a:endParaRPr lang="en-US" sz="1100" dirty="0"/>
-          </a:p>
-        </p:txBody>
-      </p:sp>
-      <p:sp>
-        <p:nvSpPr>
-          <p:cNvPr id="30" name="Shape 28"/>
-          <p:cNvSpPr/>
-          <p:nvPr/>
-        </p:nvSpPr>
-        <p:spPr>
-          <a:xfrm>
-            <a:off x="365760" y="4096512"/>
-            <a:ext cx="1371600" cy="804672"/>
+            <a:off x="1874520" y="4096512"/>
+            <a:ext cx="6903720" cy="804672"/>
           </a:xfrm>
           <a:prstGeom prst="rect">
             <a:avLst>
@@ -13530,85 +13445,19 @@
             </a:avLst>
           </a:prstGeom>
           <a:solidFill>
-            <a:srgbClr val="E2E8F0"/>
+            <a:srgbClr val="F8FAFC"/>
           </a:solidFill>
           <a:ln w="12700">
             <a:solidFill>
               <a:srgbClr val="E2E8F0"/>
             </a:solidFill>
-            <a:prstDash val="solid"/>
-          </a:ln>
-        </p:spPr>
-      </p:sp>
-      <p:sp>
-        <p:nvSpPr>
-          <p:cNvPr id="31" name="Text 29"/>
-          <p:cNvSpPr/>
-          <p:nvPr/>
-        </p:nvSpPr>
-        <p:spPr>
-          <a:xfrm>
-            <a:off x="365760" y="4096512"/>
-            <a:ext cx="1371600" cy="804672"/>
-          </a:xfrm>
-          <a:prstGeom prst="rect">
-            <a:avLst/>
-          </a:prstGeom>
-          <a:noFill/>
-          <a:ln/>
-        </p:spPr>
-        <p:txBody>
-          <a:bodyPr wrap="square" lIns="0" tIns="0" rIns="0" bIns="0" rtlCol="0" anchor="ctr"/>
-          <a:lstStyle/>
-          <a:p>
-            <a:pPr algn="ctr" indent="0" marL="0">
-              <a:buNone/>
-            </a:pPr>
-            <a:r>
-              <a:rPr lang="en-US" sz="1100" b="1" dirty="0">
-                <a:solidFill>
-                  <a:srgbClr val="475569"/>
-                </a:solidFill>
-                <a:latin typeface="Trebuchet MS" pitchFamily="34" charset="0"/>
-                <a:ea typeface="Trebuchet MS" pitchFamily="34" charset="-122"/>
-                <a:cs typeface="Trebuchet MS" pitchFamily="34" charset="-120"/>
-              </a:rPr>
-              <a:t>Phonemes</a:t>
-            </a:r>
-            <a:endParaRPr lang="en-US" sz="1100" dirty="0"/>
-          </a:p>
-        </p:txBody>
-      </p:sp>
-      <p:sp>
-        <p:nvSpPr>
-          <p:cNvPr id="32" name="Shape 30"/>
-          <p:cNvSpPr/>
-          <p:nvPr/>
-        </p:nvSpPr>
-        <p:spPr>
-          <a:xfrm>
-            <a:off x="1874520" y="4096512"/>
-            <a:ext cx="6903720" cy="804672"/>
-          </a:xfrm>
-          <a:prstGeom prst="rect">
-            <a:avLst>
-              <a:gd name="adj" fmla="val 6818"/>
-            </a:avLst>
-          </a:prstGeom>
-          <a:solidFill>
-            <a:srgbClr val="F8FAFC"/>
-          </a:solidFill>
-          <a:ln w="12700">
-            <a:solidFill>
-              <a:srgbClr val="E2E8F0"/>
-            </a:solidFill>
             <a:prstDash val="dash"/>
           </a:ln>
         </p:spPr>
       </p:sp>
       <p:sp>
         <p:nvSpPr>
-          <p:cNvPr id="33" name="Text 31"/>
+          <p:cNvPr id="29" name="Text 27"/>
           <p:cNvSpPr/>
           <p:nvPr/>
         </p:nvSpPr>
@@ -14070,7 +13919,7 @@
                 <a:ea typeface="Trebuchet MS" pitchFamily="34" charset="-122"/>
                 <a:cs typeface="Trebuchet MS" pitchFamily="34" charset="-120"/>
               </a:rPr>
-              <a:t>testament</a:t>
+              <a:t>detest</a:t>
             </a:r>
             <a:endParaRPr lang="en-US" sz="2800" dirty="0"/>
           </a:p>
@@ -14150,7 +13999,7 @@
         </p:nvSpPr>
         <p:spPr>
           <a:xfrm>
-            <a:off x="2221992" y="2258568"/>
+            <a:off x="2938272" y="2258568"/>
             <a:ext cx="1828800" cy="292608"/>
           </a:xfrm>
           <a:prstGeom prst="rect">
@@ -14159,11 +14008,11 @@
             </a:avLst>
           </a:prstGeom>
           <a:solidFill>
-            <a:srgbClr val="CCFBF1"/>
+            <a:srgbClr val="DDD6FE"/>
           </a:solidFill>
           <a:ln w="19050">
             <a:solidFill>
-              <a:srgbClr val="0D9488"/>
+              <a:srgbClr val="7C3AED"/>
             </a:solidFill>
             <a:prstDash val="solid"/>
           </a:ln>
@@ -14184,7 +14033,7 @@
         </p:nvSpPr>
         <p:spPr>
           <a:xfrm>
-            <a:off x="2221992" y="2258568"/>
+            <a:off x="2938272" y="2258568"/>
             <a:ext cx="1828800" cy="292608"/>
           </a:xfrm>
           <a:prstGeom prst="rect">
@@ -14203,13 +14052,13 @@
             <a:r>
               <a:rPr lang="en-US" sz="1300" b="1" dirty="0">
                 <a:solidFill>
-                  <a:srgbClr val="0F766E"/>
+                  <a:srgbClr val="4C1D95"/>
                 </a:solidFill>
                 <a:latin typeface="Trebuchet MS" pitchFamily="34" charset="0"/>
                 <a:ea typeface="Trebuchet MS" pitchFamily="34" charset="-122"/>
                 <a:cs typeface="Trebuchet MS" pitchFamily="34" charset="-120"/>
               </a:rPr>
-              <a:t>test</a:t>
+              <a:t>de</a:t>
             </a:r>
             <a:endParaRPr lang="en-US" sz="1300" dirty="0"/>
           </a:p>
@@ -14223,7 +14072,7 @@
         </p:nvSpPr>
         <p:spPr>
           <a:xfrm>
-            <a:off x="2221992" y="2569464"/>
+            <a:off x="2938272" y="2569464"/>
             <a:ext cx="1828800" cy="201168"/>
           </a:xfrm>
           <a:prstGeom prst="rect">
@@ -14248,7 +14097,7 @@
                 <a:ea typeface="Calibri" pitchFamily="34" charset="-122"/>
                 <a:cs typeface="Calibri" pitchFamily="34" charset="-120"/>
               </a:rPr>
-              <a:t>to try, witness</a:t>
+              <a:t>away from, against</a:t>
             </a:r>
             <a:endParaRPr lang="en-US" sz="850" dirty="0"/>
           </a:p>
@@ -14262,7 +14111,7 @@
         </p:nvSpPr>
         <p:spPr>
           <a:xfrm>
-            <a:off x="4370832" y="2258568"/>
+            <a:off x="5803392" y="2258568"/>
             <a:ext cx="1828800" cy="292608"/>
           </a:xfrm>
           <a:prstGeom prst="rect">
@@ -14271,11 +14120,11 @@
             </a:avLst>
           </a:prstGeom>
           <a:solidFill>
-            <a:srgbClr val="FCE7F3"/>
+            <a:srgbClr val="CCFBF1"/>
           </a:solidFill>
           <a:ln w="19050">
             <a:solidFill>
-              <a:srgbClr val="DB2777"/>
+              <a:srgbClr val="0D9488"/>
             </a:solidFill>
             <a:prstDash val="solid"/>
           </a:ln>
@@ -14296,7 +14145,7 @@
         </p:nvSpPr>
         <p:spPr>
           <a:xfrm>
-            <a:off x="4370832" y="2258568"/>
+            <a:off x="5803392" y="2258568"/>
             <a:ext cx="1828800" cy="292608"/>
           </a:xfrm>
           <a:prstGeom prst="rect">
@@ -14315,13 +14164,13 @@
             <a:r>
               <a:rPr lang="en-US" sz="1300" b="1" dirty="0">
                 <a:solidFill>
-                  <a:srgbClr val="9D174D"/>
+                  <a:srgbClr val="0F766E"/>
                 </a:solidFill>
                 <a:latin typeface="Trebuchet MS" pitchFamily="34" charset="0"/>
                 <a:ea typeface="Trebuchet MS" pitchFamily="34" charset="-122"/>
                 <a:cs typeface="Trebuchet MS" pitchFamily="34" charset="-120"/>
               </a:rPr>
-              <a:t>a</a:t>
+              <a:t>test</a:t>
             </a:r>
             <a:endParaRPr lang="en-US" sz="1300" dirty="0"/>
           </a:p>
@@ -14335,7 +14184,7 @@
         </p:nvSpPr>
         <p:spPr>
           <a:xfrm>
-            <a:off x="4370832" y="2569464"/>
+            <a:off x="5803392" y="2569464"/>
             <a:ext cx="1828800" cy="201168"/>
           </a:xfrm>
           <a:prstGeom prst="rect">
@@ -14360,7 +14209,7 @@
                 <a:ea typeface="Calibri" pitchFamily="34" charset="-122"/>
                 <a:cs typeface="Calibri" pitchFamily="34" charset="-120"/>
               </a:rPr>
-              <a:t>connecting vowel</a:t>
+              <a:t>to try, examine, witness</a:t>
             </a:r>
             <a:endParaRPr lang="en-US" sz="850" dirty="0"/>
           </a:p>
@@ -14368,165 +14217,80 @@
       </p:sp>
       <p:sp>
         <p:nvSpPr>
-          <p:cNvPr id="22" name="Text 20"/>
-          <p:cNvSpPr/>
-          <p:nvPr/>
-        </p:nvSpPr>
-        <p:spPr>
-          <a:xfrm>
-            <a:off x="4370832" y="2752344"/>
-            <a:ext cx="1828800" cy="182880"/>
-          </a:xfrm>
-          <a:prstGeom prst="rect">
-            <a:avLst/>
-          </a:prstGeom>
-          <a:noFill/>
-          <a:ln/>
-        </p:spPr>
-        <p:txBody>
-          <a:bodyPr wrap="square" lIns="0" tIns="0" rIns="0" bIns="0" rtlCol="0" anchor="t"/>
-          <a:lstStyle/>
-          <a:p>
-            <a:pPr algn="ctr" indent="0" marL="0">
-              <a:buNone/>
-            </a:pPr>
-            <a:r>
-              <a:rPr lang="en-US" sz="700" i="1" dirty="0">
-                <a:solidFill>
-                  <a:srgbClr val="94A3B8"/>
-                </a:solidFill>
-                <a:latin typeface="Calibri" pitchFamily="34" charset="0"/>
-                <a:ea typeface="Calibri" pitchFamily="34" charset="-122"/>
-                <a:cs typeface="Calibri" pitchFamily="34" charset="-120"/>
-              </a:rPr>
-              <a:t>links base to suffix</a:t>
-            </a:r>
-            <a:endParaRPr lang="en-US" sz="700" dirty="0"/>
-          </a:p>
-        </p:txBody>
-      </p:sp>
-      <p:sp>
-        <p:nvSpPr>
-          <p:cNvPr id="23" name="Shape 21"/>
-          <p:cNvSpPr/>
-          <p:nvPr/>
-        </p:nvSpPr>
-        <p:spPr>
-          <a:xfrm>
-            <a:off x="6519672" y="2258568"/>
-            <a:ext cx="1828800" cy="292608"/>
+          <p:cNvPr id="22" name="Shape 20"/>
+          <p:cNvSpPr/>
+          <p:nvPr/>
+        </p:nvSpPr>
+        <p:spPr>
+          <a:xfrm>
+            <a:off x="365760" y="3273552"/>
+            <a:ext cx="1371600" cy="658368"/>
           </a:xfrm>
           <a:prstGeom prst="rect">
             <a:avLst>
-              <a:gd name="adj" fmla="val 25000"/>
+              <a:gd name="adj" fmla="val 8333"/>
             </a:avLst>
           </a:prstGeom>
           <a:solidFill>
-            <a:srgbClr val="FCE7F3"/>
-          </a:solidFill>
-          <a:ln w="19050">
-            <a:solidFill>
-              <a:srgbClr val="DB2777"/>
-            </a:solidFill>
-            <a:prstDash val="solid"/>
-          </a:ln>
-          <a:effectLst>
-            <a:outerShdw sx="100000" sy="100000" kx="0" ky="0" algn="bl" rotWithShape="0" blurRad="101600" dist="38100" dir="8100000">
-              <a:srgbClr val="000000">
-                <a:alpha val="12000"/>
-              </a:srgbClr>
-            </a:outerShdw>
-          </a:effectLst>
-        </p:spPr>
-      </p:sp>
-      <p:sp>
-        <p:nvSpPr>
-          <p:cNvPr id="24" name="Text 22"/>
-          <p:cNvSpPr/>
-          <p:nvPr/>
-        </p:nvSpPr>
-        <p:spPr>
-          <a:xfrm>
-            <a:off x="6519672" y="2258568"/>
-            <a:ext cx="1828800" cy="292608"/>
-          </a:xfrm>
-          <a:prstGeom prst="rect">
-            <a:avLst/>
-          </a:prstGeom>
-          <a:noFill/>
-          <a:ln/>
-        </p:spPr>
-        <p:txBody>
-          <a:bodyPr wrap="square" lIns="0" tIns="0" rIns="0" bIns="0" rtlCol="0" anchor="ctr"/>
-          <a:lstStyle/>
-          <a:p>
-            <a:pPr algn="ctr" indent="0" marL="0">
-              <a:buNone/>
-            </a:pPr>
-            <a:r>
-              <a:rPr lang="en-US" sz="1300" b="1" dirty="0">
-                <a:solidFill>
-                  <a:srgbClr val="9D174D"/>
+            <a:srgbClr val="E2E8F0"/>
+          </a:solidFill>
+          <a:ln w="12700">
+            <a:solidFill>
+              <a:srgbClr val="E2E8F0"/>
+            </a:solidFill>
+            <a:prstDash val="solid"/>
+          </a:ln>
+        </p:spPr>
+      </p:sp>
+      <p:sp>
+        <p:nvSpPr>
+          <p:cNvPr id="23" name="Text 21"/>
+          <p:cNvSpPr/>
+          <p:nvPr/>
+        </p:nvSpPr>
+        <p:spPr>
+          <a:xfrm>
+            <a:off x="365760" y="3273552"/>
+            <a:ext cx="1371600" cy="658368"/>
+          </a:xfrm>
+          <a:prstGeom prst="rect">
+            <a:avLst/>
+          </a:prstGeom>
+          <a:noFill/>
+          <a:ln/>
+        </p:spPr>
+        <p:txBody>
+          <a:bodyPr wrap="square" lIns="0" tIns="0" rIns="0" bIns="0" rtlCol="0" anchor="ctr"/>
+          <a:lstStyle/>
+          <a:p>
+            <a:pPr algn="ctr" indent="0" marL="0">
+              <a:buNone/>
+            </a:pPr>
+            <a:r>
+              <a:rPr lang="en-US" sz="1100" b="1" dirty="0">
+                <a:solidFill>
+                  <a:srgbClr val="475569"/>
                 </a:solidFill>
                 <a:latin typeface="Trebuchet MS" pitchFamily="34" charset="0"/>
                 <a:ea typeface="Trebuchet MS" pitchFamily="34" charset="-122"/>
                 <a:cs typeface="Trebuchet MS" pitchFamily="34" charset="-120"/>
               </a:rPr>
-              <a:t>ment</a:t>
-            </a:r>
-            <a:endParaRPr lang="en-US" sz="1300" dirty="0"/>
-          </a:p>
-        </p:txBody>
-      </p:sp>
-      <p:sp>
-        <p:nvSpPr>
-          <p:cNvPr id="25" name="Text 23"/>
-          <p:cNvSpPr/>
-          <p:nvPr/>
-        </p:nvSpPr>
-        <p:spPr>
-          <a:xfrm>
-            <a:off x="6519672" y="2569464"/>
-            <a:ext cx="1828800" cy="201168"/>
-          </a:xfrm>
-          <a:prstGeom prst="rect">
-            <a:avLst/>
-          </a:prstGeom>
-          <a:noFill/>
-          <a:ln/>
-        </p:spPr>
-        <p:txBody>
-          <a:bodyPr wrap="square" lIns="0" tIns="0" rIns="0" bIns="0" rtlCol="0" anchor="t"/>
-          <a:lstStyle/>
-          <a:p>
-            <a:pPr algn="ctr" indent="0" marL="0">
-              <a:buNone/>
-            </a:pPr>
-            <a:r>
-              <a:rPr lang="en-US" sz="850" dirty="0">
-                <a:solidFill>
-                  <a:srgbClr val="475569"/>
-                </a:solidFill>
-                <a:latin typeface="Calibri" pitchFamily="34" charset="0"/>
-                <a:ea typeface="Calibri" pitchFamily="34" charset="-122"/>
-                <a:cs typeface="Calibri" pitchFamily="34" charset="-120"/>
-              </a:rPr>
-              <a:t>result or means of an action</a:t>
-            </a:r>
-            <a:endParaRPr lang="en-US" sz="850" dirty="0"/>
-          </a:p>
-        </p:txBody>
-      </p:sp>
-      <p:sp>
-        <p:nvSpPr>
-          <p:cNvPr id="26" name="Shape 24"/>
-          <p:cNvSpPr/>
-          <p:nvPr/>
-        </p:nvSpPr>
-        <p:spPr>
-          <a:xfrm>
-            <a:off x="365760" y="3273552"/>
-            <a:ext cx="1371600" cy="658368"/>
+              <a:t>Syllables</a:t>
+            </a:r>
+            <a:endParaRPr lang="en-US" sz="1100" dirty="0"/>
+          </a:p>
+        </p:txBody>
+      </p:sp>
+      <p:sp>
+        <p:nvSpPr>
+          <p:cNvPr id="24" name="Shape 22"/>
+          <p:cNvSpPr/>
+          <p:nvPr/>
+        </p:nvSpPr>
+        <p:spPr>
+          <a:xfrm>
+            <a:off x="1874520" y="3273552"/>
+            <a:ext cx="6903720" cy="658368"/>
           </a:xfrm>
           <a:prstGeom prst="rect">
             <a:avLst>
@@ -14534,52 +14298,118 @@
             </a:avLst>
           </a:prstGeom>
           <a:solidFill>
-            <a:srgbClr val="E2E8F0"/>
-          </a:solidFill>
-          <a:ln w="12700">
-            <a:solidFill>
-              <a:srgbClr val="E2E8F0"/>
-            </a:solidFill>
-            <a:prstDash val="solid"/>
-          </a:ln>
-        </p:spPr>
-      </p:sp>
-      <p:sp>
-        <p:nvSpPr>
-          <p:cNvPr id="27" name="Text 25"/>
-          <p:cNvSpPr/>
-          <p:nvPr/>
-        </p:nvSpPr>
-        <p:spPr>
-          <a:xfrm>
-            <a:off x="365760" y="3273552"/>
-            <a:ext cx="1371600" cy="658368"/>
-          </a:xfrm>
-          <a:prstGeom prst="rect">
-            <a:avLst/>
-          </a:prstGeom>
-          <a:noFill/>
-          <a:ln/>
-        </p:spPr>
-        <p:txBody>
-          <a:bodyPr wrap="square" lIns="0" tIns="0" rIns="0" bIns="0" rtlCol="0" anchor="ctr"/>
-          <a:lstStyle/>
-          <a:p>
-            <a:pPr algn="ctr" indent="0" marL="0">
-              <a:buNone/>
-            </a:pPr>
-            <a:r>
-              <a:rPr lang="en-US" sz="1100" b="1" dirty="0">
-                <a:solidFill>
-                  <a:srgbClr val="475569"/>
+            <a:srgbClr val="CCFBF1"/>
+          </a:solidFill>
+          <a:ln w="12700">
+            <a:solidFill>
+              <a:srgbClr val="0D9488"/>
+            </a:solidFill>
+            <a:prstDash val="solid"/>
+          </a:ln>
+        </p:spPr>
+      </p:sp>
+      <p:sp>
+        <p:nvSpPr>
+          <p:cNvPr id="25" name="Shape 23"/>
+          <p:cNvSpPr/>
+          <p:nvPr/>
+        </p:nvSpPr>
+        <p:spPr>
+          <a:xfrm>
+            <a:off x="2999232" y="3364992"/>
+            <a:ext cx="1645920" cy="475488"/>
+          </a:xfrm>
+          <a:prstGeom prst="rect">
+            <a:avLst>
+              <a:gd name="adj" fmla="val 9615"/>
+            </a:avLst>
+          </a:prstGeom>
+          <a:solidFill>
+            <a:srgbClr val="FFFFFF"/>
+          </a:solidFill>
+          <a:ln w="12700">
+            <a:solidFill>
+              <a:srgbClr val="0D9488"/>
+            </a:solidFill>
+            <a:prstDash val="solid"/>
+          </a:ln>
+        </p:spPr>
+      </p:sp>
+      <p:sp>
+        <p:nvSpPr>
+          <p:cNvPr id="26" name="Text 24"/>
+          <p:cNvSpPr/>
+          <p:nvPr/>
+        </p:nvSpPr>
+        <p:spPr>
+          <a:xfrm>
+            <a:off x="2999232" y="3364992"/>
+            <a:ext cx="1645920" cy="475488"/>
+          </a:xfrm>
+          <a:prstGeom prst="rect">
+            <a:avLst/>
+          </a:prstGeom>
+          <a:noFill/>
+          <a:ln/>
+        </p:spPr>
+        <p:txBody>
+          <a:bodyPr wrap="square" lIns="0" tIns="0" rIns="0" bIns="0" rtlCol="0" anchor="ctr"/>
+          <a:lstStyle/>
+          <a:p>
+            <a:pPr algn="ctr" indent="0" marL="0">
+              <a:buNone/>
+            </a:pPr>
+            <a:r>
+              <a:rPr lang="en-US" sz="1400" b="1" dirty="0">
+                <a:solidFill>
+                  <a:srgbClr val="0D9488"/>
                 </a:solidFill>
                 <a:latin typeface="Trebuchet MS" pitchFamily="34" charset="0"/>
                 <a:ea typeface="Trebuchet MS" pitchFamily="34" charset="-122"/>
                 <a:cs typeface="Trebuchet MS" pitchFamily="34" charset="-120"/>
               </a:rPr>
-              <a:t>Syllables</a:t>
-            </a:r>
-            <a:endParaRPr lang="en-US" sz="1100" dirty="0"/>
+              <a:t>de</a:t>
+            </a:r>
+            <a:endParaRPr lang="en-US" sz="1400" dirty="0"/>
+          </a:p>
+        </p:txBody>
+      </p:sp>
+      <p:sp>
+        <p:nvSpPr>
+          <p:cNvPr id="27" name="Text 25"/>
+          <p:cNvSpPr/>
+          <p:nvPr/>
+        </p:nvSpPr>
+        <p:spPr>
+          <a:xfrm>
+            <a:off x="4645152" y="3364992"/>
+            <a:ext cx="1097280" cy="475488"/>
+          </a:xfrm>
+          <a:prstGeom prst="rect">
+            <a:avLst/>
+          </a:prstGeom>
+          <a:noFill/>
+          <a:ln/>
+        </p:spPr>
+        <p:txBody>
+          <a:bodyPr wrap="square" lIns="0" tIns="0" rIns="0" bIns="0" rtlCol="0" anchor="ctr"/>
+          <a:lstStyle/>
+          <a:p>
+            <a:pPr algn="ctr" indent="0" marL="0">
+              <a:buNone/>
+            </a:pPr>
+            <a:r>
+              <a:rPr lang="en-US" sz="1600" b="1" dirty="0">
+                <a:solidFill>
+                  <a:srgbClr val="0D9488"/>
+                </a:solidFill>
+                <a:latin typeface="Trebuchet MS" pitchFamily="34" charset="0"/>
+                <a:ea typeface="Trebuchet MS" pitchFamily="34" charset="-122"/>
+                <a:cs typeface="Trebuchet MS" pitchFamily="34" charset="-120"/>
+              </a:rPr>
+              <a:t>·</a:t>
+            </a:r>
+            <a:endParaRPr lang="en-US" sz="1600" dirty="0"/>
           </a:p>
         </p:txBody>
       </p:sp>
@@ -14591,34 +14421,7 @@
         </p:nvSpPr>
         <p:spPr>
           <a:xfrm>
-            <a:off x="1874520" y="3273552"/>
-            <a:ext cx="6903720" cy="658368"/>
-          </a:xfrm>
-          <a:prstGeom prst="rect">
-            <a:avLst>
-              <a:gd name="adj" fmla="val 8333"/>
-            </a:avLst>
-          </a:prstGeom>
-          <a:solidFill>
-            <a:srgbClr val="CCFBF1"/>
-          </a:solidFill>
-          <a:ln w="12700">
-            <a:solidFill>
-              <a:srgbClr val="0D9488"/>
-            </a:solidFill>
-            <a:prstDash val="solid"/>
-          </a:ln>
-        </p:spPr>
-      </p:sp>
-      <p:sp>
-        <p:nvSpPr>
-          <p:cNvPr id="29" name="Shape 27"/>
-          <p:cNvSpPr/>
-          <p:nvPr/>
-        </p:nvSpPr>
-        <p:spPr>
-          <a:xfrm>
-            <a:off x="2313432" y="3364992"/>
+            <a:off x="5742432" y="3364992"/>
             <a:ext cx="1645920" cy="475488"/>
           </a:xfrm>
           <a:prstGeom prst="rect">
@@ -14639,13 +14442,13 @@
       </p:sp>
       <p:sp>
         <p:nvSpPr>
-          <p:cNvPr id="30" name="Text 28"/>
-          <p:cNvSpPr/>
-          <p:nvPr/>
-        </p:nvSpPr>
-        <p:spPr>
-          <a:xfrm>
-            <a:off x="2313432" y="3364992"/>
+          <p:cNvPr id="29" name="Text 27"/>
+          <p:cNvSpPr/>
+          <p:nvPr/>
+        </p:nvSpPr>
+        <p:spPr>
+          <a:xfrm>
+            <a:off x="5742432" y="3364992"/>
             <a:ext cx="1645920" cy="475488"/>
           </a:xfrm>
           <a:prstGeom prst="rect">
@@ -14670,7 +14473,7 @@
                 <a:ea typeface="Trebuchet MS" pitchFamily="34" charset="-122"/>
                 <a:cs typeface="Trebuchet MS" pitchFamily="34" charset="-120"/>
               </a:rPr>
-              <a:t>tes</a:t>
+              <a:t>test</a:t>
             </a:r>
             <a:endParaRPr lang="en-US" sz="1400" dirty="0"/>
           </a:p>
@@ -14678,40 +14481,67 @@
       </p:sp>
       <p:sp>
         <p:nvSpPr>
+          <p:cNvPr id="30" name="Shape 28"/>
+          <p:cNvSpPr/>
+          <p:nvPr/>
+        </p:nvSpPr>
+        <p:spPr>
+          <a:xfrm>
+            <a:off x="365760" y="4096512"/>
+            <a:ext cx="1371600" cy="804672"/>
+          </a:xfrm>
+          <a:prstGeom prst="rect">
+            <a:avLst>
+              <a:gd name="adj" fmla="val 6818"/>
+            </a:avLst>
+          </a:prstGeom>
+          <a:solidFill>
+            <a:srgbClr val="E2E8F0"/>
+          </a:solidFill>
+          <a:ln w="12700">
+            <a:solidFill>
+              <a:srgbClr val="E2E8F0"/>
+            </a:solidFill>
+            <a:prstDash val="solid"/>
+          </a:ln>
+        </p:spPr>
+      </p:sp>
+      <p:sp>
+        <p:nvSpPr>
           <p:cNvPr id="31" name="Text 29"/>
           <p:cNvSpPr/>
           <p:nvPr/>
         </p:nvSpPr>
         <p:spPr>
           <a:xfrm>
-            <a:off x="3959352" y="3364992"/>
-            <a:ext cx="411480" cy="475488"/>
-          </a:xfrm>
-          <a:prstGeom prst="rect">
-            <a:avLst/>
-          </a:prstGeom>
-          <a:noFill/>
-          <a:ln/>
-        </p:spPr>
-        <p:txBody>
-          <a:bodyPr wrap="square" lIns="0" tIns="0" rIns="0" bIns="0" rtlCol="0" anchor="ctr"/>
-          <a:lstStyle/>
-          <a:p>
-            <a:pPr algn="ctr" indent="0" marL="0">
-              <a:buNone/>
-            </a:pPr>
-            <a:r>
-              <a:rPr lang="en-US" sz="1600" b="1" dirty="0">
-                <a:solidFill>
-                  <a:srgbClr val="0D9488"/>
+            <a:off x="365760" y="4096512"/>
+            <a:ext cx="1371600" cy="804672"/>
+          </a:xfrm>
+          <a:prstGeom prst="rect">
+            <a:avLst/>
+          </a:prstGeom>
+          <a:noFill/>
+          <a:ln/>
+        </p:spPr>
+        <p:txBody>
+          <a:bodyPr wrap="square" lIns="0" tIns="0" rIns="0" bIns="0" rtlCol="0" anchor="ctr"/>
+          <a:lstStyle/>
+          <a:p>
+            <a:pPr algn="ctr" indent="0" marL="0">
+              <a:buNone/>
+            </a:pPr>
+            <a:r>
+              <a:rPr lang="en-US" sz="1100" b="1" dirty="0">
+                <a:solidFill>
+                  <a:srgbClr val="475569"/>
                 </a:solidFill>
                 <a:latin typeface="Trebuchet MS" pitchFamily="34" charset="0"/>
                 <a:ea typeface="Trebuchet MS" pitchFamily="34" charset="-122"/>
                 <a:cs typeface="Trebuchet MS" pitchFamily="34" charset="-120"/>
               </a:rPr>
-              <a:t>·</a:t>
-            </a:r>
-            <a:endParaRPr lang="en-US" sz="1600" dirty="0"/>
+              <a:t>Phonemes</a:t>
+            </a:r>
+            <a:endParaRPr lang="en-US" sz="1100" dirty="0"/>
           </a:p>
         </p:txBody>
       </p:sp>
@@ -14723,179 +14553,8 @@
         </p:nvSpPr>
         <p:spPr>
           <a:xfrm>
-            <a:off x="4370832" y="3364992"/>
-            <a:ext cx="1645920" cy="475488"/>
-          </a:xfrm>
-          <a:prstGeom prst="rect">
-            <a:avLst>
-              <a:gd name="adj" fmla="val 9615"/>
-            </a:avLst>
-          </a:prstGeom>
-          <a:solidFill>
-            <a:srgbClr val="FFFFFF"/>
-          </a:solidFill>
-          <a:ln w="12700">
-            <a:solidFill>
-              <a:srgbClr val="0D9488"/>
-            </a:solidFill>
-            <a:prstDash val="solid"/>
-          </a:ln>
-        </p:spPr>
-      </p:sp>
-      <p:sp>
-        <p:nvSpPr>
-          <p:cNvPr id="33" name="Text 31"/>
-          <p:cNvSpPr/>
-          <p:nvPr/>
-        </p:nvSpPr>
-        <p:spPr>
-          <a:xfrm>
-            <a:off x="4370832" y="3364992"/>
-            <a:ext cx="1645920" cy="475488"/>
-          </a:xfrm>
-          <a:prstGeom prst="rect">
-            <a:avLst/>
-          </a:prstGeom>
-          <a:noFill/>
-          <a:ln/>
-        </p:spPr>
-        <p:txBody>
-          <a:bodyPr wrap="square" lIns="0" tIns="0" rIns="0" bIns="0" rtlCol="0" anchor="ctr"/>
-          <a:lstStyle/>
-          <a:p>
-            <a:pPr algn="ctr" indent="0" marL="0">
-              <a:buNone/>
-            </a:pPr>
-            <a:r>
-              <a:rPr lang="en-US" sz="1400" b="1" dirty="0">
-                <a:solidFill>
-                  <a:srgbClr val="0D9488"/>
-                </a:solidFill>
-                <a:latin typeface="Trebuchet MS" pitchFamily="34" charset="0"/>
-                <a:ea typeface="Trebuchet MS" pitchFamily="34" charset="-122"/>
-                <a:cs typeface="Trebuchet MS" pitchFamily="34" charset="-120"/>
-              </a:rPr>
-              <a:t>ta</a:t>
-            </a:r>
-            <a:endParaRPr lang="en-US" sz="1400" dirty="0"/>
-          </a:p>
-        </p:txBody>
-      </p:sp>
-      <p:sp>
-        <p:nvSpPr>
-          <p:cNvPr id="34" name="Text 32"/>
-          <p:cNvSpPr/>
-          <p:nvPr/>
-        </p:nvSpPr>
-        <p:spPr>
-          <a:xfrm>
-            <a:off x="6016752" y="3364992"/>
-            <a:ext cx="411480" cy="475488"/>
-          </a:xfrm>
-          <a:prstGeom prst="rect">
-            <a:avLst/>
-          </a:prstGeom>
-          <a:noFill/>
-          <a:ln/>
-        </p:spPr>
-        <p:txBody>
-          <a:bodyPr wrap="square" lIns="0" tIns="0" rIns="0" bIns="0" rtlCol="0" anchor="ctr"/>
-          <a:lstStyle/>
-          <a:p>
-            <a:pPr algn="ctr" indent="0" marL="0">
-              <a:buNone/>
-            </a:pPr>
-            <a:r>
-              <a:rPr lang="en-US" sz="1600" b="1" dirty="0">
-                <a:solidFill>
-                  <a:srgbClr val="0D9488"/>
-                </a:solidFill>
-                <a:latin typeface="Trebuchet MS" pitchFamily="34" charset="0"/>
-                <a:ea typeface="Trebuchet MS" pitchFamily="34" charset="-122"/>
-                <a:cs typeface="Trebuchet MS" pitchFamily="34" charset="-120"/>
-              </a:rPr>
-              <a:t>·</a:t>
-            </a:r>
-            <a:endParaRPr lang="en-US" sz="1600" dirty="0"/>
-          </a:p>
-        </p:txBody>
-      </p:sp>
-      <p:sp>
-        <p:nvSpPr>
-          <p:cNvPr id="35" name="Shape 33"/>
-          <p:cNvSpPr/>
-          <p:nvPr/>
-        </p:nvSpPr>
-        <p:spPr>
-          <a:xfrm>
-            <a:off x="6428232" y="3364992"/>
-            <a:ext cx="1645920" cy="475488"/>
-          </a:xfrm>
-          <a:prstGeom prst="rect">
-            <a:avLst>
-              <a:gd name="adj" fmla="val 9615"/>
-            </a:avLst>
-          </a:prstGeom>
-          <a:solidFill>
-            <a:srgbClr val="FFFFFF"/>
-          </a:solidFill>
-          <a:ln w="12700">
-            <a:solidFill>
-              <a:srgbClr val="0D9488"/>
-            </a:solidFill>
-            <a:prstDash val="solid"/>
-          </a:ln>
-        </p:spPr>
-      </p:sp>
-      <p:sp>
-        <p:nvSpPr>
-          <p:cNvPr id="36" name="Text 34"/>
-          <p:cNvSpPr/>
-          <p:nvPr/>
-        </p:nvSpPr>
-        <p:spPr>
-          <a:xfrm>
-            <a:off x="6428232" y="3364992"/>
-            <a:ext cx="1645920" cy="475488"/>
-          </a:xfrm>
-          <a:prstGeom prst="rect">
-            <a:avLst/>
-          </a:prstGeom>
-          <a:noFill/>
-          <a:ln/>
-        </p:spPr>
-        <p:txBody>
-          <a:bodyPr wrap="square" lIns="0" tIns="0" rIns="0" bIns="0" rtlCol="0" anchor="ctr"/>
-          <a:lstStyle/>
-          <a:p>
-            <a:pPr algn="ctr" indent="0" marL="0">
-              <a:buNone/>
-            </a:pPr>
-            <a:r>
-              <a:rPr lang="en-US" sz="1400" b="1" dirty="0">
-                <a:solidFill>
-                  <a:srgbClr val="0D9488"/>
-                </a:solidFill>
-                <a:latin typeface="Trebuchet MS" pitchFamily="34" charset="0"/>
-                <a:ea typeface="Trebuchet MS" pitchFamily="34" charset="-122"/>
-                <a:cs typeface="Trebuchet MS" pitchFamily="34" charset="-120"/>
-              </a:rPr>
-              <a:t>ment</a:t>
-            </a:r>
-            <a:endParaRPr lang="en-US" sz="1400" dirty="0"/>
-          </a:p>
-        </p:txBody>
-      </p:sp>
-      <p:sp>
-        <p:nvSpPr>
-          <p:cNvPr id="37" name="Shape 35"/>
-          <p:cNvSpPr/>
-          <p:nvPr/>
-        </p:nvSpPr>
-        <p:spPr>
-          <a:xfrm>
-            <a:off x="365760" y="4096512"/>
-            <a:ext cx="1371600" cy="804672"/>
+            <a:off x="1874520" y="4096512"/>
+            <a:ext cx="6903720" cy="804672"/>
           </a:xfrm>
           <a:prstGeom prst="rect">
             <a:avLst>
@@ -14903,85 +14562,19 @@
             </a:avLst>
           </a:prstGeom>
           <a:solidFill>
-            <a:srgbClr val="E2E8F0"/>
+            <a:srgbClr val="F8FAFC"/>
           </a:solidFill>
           <a:ln w="12700">
             <a:solidFill>
               <a:srgbClr val="E2E8F0"/>
             </a:solidFill>
-            <a:prstDash val="solid"/>
-          </a:ln>
-        </p:spPr>
-      </p:sp>
-      <p:sp>
-        <p:nvSpPr>
-          <p:cNvPr id="38" name="Text 36"/>
-          <p:cNvSpPr/>
-          <p:nvPr/>
-        </p:nvSpPr>
-        <p:spPr>
-          <a:xfrm>
-            <a:off x="365760" y="4096512"/>
-            <a:ext cx="1371600" cy="804672"/>
-          </a:xfrm>
-          <a:prstGeom prst="rect">
-            <a:avLst/>
-          </a:prstGeom>
-          <a:noFill/>
-          <a:ln/>
-        </p:spPr>
-        <p:txBody>
-          <a:bodyPr wrap="square" lIns="0" tIns="0" rIns="0" bIns="0" rtlCol="0" anchor="ctr"/>
-          <a:lstStyle/>
-          <a:p>
-            <a:pPr algn="ctr" indent="0" marL="0">
-              <a:buNone/>
-            </a:pPr>
-            <a:r>
-              <a:rPr lang="en-US" sz="1100" b="1" dirty="0">
-                <a:solidFill>
-                  <a:srgbClr val="475569"/>
-                </a:solidFill>
-                <a:latin typeface="Trebuchet MS" pitchFamily="34" charset="0"/>
-                <a:ea typeface="Trebuchet MS" pitchFamily="34" charset="-122"/>
-                <a:cs typeface="Trebuchet MS" pitchFamily="34" charset="-120"/>
-              </a:rPr>
-              <a:t>Phonemes</a:t>
-            </a:r>
-            <a:endParaRPr lang="en-US" sz="1100" dirty="0"/>
-          </a:p>
-        </p:txBody>
-      </p:sp>
-      <p:sp>
-        <p:nvSpPr>
-          <p:cNvPr id="39" name="Shape 37"/>
-          <p:cNvSpPr/>
-          <p:nvPr/>
-        </p:nvSpPr>
-        <p:spPr>
-          <a:xfrm>
-            <a:off x="1874520" y="4096512"/>
-            <a:ext cx="6903720" cy="804672"/>
-          </a:xfrm>
-          <a:prstGeom prst="rect">
-            <a:avLst>
-              <a:gd name="adj" fmla="val 6818"/>
-            </a:avLst>
-          </a:prstGeom>
-          <a:solidFill>
-            <a:srgbClr val="F8FAFC"/>
-          </a:solidFill>
-          <a:ln w="12700">
-            <a:solidFill>
-              <a:srgbClr val="E2E8F0"/>
-            </a:solidFill>
             <a:prstDash val="dash"/>
           </a:ln>
         </p:spPr>
       </p:sp>
       <p:sp>
         <p:nvSpPr>
-          <p:cNvPr id="40" name="Text 38"/>
+          <p:cNvPr id="33" name="Text 31"/>
           <p:cNvSpPr/>
           <p:nvPr/>
         </p:nvSpPr>
@@ -15708,7 +15301,7 @@
                 <a:ea typeface="Trebuchet MS" pitchFamily="34" charset="-122"/>
                 <a:cs typeface="Trebuchet MS" pitchFamily="34" charset="-120"/>
               </a:rPr>
-              <a:t>testament</a:t>
+              <a:t>detest</a:t>
             </a:r>
             <a:endParaRPr lang="en-US" sz="2800" dirty="0"/>
           </a:p>
@@ -15788,7 +15381,7 @@
         </p:nvSpPr>
         <p:spPr>
           <a:xfrm>
-            <a:off x="2221992" y="2258568"/>
+            <a:off x="2938272" y="2258568"/>
             <a:ext cx="1828800" cy="292608"/>
           </a:xfrm>
           <a:prstGeom prst="rect">
@@ -15797,11 +15390,11 @@
             </a:avLst>
           </a:prstGeom>
           <a:solidFill>
-            <a:srgbClr val="CCFBF1"/>
+            <a:srgbClr val="DDD6FE"/>
           </a:solidFill>
           <a:ln w="19050">
             <a:solidFill>
-              <a:srgbClr val="0D9488"/>
+              <a:srgbClr val="7C3AED"/>
             </a:solidFill>
             <a:prstDash val="solid"/>
           </a:ln>
@@ -15822,7 +15415,7 @@
         </p:nvSpPr>
         <p:spPr>
           <a:xfrm>
-            <a:off x="2221992" y="2258568"/>
+            <a:off x="2938272" y="2258568"/>
             <a:ext cx="1828800" cy="292608"/>
           </a:xfrm>
           <a:prstGeom prst="rect">
@@ -15841,13 +15434,13 @@
             <a:r>
               <a:rPr lang="en-US" sz="1300" b="1" dirty="0">
                 <a:solidFill>
-                  <a:srgbClr val="0F766E"/>
+                  <a:srgbClr val="4C1D95"/>
                 </a:solidFill>
                 <a:latin typeface="Trebuchet MS" pitchFamily="34" charset="0"/>
                 <a:ea typeface="Trebuchet MS" pitchFamily="34" charset="-122"/>
                 <a:cs typeface="Trebuchet MS" pitchFamily="34" charset="-120"/>
               </a:rPr>
-              <a:t>test</a:t>
+              <a:t>de</a:t>
             </a:r>
             <a:endParaRPr lang="en-US" sz="1300" dirty="0"/>
           </a:p>
@@ -15861,7 +15454,7 @@
         </p:nvSpPr>
         <p:spPr>
           <a:xfrm>
-            <a:off x="2221992" y="2569464"/>
+            <a:off x="2938272" y="2569464"/>
             <a:ext cx="1828800" cy="201168"/>
           </a:xfrm>
           <a:prstGeom prst="rect">
@@ -15886,7 +15479,7 @@
                 <a:ea typeface="Calibri" pitchFamily="34" charset="-122"/>
                 <a:cs typeface="Calibri" pitchFamily="34" charset="-120"/>
               </a:rPr>
-              <a:t>to try, witness</a:t>
+              <a:t>away from, against</a:t>
             </a:r>
             <a:endParaRPr lang="en-US" sz="850" dirty="0"/>
           </a:p>
@@ -15900,7 +15493,7 @@
         </p:nvSpPr>
         <p:spPr>
           <a:xfrm>
-            <a:off x="4370832" y="2258568"/>
+            <a:off x="5803392" y="2258568"/>
             <a:ext cx="1828800" cy="292608"/>
           </a:xfrm>
           <a:prstGeom prst="rect">
@@ -15909,11 +15502,11 @@
             </a:avLst>
           </a:prstGeom>
           <a:solidFill>
-            <a:srgbClr val="FCE7F3"/>
+            <a:srgbClr val="CCFBF1"/>
           </a:solidFill>
           <a:ln w="19050">
             <a:solidFill>
-              <a:srgbClr val="DB2777"/>
+              <a:srgbClr val="0D9488"/>
             </a:solidFill>
             <a:prstDash val="solid"/>
           </a:ln>
@@ -15934,7 +15527,7 @@
         </p:nvSpPr>
         <p:spPr>
           <a:xfrm>
-            <a:off x="4370832" y="2258568"/>
+            <a:off x="5803392" y="2258568"/>
             <a:ext cx="1828800" cy="292608"/>
           </a:xfrm>
           <a:prstGeom prst="rect">
@@ -15953,13 +15546,13 @@
             <a:r>
               <a:rPr lang="en-US" sz="1300" b="1" dirty="0">
                 <a:solidFill>
-                  <a:srgbClr val="9D174D"/>
+                  <a:srgbClr val="0F766E"/>
                 </a:solidFill>
                 <a:latin typeface="Trebuchet MS" pitchFamily="34" charset="0"/>
                 <a:ea typeface="Trebuchet MS" pitchFamily="34" charset="-122"/>
                 <a:cs typeface="Trebuchet MS" pitchFamily="34" charset="-120"/>
               </a:rPr>
-              <a:t>a</a:t>
+              <a:t>test</a:t>
             </a:r>
             <a:endParaRPr lang="en-US" sz="1300" dirty="0"/>
           </a:p>
@@ -15973,7 +15566,7 @@
         </p:nvSpPr>
         <p:spPr>
           <a:xfrm>
-            <a:off x="4370832" y="2569464"/>
+            <a:off x="5803392" y="2569464"/>
             <a:ext cx="1828800" cy="201168"/>
           </a:xfrm>
           <a:prstGeom prst="rect">
@@ -15998,7 +15591,7 @@
                 <a:ea typeface="Calibri" pitchFamily="34" charset="-122"/>
                 <a:cs typeface="Calibri" pitchFamily="34" charset="-120"/>
               </a:rPr>
-              <a:t>connecting vowel</a:t>
+              <a:t>to try, examine, witness</a:t>
             </a:r>
             <a:endParaRPr lang="en-US" sz="850" dirty="0"/>
           </a:p>
@@ -16006,165 +15599,80 @@
       </p:sp>
       <p:sp>
         <p:nvSpPr>
-          <p:cNvPr id="22" name="Text 20"/>
-          <p:cNvSpPr/>
-          <p:nvPr/>
-        </p:nvSpPr>
-        <p:spPr>
-          <a:xfrm>
-            <a:off x="4370832" y="2752344"/>
-            <a:ext cx="1828800" cy="182880"/>
-          </a:xfrm>
-          <a:prstGeom prst="rect">
-            <a:avLst/>
-          </a:prstGeom>
-          <a:noFill/>
-          <a:ln/>
-        </p:spPr>
-        <p:txBody>
-          <a:bodyPr wrap="square" lIns="0" tIns="0" rIns="0" bIns="0" rtlCol="0" anchor="t"/>
-          <a:lstStyle/>
-          <a:p>
-            <a:pPr algn="ctr" indent="0" marL="0">
-              <a:buNone/>
-            </a:pPr>
-            <a:r>
-              <a:rPr lang="en-US" sz="700" i="1" dirty="0">
-                <a:solidFill>
-                  <a:srgbClr val="94A3B8"/>
-                </a:solidFill>
-                <a:latin typeface="Calibri" pitchFamily="34" charset="0"/>
-                <a:ea typeface="Calibri" pitchFamily="34" charset="-122"/>
-                <a:cs typeface="Calibri" pitchFamily="34" charset="-120"/>
-              </a:rPr>
-              <a:t>links base to suffix</a:t>
-            </a:r>
-            <a:endParaRPr lang="en-US" sz="700" dirty="0"/>
-          </a:p>
-        </p:txBody>
-      </p:sp>
-      <p:sp>
-        <p:nvSpPr>
-          <p:cNvPr id="23" name="Shape 21"/>
-          <p:cNvSpPr/>
-          <p:nvPr/>
-        </p:nvSpPr>
-        <p:spPr>
-          <a:xfrm>
-            <a:off x="6519672" y="2258568"/>
-            <a:ext cx="1828800" cy="292608"/>
+          <p:cNvPr id="22" name="Shape 20"/>
+          <p:cNvSpPr/>
+          <p:nvPr/>
+        </p:nvSpPr>
+        <p:spPr>
+          <a:xfrm>
+            <a:off x="365760" y="3273552"/>
+            <a:ext cx="1371600" cy="658368"/>
           </a:xfrm>
           <a:prstGeom prst="rect">
             <a:avLst>
-              <a:gd name="adj" fmla="val 25000"/>
+              <a:gd name="adj" fmla="val 8333"/>
             </a:avLst>
           </a:prstGeom>
           <a:solidFill>
-            <a:srgbClr val="FCE7F3"/>
-          </a:solidFill>
-          <a:ln w="19050">
-            <a:solidFill>
-              <a:srgbClr val="DB2777"/>
-            </a:solidFill>
-            <a:prstDash val="solid"/>
-          </a:ln>
-          <a:effectLst>
-            <a:outerShdw sx="100000" sy="100000" kx="0" ky="0" algn="bl" rotWithShape="0" blurRad="101600" dist="38100" dir="8100000">
-              <a:srgbClr val="000000">
-                <a:alpha val="12000"/>
-              </a:srgbClr>
-            </a:outerShdw>
-          </a:effectLst>
-        </p:spPr>
-      </p:sp>
-      <p:sp>
-        <p:nvSpPr>
-          <p:cNvPr id="24" name="Text 22"/>
-          <p:cNvSpPr/>
-          <p:nvPr/>
-        </p:nvSpPr>
-        <p:spPr>
-          <a:xfrm>
-            <a:off x="6519672" y="2258568"/>
-            <a:ext cx="1828800" cy="292608"/>
-          </a:xfrm>
-          <a:prstGeom prst="rect">
-            <a:avLst/>
-          </a:prstGeom>
-          <a:noFill/>
-          <a:ln/>
-        </p:spPr>
-        <p:txBody>
-          <a:bodyPr wrap="square" lIns="0" tIns="0" rIns="0" bIns="0" rtlCol="0" anchor="ctr"/>
-          <a:lstStyle/>
-          <a:p>
-            <a:pPr algn="ctr" indent="0" marL="0">
-              <a:buNone/>
-            </a:pPr>
-            <a:r>
-              <a:rPr lang="en-US" sz="1300" b="1" dirty="0">
-                <a:solidFill>
-                  <a:srgbClr val="9D174D"/>
+            <a:srgbClr val="E2E8F0"/>
+          </a:solidFill>
+          <a:ln w="12700">
+            <a:solidFill>
+              <a:srgbClr val="E2E8F0"/>
+            </a:solidFill>
+            <a:prstDash val="solid"/>
+          </a:ln>
+        </p:spPr>
+      </p:sp>
+      <p:sp>
+        <p:nvSpPr>
+          <p:cNvPr id="23" name="Text 21"/>
+          <p:cNvSpPr/>
+          <p:nvPr/>
+        </p:nvSpPr>
+        <p:spPr>
+          <a:xfrm>
+            <a:off x="365760" y="3273552"/>
+            <a:ext cx="1371600" cy="658368"/>
+          </a:xfrm>
+          <a:prstGeom prst="rect">
+            <a:avLst/>
+          </a:prstGeom>
+          <a:noFill/>
+          <a:ln/>
+        </p:spPr>
+        <p:txBody>
+          <a:bodyPr wrap="square" lIns="0" tIns="0" rIns="0" bIns="0" rtlCol="0" anchor="ctr"/>
+          <a:lstStyle/>
+          <a:p>
+            <a:pPr algn="ctr" indent="0" marL="0">
+              <a:buNone/>
+            </a:pPr>
+            <a:r>
+              <a:rPr lang="en-US" sz="1100" b="1" dirty="0">
+                <a:solidFill>
+                  <a:srgbClr val="475569"/>
                 </a:solidFill>
                 <a:latin typeface="Trebuchet MS" pitchFamily="34" charset="0"/>
                 <a:ea typeface="Trebuchet MS" pitchFamily="34" charset="-122"/>
                 <a:cs typeface="Trebuchet MS" pitchFamily="34" charset="-120"/>
               </a:rPr>
-              <a:t>ment</a:t>
-            </a:r>
-            <a:endParaRPr lang="en-US" sz="1300" dirty="0"/>
-          </a:p>
-        </p:txBody>
-      </p:sp>
-      <p:sp>
-        <p:nvSpPr>
-          <p:cNvPr id="25" name="Text 23"/>
-          <p:cNvSpPr/>
-          <p:nvPr/>
-        </p:nvSpPr>
-        <p:spPr>
-          <a:xfrm>
-            <a:off x="6519672" y="2569464"/>
-            <a:ext cx="1828800" cy="201168"/>
-          </a:xfrm>
-          <a:prstGeom prst="rect">
-            <a:avLst/>
-          </a:prstGeom>
-          <a:noFill/>
-          <a:ln/>
-        </p:spPr>
-        <p:txBody>
-          <a:bodyPr wrap="square" lIns="0" tIns="0" rIns="0" bIns="0" rtlCol="0" anchor="t"/>
-          <a:lstStyle/>
-          <a:p>
-            <a:pPr algn="ctr" indent="0" marL="0">
-              <a:buNone/>
-            </a:pPr>
-            <a:r>
-              <a:rPr lang="en-US" sz="850" dirty="0">
-                <a:solidFill>
-                  <a:srgbClr val="475569"/>
-                </a:solidFill>
-                <a:latin typeface="Calibri" pitchFamily="34" charset="0"/>
-                <a:ea typeface="Calibri" pitchFamily="34" charset="-122"/>
-                <a:cs typeface="Calibri" pitchFamily="34" charset="-120"/>
-              </a:rPr>
-              <a:t>result or means of an action</a:t>
-            </a:r>
-            <a:endParaRPr lang="en-US" sz="850" dirty="0"/>
-          </a:p>
-        </p:txBody>
-      </p:sp>
-      <p:sp>
-        <p:nvSpPr>
-          <p:cNvPr id="26" name="Shape 24"/>
-          <p:cNvSpPr/>
-          <p:nvPr/>
-        </p:nvSpPr>
-        <p:spPr>
-          <a:xfrm>
-            <a:off x="365760" y="3273552"/>
-            <a:ext cx="1371600" cy="658368"/>
+              <a:t>Syllables</a:t>
+            </a:r>
+            <a:endParaRPr lang="en-US" sz="1100" dirty="0"/>
+          </a:p>
+        </p:txBody>
+      </p:sp>
+      <p:sp>
+        <p:nvSpPr>
+          <p:cNvPr id="24" name="Shape 22"/>
+          <p:cNvSpPr/>
+          <p:nvPr/>
+        </p:nvSpPr>
+        <p:spPr>
+          <a:xfrm>
+            <a:off x="1874520" y="3273552"/>
+            <a:ext cx="6903720" cy="658368"/>
           </a:xfrm>
           <a:prstGeom prst="rect">
             <a:avLst>
@@ -16172,50 +15680,248 @@
             </a:avLst>
           </a:prstGeom>
           <a:solidFill>
-            <a:srgbClr val="E2E8F0"/>
-          </a:solidFill>
-          <a:ln w="12700">
-            <a:solidFill>
-              <a:srgbClr val="E2E8F0"/>
-            </a:solidFill>
-            <a:prstDash val="solid"/>
-          </a:ln>
-        </p:spPr>
-      </p:sp>
-      <p:sp>
-        <p:nvSpPr>
-          <p:cNvPr id="27" name="Text 25"/>
-          <p:cNvSpPr/>
-          <p:nvPr/>
-        </p:nvSpPr>
-        <p:spPr>
-          <a:xfrm>
-            <a:off x="365760" y="3273552"/>
-            <a:ext cx="1371600" cy="658368"/>
-          </a:xfrm>
-          <a:prstGeom prst="rect">
-            <a:avLst/>
-          </a:prstGeom>
-          <a:noFill/>
-          <a:ln/>
-        </p:spPr>
-        <p:txBody>
-          <a:bodyPr wrap="square" lIns="0" tIns="0" rIns="0" bIns="0" rtlCol="0" anchor="ctr"/>
-          <a:lstStyle/>
-          <a:p>
-            <a:pPr algn="ctr" indent="0" marL="0">
-              <a:buNone/>
-            </a:pPr>
-            <a:r>
-              <a:rPr lang="en-US" sz="1100" b="1" dirty="0">
-                <a:solidFill>
-                  <a:srgbClr val="475569"/>
+            <a:srgbClr val="CCFBF1"/>
+          </a:solidFill>
+          <a:ln w="12700">
+            <a:solidFill>
+              <a:srgbClr val="0D9488"/>
+            </a:solidFill>
+            <a:prstDash val="solid"/>
+          </a:ln>
+        </p:spPr>
+      </p:sp>
+      <p:sp>
+        <p:nvSpPr>
+          <p:cNvPr id="25" name="Shape 23"/>
+          <p:cNvSpPr/>
+          <p:nvPr/>
+        </p:nvSpPr>
+        <p:spPr>
+          <a:xfrm>
+            <a:off x="2999232" y="3364992"/>
+            <a:ext cx="1645920" cy="475488"/>
+          </a:xfrm>
+          <a:prstGeom prst="rect">
+            <a:avLst>
+              <a:gd name="adj" fmla="val 9615"/>
+            </a:avLst>
+          </a:prstGeom>
+          <a:solidFill>
+            <a:srgbClr val="FFFFFF"/>
+          </a:solidFill>
+          <a:ln w="12700">
+            <a:solidFill>
+              <a:srgbClr val="0D9488"/>
+            </a:solidFill>
+            <a:prstDash val="solid"/>
+          </a:ln>
+        </p:spPr>
+      </p:sp>
+      <p:sp>
+        <p:nvSpPr>
+          <p:cNvPr id="26" name="Text 24"/>
+          <p:cNvSpPr/>
+          <p:nvPr/>
+        </p:nvSpPr>
+        <p:spPr>
+          <a:xfrm>
+            <a:off x="2999232" y="3364992"/>
+            <a:ext cx="1645920" cy="475488"/>
+          </a:xfrm>
+          <a:prstGeom prst="rect">
+            <a:avLst/>
+          </a:prstGeom>
+          <a:noFill/>
+          <a:ln/>
+        </p:spPr>
+        <p:txBody>
+          <a:bodyPr wrap="square" lIns="0" tIns="0" rIns="0" bIns="0" rtlCol="0" anchor="ctr"/>
+          <a:lstStyle/>
+          <a:p>
+            <a:pPr algn="ctr" indent="0" marL="0">
+              <a:buNone/>
+            </a:pPr>
+            <a:r>
+              <a:rPr lang="en-US" sz="1400" b="1" dirty="0">
+                <a:solidFill>
+                  <a:srgbClr val="0D9488"/>
                 </a:solidFill>
                 <a:latin typeface="Trebuchet MS" pitchFamily="34" charset="0"/>
                 <a:ea typeface="Trebuchet MS" pitchFamily="34" charset="-122"/>
                 <a:cs typeface="Trebuchet MS" pitchFamily="34" charset="-120"/>
               </a:rPr>
-              <a:t>Syllables</a:t>
+              <a:t>de</a:t>
+            </a:r>
+            <a:endParaRPr lang="en-US" sz="1400" dirty="0"/>
+          </a:p>
+        </p:txBody>
+      </p:sp>
+      <p:sp>
+        <p:nvSpPr>
+          <p:cNvPr id="27" name="Text 25"/>
+          <p:cNvSpPr/>
+          <p:nvPr/>
+        </p:nvSpPr>
+        <p:spPr>
+          <a:xfrm>
+            <a:off x="4645152" y="3364992"/>
+            <a:ext cx="1097280" cy="475488"/>
+          </a:xfrm>
+          <a:prstGeom prst="rect">
+            <a:avLst/>
+          </a:prstGeom>
+          <a:noFill/>
+          <a:ln/>
+        </p:spPr>
+        <p:txBody>
+          <a:bodyPr wrap="square" lIns="0" tIns="0" rIns="0" bIns="0" rtlCol="0" anchor="ctr"/>
+          <a:lstStyle/>
+          <a:p>
+            <a:pPr algn="ctr" indent="0" marL="0">
+              <a:buNone/>
+            </a:pPr>
+            <a:r>
+              <a:rPr lang="en-US" sz="1600" b="1" dirty="0">
+                <a:solidFill>
+                  <a:srgbClr val="0D9488"/>
+                </a:solidFill>
+                <a:latin typeface="Trebuchet MS" pitchFamily="34" charset="0"/>
+                <a:ea typeface="Trebuchet MS" pitchFamily="34" charset="-122"/>
+                <a:cs typeface="Trebuchet MS" pitchFamily="34" charset="-120"/>
+              </a:rPr>
+              <a:t>·</a:t>
+            </a:r>
+            <a:endParaRPr lang="en-US" sz="1600" dirty="0"/>
+          </a:p>
+        </p:txBody>
+      </p:sp>
+      <p:sp>
+        <p:nvSpPr>
+          <p:cNvPr id="28" name="Shape 26"/>
+          <p:cNvSpPr/>
+          <p:nvPr/>
+        </p:nvSpPr>
+        <p:spPr>
+          <a:xfrm>
+            <a:off x="5742432" y="3364992"/>
+            <a:ext cx="1645920" cy="475488"/>
+          </a:xfrm>
+          <a:prstGeom prst="rect">
+            <a:avLst>
+              <a:gd name="adj" fmla="val 9615"/>
+            </a:avLst>
+          </a:prstGeom>
+          <a:solidFill>
+            <a:srgbClr val="FFFFFF"/>
+          </a:solidFill>
+          <a:ln w="12700">
+            <a:solidFill>
+              <a:srgbClr val="0D9488"/>
+            </a:solidFill>
+            <a:prstDash val="solid"/>
+          </a:ln>
+        </p:spPr>
+      </p:sp>
+      <p:sp>
+        <p:nvSpPr>
+          <p:cNvPr id="29" name="Text 27"/>
+          <p:cNvSpPr/>
+          <p:nvPr/>
+        </p:nvSpPr>
+        <p:spPr>
+          <a:xfrm>
+            <a:off x="5742432" y="3364992"/>
+            <a:ext cx="1645920" cy="475488"/>
+          </a:xfrm>
+          <a:prstGeom prst="rect">
+            <a:avLst/>
+          </a:prstGeom>
+          <a:noFill/>
+          <a:ln/>
+        </p:spPr>
+        <p:txBody>
+          <a:bodyPr wrap="square" lIns="0" tIns="0" rIns="0" bIns="0" rtlCol="0" anchor="ctr"/>
+          <a:lstStyle/>
+          <a:p>
+            <a:pPr algn="ctr" indent="0" marL="0">
+              <a:buNone/>
+            </a:pPr>
+            <a:r>
+              <a:rPr lang="en-US" sz="1400" b="1" dirty="0">
+                <a:solidFill>
+                  <a:srgbClr val="0D9488"/>
+                </a:solidFill>
+                <a:latin typeface="Trebuchet MS" pitchFamily="34" charset="0"/>
+                <a:ea typeface="Trebuchet MS" pitchFamily="34" charset="-122"/>
+                <a:cs typeface="Trebuchet MS" pitchFamily="34" charset="-120"/>
+              </a:rPr>
+              <a:t>test</a:t>
+            </a:r>
+            <a:endParaRPr lang="en-US" sz="1400" dirty="0"/>
+          </a:p>
+        </p:txBody>
+      </p:sp>
+      <p:sp>
+        <p:nvSpPr>
+          <p:cNvPr id="30" name="Shape 28"/>
+          <p:cNvSpPr/>
+          <p:nvPr/>
+        </p:nvSpPr>
+        <p:spPr>
+          <a:xfrm>
+            <a:off x="365760" y="4096512"/>
+            <a:ext cx="1371600" cy="804672"/>
+          </a:xfrm>
+          <a:prstGeom prst="rect">
+            <a:avLst>
+              <a:gd name="adj" fmla="val 6818"/>
+            </a:avLst>
+          </a:prstGeom>
+          <a:solidFill>
+            <a:srgbClr val="E2E8F0"/>
+          </a:solidFill>
+          <a:ln w="12700">
+            <a:solidFill>
+              <a:srgbClr val="E2E8F0"/>
+            </a:solidFill>
+            <a:prstDash val="solid"/>
+          </a:ln>
+        </p:spPr>
+      </p:sp>
+      <p:sp>
+        <p:nvSpPr>
+          <p:cNvPr id="31" name="Text 29"/>
+          <p:cNvSpPr/>
+          <p:nvPr/>
+        </p:nvSpPr>
+        <p:spPr>
+          <a:xfrm>
+            <a:off x="365760" y="4096512"/>
+            <a:ext cx="1371600" cy="804672"/>
+          </a:xfrm>
+          <a:prstGeom prst="rect">
+            <a:avLst/>
+          </a:prstGeom>
+          <a:noFill/>
+          <a:ln/>
+        </p:spPr>
+        <p:txBody>
+          <a:bodyPr wrap="square" lIns="0" tIns="0" rIns="0" bIns="0" rtlCol="0" anchor="ctr"/>
+          <a:lstStyle/>
+          <a:p>
+            <a:pPr algn="ctr" indent="0" marL="0">
+              <a:buNone/>
+            </a:pPr>
+            <a:r>
+              <a:rPr lang="en-US" sz="1100" b="1" dirty="0">
+                <a:solidFill>
+                  <a:srgbClr val="475569"/>
+                </a:solidFill>
+                <a:latin typeface="Trebuchet MS" pitchFamily="34" charset="0"/>
+                <a:ea typeface="Trebuchet MS" pitchFamily="34" charset="-122"/>
+                <a:cs typeface="Trebuchet MS" pitchFamily="34" charset="-120"/>
+              </a:rPr>
+              <a:t>Phonemes</a:t>
             </a:r>
             <a:endParaRPr lang="en-US" sz="1100" dirty="0"/>
           </a:p>
@@ -16223,13 +15929,13 @@
       </p:sp>
       <p:sp>
         <p:nvSpPr>
-          <p:cNvPr id="28" name="Shape 26"/>
-          <p:cNvSpPr/>
-          <p:nvPr/>
-        </p:nvSpPr>
-        <p:spPr>
-          <a:xfrm>
-            <a:off x="1874520" y="3273552"/>
+          <p:cNvPr id="32" name="Shape 30"/>
+          <p:cNvSpPr/>
+          <p:nvPr/>
+        </p:nvSpPr>
+        <p:spPr>
+          <a:xfrm>
+            <a:off x="1874520" y="4096512"/>
             <a:ext cx="6903720" cy="658368"/>
           </a:xfrm>
           <a:prstGeom prst="rect">
@@ -16238,30 +15944,30 @@
             </a:avLst>
           </a:prstGeom>
           <a:solidFill>
-            <a:srgbClr val="CCFBF1"/>
-          </a:solidFill>
-          <a:ln w="12700">
-            <a:solidFill>
-              <a:srgbClr val="0D9488"/>
-            </a:solidFill>
-            <a:prstDash val="solid"/>
-          </a:ln>
-        </p:spPr>
-      </p:sp>
-      <p:sp>
-        <p:nvSpPr>
-          <p:cNvPr id="29" name="Shape 27"/>
-          <p:cNvSpPr/>
-          <p:nvPr/>
-        </p:nvSpPr>
-        <p:spPr>
-          <a:xfrm>
-            <a:off x="2313432" y="3364992"/>
-            <a:ext cx="1645920" cy="475488"/>
+            <a:srgbClr val="FCE7F3"/>
+          </a:solidFill>
+          <a:ln w="12700">
+            <a:solidFill>
+              <a:srgbClr val="DB2777"/>
+            </a:solidFill>
+            <a:prstDash val="solid"/>
+          </a:ln>
+        </p:spPr>
+      </p:sp>
+      <p:sp>
+        <p:nvSpPr>
+          <p:cNvPr id="33" name="Shape 31"/>
+          <p:cNvSpPr/>
+          <p:nvPr/>
+        </p:nvSpPr>
+        <p:spPr>
+          <a:xfrm>
+            <a:off x="2254649" y="4169664"/>
+            <a:ext cx="685800" cy="475488"/>
           </a:xfrm>
           <a:prstGeom prst="rect">
             <a:avLst>
-              <a:gd name="adj" fmla="val 9615"/>
+              <a:gd name="adj" fmla="val 7692"/>
             </a:avLst>
           </a:prstGeom>
           <a:solidFill>
@@ -16269,104 +15975,131 @@
           </a:solidFill>
           <a:ln w="12700">
             <a:solidFill>
-              <a:srgbClr val="0D9488"/>
-            </a:solidFill>
-            <a:prstDash val="solid"/>
-          </a:ln>
-        </p:spPr>
-      </p:sp>
-      <p:sp>
-        <p:nvSpPr>
-          <p:cNvPr id="30" name="Text 28"/>
-          <p:cNvSpPr/>
-          <p:nvPr/>
-        </p:nvSpPr>
-        <p:spPr>
-          <a:xfrm>
-            <a:off x="2313432" y="3364992"/>
-            <a:ext cx="1645920" cy="475488"/>
-          </a:xfrm>
-          <a:prstGeom prst="rect">
-            <a:avLst/>
-          </a:prstGeom>
-          <a:noFill/>
-          <a:ln/>
-        </p:spPr>
-        <p:txBody>
-          <a:bodyPr wrap="square" lIns="0" tIns="0" rIns="0" bIns="0" rtlCol="0" anchor="ctr"/>
-          <a:lstStyle/>
-          <a:p>
-            <a:pPr algn="ctr" indent="0" marL="0">
-              <a:buNone/>
-            </a:pPr>
-            <a:r>
-              <a:rPr lang="en-US" sz="1400" b="1" dirty="0">
-                <a:solidFill>
-                  <a:srgbClr val="0D9488"/>
+              <a:srgbClr val="DB2777"/>
+            </a:solidFill>
+            <a:prstDash val="solid"/>
+          </a:ln>
+        </p:spPr>
+      </p:sp>
+      <p:sp>
+        <p:nvSpPr>
+          <p:cNvPr id="34" name="Text 32"/>
+          <p:cNvSpPr/>
+          <p:nvPr/>
+        </p:nvSpPr>
+        <p:spPr>
+          <a:xfrm>
+            <a:off x="2254649" y="4169664"/>
+            <a:ext cx="685800" cy="475488"/>
+          </a:xfrm>
+          <a:prstGeom prst="rect">
+            <a:avLst/>
+          </a:prstGeom>
+          <a:noFill/>
+          <a:ln/>
+        </p:spPr>
+        <p:txBody>
+          <a:bodyPr wrap="square" lIns="0" tIns="0" rIns="0" bIns="0" rtlCol="0" anchor="ctr"/>
+          <a:lstStyle/>
+          <a:p>
+            <a:pPr algn="ctr" indent="0" marL="0">
+              <a:buNone/>
+            </a:pPr>
+            <a:r>
+              <a:rPr lang="en-US" sz="900" b="1" dirty="0">
+                <a:solidFill>
+                  <a:srgbClr val="9D174D"/>
                 </a:solidFill>
                 <a:latin typeface="Trebuchet MS" pitchFamily="34" charset="0"/>
                 <a:ea typeface="Trebuchet MS" pitchFamily="34" charset="-122"/>
                 <a:cs typeface="Trebuchet MS" pitchFamily="34" charset="-120"/>
               </a:rPr>
-              <a:t>tes</a:t>
-            </a:r>
-            <a:endParaRPr lang="en-US" sz="1400" dirty="0"/>
-          </a:p>
-        </p:txBody>
-      </p:sp>
-      <p:sp>
-        <p:nvSpPr>
-          <p:cNvPr id="31" name="Text 29"/>
-          <p:cNvSpPr/>
-          <p:nvPr/>
-        </p:nvSpPr>
-        <p:spPr>
-          <a:xfrm>
-            <a:off x="3959352" y="3364992"/>
-            <a:ext cx="411480" cy="475488"/>
-          </a:xfrm>
-          <a:prstGeom prst="rect">
-            <a:avLst/>
-          </a:prstGeom>
-          <a:noFill/>
-          <a:ln/>
-        </p:spPr>
-        <p:txBody>
-          <a:bodyPr wrap="square" lIns="0" tIns="0" rIns="0" bIns="0" rtlCol="0" anchor="ctr"/>
-          <a:lstStyle/>
-          <a:p>
-            <a:pPr algn="ctr" indent="0" marL="0">
-              <a:buNone/>
-            </a:pPr>
-            <a:r>
-              <a:rPr lang="en-US" sz="1600" b="1" dirty="0">
-                <a:solidFill>
-                  <a:srgbClr val="0D9488"/>
+              <a:t>d</a:t>
+            </a:r>
+            <a:endParaRPr lang="en-US" sz="900" dirty="0"/>
+          </a:p>
+        </p:txBody>
+      </p:sp>
+      <p:sp>
+        <p:nvSpPr>
+          <p:cNvPr id="35" name="Shape 33"/>
+          <p:cNvSpPr/>
+          <p:nvPr/>
+        </p:nvSpPr>
+        <p:spPr>
+          <a:xfrm>
+            <a:off x="3293146" y="4169664"/>
+            <a:ext cx="685800" cy="475488"/>
+          </a:xfrm>
+          <a:prstGeom prst="rect">
+            <a:avLst>
+              <a:gd name="adj" fmla="val 7692"/>
+            </a:avLst>
+          </a:prstGeom>
+          <a:solidFill>
+            <a:srgbClr val="FFFFFF"/>
+          </a:solidFill>
+          <a:ln w="12700">
+            <a:solidFill>
+              <a:srgbClr val="DB2777"/>
+            </a:solidFill>
+            <a:prstDash val="solid"/>
+          </a:ln>
+        </p:spPr>
+      </p:sp>
+      <p:sp>
+        <p:nvSpPr>
+          <p:cNvPr id="36" name="Text 34"/>
+          <p:cNvSpPr/>
+          <p:nvPr/>
+        </p:nvSpPr>
+        <p:spPr>
+          <a:xfrm>
+            <a:off x="3293146" y="4169664"/>
+            <a:ext cx="685800" cy="475488"/>
+          </a:xfrm>
+          <a:prstGeom prst="rect">
+            <a:avLst/>
+          </a:prstGeom>
+          <a:noFill/>
+          <a:ln/>
+        </p:spPr>
+        <p:txBody>
+          <a:bodyPr wrap="square" lIns="0" tIns="0" rIns="0" bIns="0" rtlCol="0" anchor="ctr"/>
+          <a:lstStyle/>
+          <a:p>
+            <a:pPr algn="ctr" indent="0" marL="0">
+              <a:buNone/>
+            </a:pPr>
+            <a:r>
+              <a:rPr lang="en-US" sz="900" b="1" dirty="0">
+                <a:solidFill>
+                  <a:srgbClr val="9D174D"/>
                 </a:solidFill>
                 <a:latin typeface="Trebuchet MS" pitchFamily="34" charset="0"/>
                 <a:ea typeface="Trebuchet MS" pitchFamily="34" charset="-122"/>
                 <a:cs typeface="Trebuchet MS" pitchFamily="34" charset="-120"/>
               </a:rPr>
-              <a:t>·</a:t>
-            </a:r>
-            <a:endParaRPr lang="en-US" sz="1600" dirty="0"/>
-          </a:p>
-        </p:txBody>
-      </p:sp>
-      <p:sp>
-        <p:nvSpPr>
-          <p:cNvPr id="32" name="Shape 30"/>
-          <p:cNvSpPr/>
-          <p:nvPr/>
-        </p:nvSpPr>
-        <p:spPr>
-          <a:xfrm>
-            <a:off x="4370832" y="3364992"/>
-            <a:ext cx="1645920" cy="475488"/>
+              <a:t>e</a:t>
+            </a:r>
+            <a:endParaRPr lang="en-US" sz="900" dirty="0"/>
+          </a:p>
+        </p:txBody>
+      </p:sp>
+      <p:sp>
+        <p:nvSpPr>
+          <p:cNvPr id="37" name="Shape 35"/>
+          <p:cNvSpPr/>
+          <p:nvPr/>
+        </p:nvSpPr>
+        <p:spPr>
+          <a:xfrm>
+            <a:off x="4331643" y="4169664"/>
+            <a:ext cx="685800" cy="475488"/>
           </a:xfrm>
           <a:prstGeom prst="rect">
             <a:avLst>
-              <a:gd name="adj" fmla="val 9615"/>
+              <a:gd name="adj" fmla="val 7692"/>
             </a:avLst>
           </a:prstGeom>
           <a:solidFill>
@@ -16374,104 +16107,131 @@
           </a:solidFill>
           <a:ln w="12700">
             <a:solidFill>
-              <a:srgbClr val="0D9488"/>
-            </a:solidFill>
-            <a:prstDash val="solid"/>
-          </a:ln>
-        </p:spPr>
-      </p:sp>
-      <p:sp>
-        <p:nvSpPr>
-          <p:cNvPr id="33" name="Text 31"/>
-          <p:cNvSpPr/>
-          <p:nvPr/>
-        </p:nvSpPr>
-        <p:spPr>
-          <a:xfrm>
-            <a:off x="4370832" y="3364992"/>
-            <a:ext cx="1645920" cy="475488"/>
-          </a:xfrm>
-          <a:prstGeom prst="rect">
-            <a:avLst/>
-          </a:prstGeom>
-          <a:noFill/>
-          <a:ln/>
-        </p:spPr>
-        <p:txBody>
-          <a:bodyPr wrap="square" lIns="0" tIns="0" rIns="0" bIns="0" rtlCol="0" anchor="ctr"/>
-          <a:lstStyle/>
-          <a:p>
-            <a:pPr algn="ctr" indent="0" marL="0">
-              <a:buNone/>
-            </a:pPr>
-            <a:r>
-              <a:rPr lang="en-US" sz="1400" b="1" dirty="0">
-                <a:solidFill>
-                  <a:srgbClr val="0D9488"/>
+              <a:srgbClr val="DB2777"/>
+            </a:solidFill>
+            <a:prstDash val="solid"/>
+          </a:ln>
+        </p:spPr>
+      </p:sp>
+      <p:sp>
+        <p:nvSpPr>
+          <p:cNvPr id="38" name="Text 36"/>
+          <p:cNvSpPr/>
+          <p:nvPr/>
+        </p:nvSpPr>
+        <p:spPr>
+          <a:xfrm>
+            <a:off x="4331643" y="4169664"/>
+            <a:ext cx="685800" cy="475488"/>
+          </a:xfrm>
+          <a:prstGeom prst="rect">
+            <a:avLst/>
+          </a:prstGeom>
+          <a:noFill/>
+          <a:ln/>
+        </p:spPr>
+        <p:txBody>
+          <a:bodyPr wrap="square" lIns="0" tIns="0" rIns="0" bIns="0" rtlCol="0" anchor="ctr"/>
+          <a:lstStyle/>
+          <a:p>
+            <a:pPr algn="ctr" indent="0" marL="0">
+              <a:buNone/>
+            </a:pPr>
+            <a:r>
+              <a:rPr lang="en-US" sz="900" b="1" dirty="0">
+                <a:solidFill>
+                  <a:srgbClr val="9D174D"/>
                 </a:solidFill>
                 <a:latin typeface="Trebuchet MS" pitchFamily="34" charset="0"/>
                 <a:ea typeface="Trebuchet MS" pitchFamily="34" charset="-122"/>
                 <a:cs typeface="Trebuchet MS" pitchFamily="34" charset="-120"/>
               </a:rPr>
-              <a:t>ta</a:t>
-            </a:r>
-            <a:endParaRPr lang="en-US" sz="1400" dirty="0"/>
-          </a:p>
-        </p:txBody>
-      </p:sp>
-      <p:sp>
-        <p:nvSpPr>
-          <p:cNvPr id="34" name="Text 32"/>
-          <p:cNvSpPr/>
-          <p:nvPr/>
-        </p:nvSpPr>
-        <p:spPr>
-          <a:xfrm>
-            <a:off x="6016752" y="3364992"/>
-            <a:ext cx="411480" cy="475488"/>
-          </a:xfrm>
-          <a:prstGeom prst="rect">
-            <a:avLst/>
-          </a:prstGeom>
-          <a:noFill/>
-          <a:ln/>
-        </p:spPr>
-        <p:txBody>
-          <a:bodyPr wrap="square" lIns="0" tIns="0" rIns="0" bIns="0" rtlCol="0" anchor="ctr"/>
-          <a:lstStyle/>
-          <a:p>
-            <a:pPr algn="ctr" indent="0" marL="0">
-              <a:buNone/>
-            </a:pPr>
-            <a:r>
-              <a:rPr lang="en-US" sz="1600" b="1" dirty="0">
-                <a:solidFill>
-                  <a:srgbClr val="0D9488"/>
+              <a:t>t</a:t>
+            </a:r>
+            <a:endParaRPr lang="en-US" sz="900" dirty="0"/>
+          </a:p>
+        </p:txBody>
+      </p:sp>
+      <p:sp>
+        <p:nvSpPr>
+          <p:cNvPr id="39" name="Shape 37"/>
+          <p:cNvSpPr/>
+          <p:nvPr/>
+        </p:nvSpPr>
+        <p:spPr>
+          <a:xfrm>
+            <a:off x="5370141" y="4169664"/>
+            <a:ext cx="685800" cy="475488"/>
+          </a:xfrm>
+          <a:prstGeom prst="rect">
+            <a:avLst>
+              <a:gd name="adj" fmla="val 7692"/>
+            </a:avLst>
+          </a:prstGeom>
+          <a:solidFill>
+            <a:srgbClr val="FFFFFF"/>
+          </a:solidFill>
+          <a:ln w="12700">
+            <a:solidFill>
+              <a:srgbClr val="DB2777"/>
+            </a:solidFill>
+            <a:prstDash val="solid"/>
+          </a:ln>
+        </p:spPr>
+      </p:sp>
+      <p:sp>
+        <p:nvSpPr>
+          <p:cNvPr id="40" name="Text 38"/>
+          <p:cNvSpPr/>
+          <p:nvPr/>
+        </p:nvSpPr>
+        <p:spPr>
+          <a:xfrm>
+            <a:off x="5370141" y="4169664"/>
+            <a:ext cx="685800" cy="475488"/>
+          </a:xfrm>
+          <a:prstGeom prst="rect">
+            <a:avLst/>
+          </a:prstGeom>
+          <a:noFill/>
+          <a:ln/>
+        </p:spPr>
+        <p:txBody>
+          <a:bodyPr wrap="square" lIns="0" tIns="0" rIns="0" bIns="0" rtlCol="0" anchor="ctr"/>
+          <a:lstStyle/>
+          <a:p>
+            <a:pPr algn="ctr" indent="0" marL="0">
+              <a:buNone/>
+            </a:pPr>
+            <a:r>
+              <a:rPr lang="en-US" sz="900" b="1" dirty="0">
+                <a:solidFill>
+                  <a:srgbClr val="9D174D"/>
                 </a:solidFill>
                 <a:latin typeface="Trebuchet MS" pitchFamily="34" charset="0"/>
                 <a:ea typeface="Trebuchet MS" pitchFamily="34" charset="-122"/>
                 <a:cs typeface="Trebuchet MS" pitchFamily="34" charset="-120"/>
               </a:rPr>
-              <a:t>·</a:t>
-            </a:r>
-            <a:endParaRPr lang="en-US" sz="1600" dirty="0"/>
-          </a:p>
-        </p:txBody>
-      </p:sp>
-      <p:sp>
-        <p:nvSpPr>
-          <p:cNvPr id="35" name="Shape 33"/>
-          <p:cNvSpPr/>
-          <p:nvPr/>
-        </p:nvSpPr>
-        <p:spPr>
-          <a:xfrm>
-            <a:off x="6428232" y="3364992"/>
-            <a:ext cx="1645920" cy="475488"/>
+              <a:t>e</a:t>
+            </a:r>
+            <a:endParaRPr lang="en-US" sz="900" dirty="0"/>
+          </a:p>
+        </p:txBody>
+      </p:sp>
+      <p:sp>
+        <p:nvSpPr>
+          <p:cNvPr id="41" name="Shape 39"/>
+          <p:cNvSpPr/>
+          <p:nvPr/>
+        </p:nvSpPr>
+        <p:spPr>
+          <a:xfrm>
+            <a:off x="6408638" y="4169664"/>
+            <a:ext cx="685800" cy="475488"/>
           </a:xfrm>
           <a:prstGeom prst="rect">
             <a:avLst>
-              <a:gd name="adj" fmla="val 9615"/>
+              <a:gd name="adj" fmla="val 7692"/>
             </a:avLst>
           </a:prstGeom>
           <a:solidFill>
@@ -16479,154 +16239,61 @@
           </a:solidFill>
           <a:ln w="12700">
             <a:solidFill>
-              <a:srgbClr val="0D9488"/>
-            </a:solidFill>
-            <a:prstDash val="solid"/>
-          </a:ln>
-        </p:spPr>
-      </p:sp>
-      <p:sp>
-        <p:nvSpPr>
-          <p:cNvPr id="36" name="Text 34"/>
-          <p:cNvSpPr/>
-          <p:nvPr/>
-        </p:nvSpPr>
-        <p:spPr>
-          <a:xfrm>
-            <a:off x="6428232" y="3364992"/>
-            <a:ext cx="1645920" cy="475488"/>
-          </a:xfrm>
-          <a:prstGeom prst="rect">
-            <a:avLst/>
-          </a:prstGeom>
-          <a:noFill/>
-          <a:ln/>
-        </p:spPr>
-        <p:txBody>
-          <a:bodyPr wrap="square" lIns="0" tIns="0" rIns="0" bIns="0" rtlCol="0" anchor="ctr"/>
-          <a:lstStyle/>
-          <a:p>
-            <a:pPr algn="ctr" indent="0" marL="0">
-              <a:buNone/>
-            </a:pPr>
-            <a:r>
-              <a:rPr lang="en-US" sz="1400" b="1" dirty="0">
-                <a:solidFill>
-                  <a:srgbClr val="0D9488"/>
+              <a:srgbClr val="DB2777"/>
+            </a:solidFill>
+            <a:prstDash val="solid"/>
+          </a:ln>
+        </p:spPr>
+      </p:sp>
+      <p:sp>
+        <p:nvSpPr>
+          <p:cNvPr id="42" name="Text 40"/>
+          <p:cNvSpPr/>
+          <p:nvPr/>
+        </p:nvSpPr>
+        <p:spPr>
+          <a:xfrm>
+            <a:off x="6408638" y="4169664"/>
+            <a:ext cx="685800" cy="475488"/>
+          </a:xfrm>
+          <a:prstGeom prst="rect">
+            <a:avLst/>
+          </a:prstGeom>
+          <a:noFill/>
+          <a:ln/>
+        </p:spPr>
+        <p:txBody>
+          <a:bodyPr wrap="square" lIns="0" tIns="0" rIns="0" bIns="0" rtlCol="0" anchor="ctr"/>
+          <a:lstStyle/>
+          <a:p>
+            <a:pPr algn="ctr" indent="0" marL="0">
+              <a:buNone/>
+            </a:pPr>
+            <a:r>
+              <a:rPr lang="en-US" sz="900" b="1" dirty="0">
+                <a:solidFill>
+                  <a:srgbClr val="9D174D"/>
                 </a:solidFill>
                 <a:latin typeface="Trebuchet MS" pitchFamily="34" charset="0"/>
                 <a:ea typeface="Trebuchet MS" pitchFamily="34" charset="-122"/>
                 <a:cs typeface="Trebuchet MS" pitchFamily="34" charset="-120"/>
               </a:rPr>
-              <a:t>ment</a:t>
-            </a:r>
-            <a:endParaRPr lang="en-US" sz="1400" dirty="0"/>
-          </a:p>
-        </p:txBody>
-      </p:sp>
-      <p:sp>
-        <p:nvSpPr>
-          <p:cNvPr id="37" name="Shape 35"/>
-          <p:cNvSpPr/>
-          <p:nvPr/>
-        </p:nvSpPr>
-        <p:spPr>
-          <a:xfrm>
-            <a:off x="365760" y="4096512"/>
-            <a:ext cx="1371600" cy="804672"/>
-          </a:xfrm>
-          <a:prstGeom prst="rect">
-            <a:avLst>
-              <a:gd name="adj" fmla="val 6818"/>
-            </a:avLst>
-          </a:prstGeom>
-          <a:solidFill>
-            <a:srgbClr val="E2E8F0"/>
-          </a:solidFill>
-          <a:ln w="12700">
-            <a:solidFill>
-              <a:srgbClr val="E2E8F0"/>
-            </a:solidFill>
-            <a:prstDash val="solid"/>
-          </a:ln>
-        </p:spPr>
-      </p:sp>
-      <p:sp>
-        <p:nvSpPr>
-          <p:cNvPr id="38" name="Text 36"/>
-          <p:cNvSpPr/>
-          <p:nvPr/>
-        </p:nvSpPr>
-        <p:spPr>
-          <a:xfrm>
-            <a:off x="365760" y="4096512"/>
-            <a:ext cx="1371600" cy="804672"/>
-          </a:xfrm>
-          <a:prstGeom prst="rect">
-            <a:avLst/>
-          </a:prstGeom>
-          <a:noFill/>
-          <a:ln/>
-        </p:spPr>
-        <p:txBody>
-          <a:bodyPr wrap="square" lIns="0" tIns="0" rIns="0" bIns="0" rtlCol="0" anchor="ctr"/>
-          <a:lstStyle/>
-          <a:p>
-            <a:pPr algn="ctr" indent="0" marL="0">
-              <a:buNone/>
-            </a:pPr>
-            <a:r>
-              <a:rPr lang="en-US" sz="1100" b="1" dirty="0">
-                <a:solidFill>
-                  <a:srgbClr val="475569"/>
-                </a:solidFill>
-                <a:latin typeface="Trebuchet MS" pitchFamily="34" charset="0"/>
-                <a:ea typeface="Trebuchet MS" pitchFamily="34" charset="-122"/>
-                <a:cs typeface="Trebuchet MS" pitchFamily="34" charset="-120"/>
-              </a:rPr>
-              <a:t>Phonemes</a:t>
-            </a:r>
-            <a:endParaRPr lang="en-US" sz="1100" dirty="0"/>
-          </a:p>
-        </p:txBody>
-      </p:sp>
-      <p:sp>
-        <p:nvSpPr>
-          <p:cNvPr id="39" name="Shape 37"/>
-          <p:cNvSpPr/>
-          <p:nvPr/>
-        </p:nvSpPr>
-        <p:spPr>
-          <a:xfrm>
-            <a:off x="1874520" y="4096512"/>
-            <a:ext cx="6903720" cy="658368"/>
-          </a:xfrm>
-          <a:prstGeom prst="rect">
-            <a:avLst>
-              <a:gd name="adj" fmla="val 8333"/>
-            </a:avLst>
-          </a:prstGeom>
-          <a:solidFill>
-            <a:srgbClr val="FCE7F3"/>
-          </a:solidFill>
-          <a:ln w="12700">
-            <a:solidFill>
-              <a:srgbClr val="DB2777"/>
-            </a:solidFill>
-            <a:prstDash val="solid"/>
-          </a:ln>
-        </p:spPr>
-      </p:sp>
-      <p:sp>
-        <p:nvSpPr>
-          <p:cNvPr id="40" name="Shape 38"/>
-          <p:cNvSpPr/>
-          <p:nvPr/>
-        </p:nvSpPr>
-        <p:spPr>
-          <a:xfrm>
-            <a:off x="1951330" y="4169664"/>
-            <a:ext cx="676656" cy="475488"/>
+              <a:t>s</a:t>
+            </a:r>
+            <a:endParaRPr lang="en-US" sz="900" dirty="0"/>
+          </a:p>
+        </p:txBody>
+      </p:sp>
+      <p:sp>
+        <p:nvSpPr>
+          <p:cNvPr id="43" name="Shape 41"/>
+          <p:cNvSpPr/>
+          <p:nvPr/>
+        </p:nvSpPr>
+        <p:spPr>
+          <a:xfrm>
+            <a:off x="7447135" y="4169664"/>
+            <a:ext cx="685800" cy="475488"/>
           </a:xfrm>
           <a:prstGeom prst="rect">
             <a:avLst>
@@ -16646,542 +16313,14 @@
       </p:sp>
       <p:sp>
         <p:nvSpPr>
-          <p:cNvPr id="41" name="Text 39"/>
-          <p:cNvSpPr/>
-          <p:nvPr/>
-        </p:nvSpPr>
-        <p:spPr>
-          <a:xfrm>
-            <a:off x="1951330" y="4169664"/>
-            <a:ext cx="676656" cy="475488"/>
-          </a:xfrm>
-          <a:prstGeom prst="rect">
-            <a:avLst/>
-          </a:prstGeom>
-          <a:noFill/>
-          <a:ln/>
-        </p:spPr>
-        <p:txBody>
-          <a:bodyPr wrap="square" lIns="0" tIns="0" rIns="0" bIns="0" rtlCol="0" anchor="ctr"/>
-          <a:lstStyle/>
-          <a:p>
-            <a:pPr algn="ctr" indent="0" marL="0">
-              <a:buNone/>
-            </a:pPr>
-            <a:r>
-              <a:rPr lang="en-US" sz="900" b="1" dirty="0">
-                <a:solidFill>
-                  <a:srgbClr val="9D174D"/>
-                </a:solidFill>
-                <a:latin typeface="Trebuchet MS" pitchFamily="34" charset="0"/>
-                <a:ea typeface="Trebuchet MS" pitchFamily="34" charset="-122"/>
-                <a:cs typeface="Trebuchet MS" pitchFamily="34" charset="-120"/>
-              </a:rPr>
-              <a:t>t</a:t>
-            </a:r>
-            <a:endParaRPr lang="en-US" sz="900" dirty="0"/>
-          </a:p>
-        </p:txBody>
-      </p:sp>
-      <p:sp>
-        <p:nvSpPr>
-          <p:cNvPr id="42" name="Shape 40"/>
-          <p:cNvSpPr/>
-          <p:nvPr/>
-        </p:nvSpPr>
-        <p:spPr>
-          <a:xfrm>
-            <a:off x="2677363" y="4169664"/>
-            <a:ext cx="676656" cy="475488"/>
-          </a:xfrm>
-          <a:prstGeom prst="rect">
-            <a:avLst>
-              <a:gd name="adj" fmla="val 7692"/>
-            </a:avLst>
-          </a:prstGeom>
-          <a:solidFill>
-            <a:srgbClr val="FFFFFF"/>
-          </a:solidFill>
-          <a:ln w="12700">
-            <a:solidFill>
-              <a:srgbClr val="DB2777"/>
-            </a:solidFill>
-            <a:prstDash val="solid"/>
-          </a:ln>
-        </p:spPr>
-      </p:sp>
-      <p:sp>
-        <p:nvSpPr>
-          <p:cNvPr id="43" name="Text 41"/>
-          <p:cNvSpPr/>
-          <p:nvPr/>
-        </p:nvSpPr>
-        <p:spPr>
-          <a:xfrm>
-            <a:off x="2677363" y="4169664"/>
-            <a:ext cx="676656" cy="475488"/>
-          </a:xfrm>
-          <a:prstGeom prst="rect">
-            <a:avLst/>
-          </a:prstGeom>
-          <a:noFill/>
-          <a:ln/>
-        </p:spPr>
-        <p:txBody>
-          <a:bodyPr wrap="square" lIns="0" tIns="0" rIns="0" bIns="0" rtlCol="0" anchor="ctr"/>
-          <a:lstStyle/>
-          <a:p>
-            <a:pPr algn="ctr" indent="0" marL="0">
-              <a:buNone/>
-            </a:pPr>
-            <a:r>
-              <a:rPr lang="en-US" sz="900" b="1" dirty="0">
-                <a:solidFill>
-                  <a:srgbClr val="9D174D"/>
-                </a:solidFill>
-                <a:latin typeface="Trebuchet MS" pitchFamily="34" charset="0"/>
-                <a:ea typeface="Trebuchet MS" pitchFamily="34" charset="-122"/>
-                <a:cs typeface="Trebuchet MS" pitchFamily="34" charset="-120"/>
-              </a:rPr>
-              <a:t>e</a:t>
-            </a:r>
-            <a:endParaRPr lang="en-US" sz="900" dirty="0"/>
-          </a:p>
-        </p:txBody>
-      </p:sp>
-      <p:sp>
-        <p:nvSpPr>
-          <p:cNvPr id="44" name="Shape 42"/>
-          <p:cNvSpPr/>
-          <p:nvPr/>
-        </p:nvSpPr>
-        <p:spPr>
-          <a:xfrm>
-            <a:off x="3403397" y="4169664"/>
-            <a:ext cx="676656" cy="475488"/>
-          </a:xfrm>
-          <a:prstGeom prst="rect">
-            <a:avLst>
-              <a:gd name="adj" fmla="val 7692"/>
-            </a:avLst>
-          </a:prstGeom>
-          <a:solidFill>
-            <a:srgbClr val="FFFFFF"/>
-          </a:solidFill>
-          <a:ln w="12700">
-            <a:solidFill>
-              <a:srgbClr val="DB2777"/>
-            </a:solidFill>
-            <a:prstDash val="solid"/>
-          </a:ln>
-        </p:spPr>
-      </p:sp>
-      <p:sp>
-        <p:nvSpPr>
-          <p:cNvPr id="45" name="Text 43"/>
-          <p:cNvSpPr/>
-          <p:nvPr/>
-        </p:nvSpPr>
-        <p:spPr>
-          <a:xfrm>
-            <a:off x="3403397" y="4169664"/>
-            <a:ext cx="676656" cy="475488"/>
-          </a:xfrm>
-          <a:prstGeom prst="rect">
-            <a:avLst/>
-          </a:prstGeom>
-          <a:noFill/>
-          <a:ln/>
-        </p:spPr>
-        <p:txBody>
-          <a:bodyPr wrap="square" lIns="0" tIns="0" rIns="0" bIns="0" rtlCol="0" anchor="ctr"/>
-          <a:lstStyle/>
-          <a:p>
-            <a:pPr algn="ctr" indent="0" marL="0">
-              <a:buNone/>
-            </a:pPr>
-            <a:r>
-              <a:rPr lang="en-US" sz="900" b="1" dirty="0">
-                <a:solidFill>
-                  <a:srgbClr val="9D174D"/>
-                </a:solidFill>
-                <a:latin typeface="Trebuchet MS" pitchFamily="34" charset="0"/>
-                <a:ea typeface="Trebuchet MS" pitchFamily="34" charset="-122"/>
-                <a:cs typeface="Trebuchet MS" pitchFamily="34" charset="-120"/>
-              </a:rPr>
-              <a:t>s</a:t>
-            </a:r>
-            <a:endParaRPr lang="en-US" sz="900" dirty="0"/>
-          </a:p>
-        </p:txBody>
-      </p:sp>
-      <p:sp>
-        <p:nvSpPr>
-          <p:cNvPr id="46" name="Shape 44"/>
-          <p:cNvSpPr/>
-          <p:nvPr/>
-        </p:nvSpPr>
-        <p:spPr>
-          <a:xfrm>
-            <a:off x="4129430" y="4169664"/>
-            <a:ext cx="676656" cy="475488"/>
-          </a:xfrm>
-          <a:prstGeom prst="rect">
-            <a:avLst>
-              <a:gd name="adj" fmla="val 7692"/>
-            </a:avLst>
-          </a:prstGeom>
-          <a:solidFill>
-            <a:srgbClr val="FFFFFF"/>
-          </a:solidFill>
-          <a:ln w="12700">
-            <a:solidFill>
-              <a:srgbClr val="DB2777"/>
-            </a:solidFill>
-            <a:prstDash val="solid"/>
-          </a:ln>
-        </p:spPr>
-      </p:sp>
-      <p:sp>
-        <p:nvSpPr>
-          <p:cNvPr id="47" name="Text 45"/>
-          <p:cNvSpPr/>
-          <p:nvPr/>
-        </p:nvSpPr>
-        <p:spPr>
-          <a:xfrm>
-            <a:off x="4129430" y="4169664"/>
-            <a:ext cx="676656" cy="475488"/>
-          </a:xfrm>
-          <a:prstGeom prst="rect">
-            <a:avLst/>
-          </a:prstGeom>
-          <a:noFill/>
-          <a:ln/>
-        </p:spPr>
-        <p:txBody>
-          <a:bodyPr wrap="square" lIns="0" tIns="0" rIns="0" bIns="0" rtlCol="0" anchor="ctr"/>
-          <a:lstStyle/>
-          <a:p>
-            <a:pPr algn="ctr" indent="0" marL="0">
-              <a:buNone/>
-            </a:pPr>
-            <a:r>
-              <a:rPr lang="en-US" sz="900" b="1" dirty="0">
-                <a:solidFill>
-                  <a:srgbClr val="9D174D"/>
-                </a:solidFill>
-                <a:latin typeface="Trebuchet MS" pitchFamily="34" charset="0"/>
-                <a:ea typeface="Trebuchet MS" pitchFamily="34" charset="-122"/>
-                <a:cs typeface="Trebuchet MS" pitchFamily="34" charset="-120"/>
-              </a:rPr>
-              <a:t>t</a:t>
-            </a:r>
-            <a:endParaRPr lang="en-US" sz="900" dirty="0"/>
-          </a:p>
-        </p:txBody>
-      </p:sp>
-      <p:sp>
-        <p:nvSpPr>
-          <p:cNvPr id="48" name="Shape 46"/>
-          <p:cNvSpPr/>
-          <p:nvPr/>
-        </p:nvSpPr>
-        <p:spPr>
-          <a:xfrm>
-            <a:off x="4855464" y="4169664"/>
-            <a:ext cx="676656" cy="475488"/>
-          </a:xfrm>
-          <a:prstGeom prst="rect">
-            <a:avLst>
-              <a:gd name="adj" fmla="val 7692"/>
-            </a:avLst>
-          </a:prstGeom>
-          <a:solidFill>
-            <a:srgbClr val="FFFFFF"/>
-          </a:solidFill>
-          <a:ln w="12700">
-            <a:solidFill>
-              <a:srgbClr val="DB2777"/>
-            </a:solidFill>
-            <a:prstDash val="solid"/>
-          </a:ln>
-        </p:spPr>
-      </p:sp>
-      <p:sp>
-        <p:nvSpPr>
-          <p:cNvPr id="49" name="Text 47"/>
-          <p:cNvSpPr/>
-          <p:nvPr/>
-        </p:nvSpPr>
-        <p:spPr>
-          <a:xfrm>
-            <a:off x="4855464" y="4169664"/>
-            <a:ext cx="676656" cy="475488"/>
-          </a:xfrm>
-          <a:prstGeom prst="rect">
-            <a:avLst/>
-          </a:prstGeom>
-          <a:noFill/>
-          <a:ln/>
-        </p:spPr>
-        <p:txBody>
-          <a:bodyPr wrap="square" lIns="0" tIns="0" rIns="0" bIns="0" rtlCol="0" anchor="ctr"/>
-          <a:lstStyle/>
-          <a:p>
-            <a:pPr algn="ctr" indent="0" marL="0">
-              <a:buNone/>
-            </a:pPr>
-            <a:r>
-              <a:rPr lang="en-US" sz="900" b="1" dirty="0">
-                <a:solidFill>
-                  <a:srgbClr val="9D174D"/>
-                </a:solidFill>
-                <a:latin typeface="Trebuchet MS" pitchFamily="34" charset="0"/>
-                <a:ea typeface="Trebuchet MS" pitchFamily="34" charset="-122"/>
-                <a:cs typeface="Trebuchet MS" pitchFamily="34" charset="-120"/>
-              </a:rPr>
-              <a:t>a</a:t>
-            </a:r>
-            <a:endParaRPr lang="en-US" sz="900" dirty="0"/>
-          </a:p>
-        </p:txBody>
-      </p:sp>
-      <p:sp>
-        <p:nvSpPr>
-          <p:cNvPr id="50" name="Shape 48"/>
-          <p:cNvSpPr/>
-          <p:nvPr/>
-        </p:nvSpPr>
-        <p:spPr>
-          <a:xfrm>
-            <a:off x="5581498" y="4169664"/>
-            <a:ext cx="676656" cy="475488"/>
-          </a:xfrm>
-          <a:prstGeom prst="rect">
-            <a:avLst>
-              <a:gd name="adj" fmla="val 7692"/>
-            </a:avLst>
-          </a:prstGeom>
-          <a:solidFill>
-            <a:srgbClr val="FFFFFF"/>
-          </a:solidFill>
-          <a:ln w="12700">
-            <a:solidFill>
-              <a:srgbClr val="DB2777"/>
-            </a:solidFill>
-            <a:prstDash val="solid"/>
-          </a:ln>
-        </p:spPr>
-      </p:sp>
-      <p:sp>
-        <p:nvSpPr>
-          <p:cNvPr id="51" name="Text 49"/>
-          <p:cNvSpPr/>
-          <p:nvPr/>
-        </p:nvSpPr>
-        <p:spPr>
-          <a:xfrm>
-            <a:off x="5581498" y="4169664"/>
-            <a:ext cx="676656" cy="475488"/>
-          </a:xfrm>
-          <a:prstGeom prst="rect">
-            <a:avLst/>
-          </a:prstGeom>
-          <a:noFill/>
-          <a:ln/>
-        </p:spPr>
-        <p:txBody>
-          <a:bodyPr wrap="square" lIns="0" tIns="0" rIns="0" bIns="0" rtlCol="0" anchor="ctr"/>
-          <a:lstStyle/>
-          <a:p>
-            <a:pPr algn="ctr" indent="0" marL="0">
-              <a:buNone/>
-            </a:pPr>
-            <a:r>
-              <a:rPr lang="en-US" sz="900" b="1" dirty="0">
-                <a:solidFill>
-                  <a:srgbClr val="9D174D"/>
-                </a:solidFill>
-                <a:latin typeface="Trebuchet MS" pitchFamily="34" charset="0"/>
-                <a:ea typeface="Trebuchet MS" pitchFamily="34" charset="-122"/>
-                <a:cs typeface="Trebuchet MS" pitchFamily="34" charset="-120"/>
-              </a:rPr>
-              <a:t>m</a:t>
-            </a:r>
-            <a:endParaRPr lang="en-US" sz="900" dirty="0"/>
-          </a:p>
-        </p:txBody>
-      </p:sp>
-      <p:sp>
-        <p:nvSpPr>
-          <p:cNvPr id="52" name="Shape 50"/>
-          <p:cNvSpPr/>
-          <p:nvPr/>
-        </p:nvSpPr>
-        <p:spPr>
-          <a:xfrm>
-            <a:off x="6307531" y="4169664"/>
-            <a:ext cx="676656" cy="475488"/>
-          </a:xfrm>
-          <a:prstGeom prst="rect">
-            <a:avLst>
-              <a:gd name="adj" fmla="val 7692"/>
-            </a:avLst>
-          </a:prstGeom>
-          <a:solidFill>
-            <a:srgbClr val="FFFFFF"/>
-          </a:solidFill>
-          <a:ln w="12700">
-            <a:solidFill>
-              <a:srgbClr val="DB2777"/>
-            </a:solidFill>
-            <a:prstDash val="solid"/>
-          </a:ln>
-        </p:spPr>
-      </p:sp>
-      <p:sp>
-        <p:nvSpPr>
-          <p:cNvPr id="53" name="Text 51"/>
-          <p:cNvSpPr/>
-          <p:nvPr/>
-        </p:nvSpPr>
-        <p:spPr>
-          <a:xfrm>
-            <a:off x="6307531" y="4169664"/>
-            <a:ext cx="676656" cy="475488"/>
-          </a:xfrm>
-          <a:prstGeom prst="rect">
-            <a:avLst/>
-          </a:prstGeom>
-          <a:noFill/>
-          <a:ln/>
-        </p:spPr>
-        <p:txBody>
-          <a:bodyPr wrap="square" lIns="0" tIns="0" rIns="0" bIns="0" rtlCol="0" anchor="ctr"/>
-          <a:lstStyle/>
-          <a:p>
-            <a:pPr algn="ctr" indent="0" marL="0">
-              <a:buNone/>
-            </a:pPr>
-            <a:r>
-              <a:rPr lang="en-US" sz="900" b="1" dirty="0">
-                <a:solidFill>
-                  <a:srgbClr val="9D174D"/>
-                </a:solidFill>
-                <a:latin typeface="Trebuchet MS" pitchFamily="34" charset="0"/>
-                <a:ea typeface="Trebuchet MS" pitchFamily="34" charset="-122"/>
-                <a:cs typeface="Trebuchet MS" pitchFamily="34" charset="-120"/>
-              </a:rPr>
-              <a:t>e</a:t>
-            </a:r>
-            <a:endParaRPr lang="en-US" sz="900" dirty="0"/>
-          </a:p>
-        </p:txBody>
-      </p:sp>
-      <p:sp>
-        <p:nvSpPr>
-          <p:cNvPr id="54" name="Shape 52"/>
-          <p:cNvSpPr/>
-          <p:nvPr/>
-        </p:nvSpPr>
-        <p:spPr>
-          <a:xfrm>
-            <a:off x="7033565" y="4169664"/>
-            <a:ext cx="676656" cy="475488"/>
-          </a:xfrm>
-          <a:prstGeom prst="rect">
-            <a:avLst>
-              <a:gd name="adj" fmla="val 7692"/>
-            </a:avLst>
-          </a:prstGeom>
-          <a:solidFill>
-            <a:srgbClr val="FFFFFF"/>
-          </a:solidFill>
-          <a:ln w="12700">
-            <a:solidFill>
-              <a:srgbClr val="DB2777"/>
-            </a:solidFill>
-            <a:prstDash val="solid"/>
-          </a:ln>
-        </p:spPr>
-      </p:sp>
-      <p:sp>
-        <p:nvSpPr>
-          <p:cNvPr id="55" name="Text 53"/>
-          <p:cNvSpPr/>
-          <p:nvPr/>
-        </p:nvSpPr>
-        <p:spPr>
-          <a:xfrm>
-            <a:off x="7033565" y="4169664"/>
-            <a:ext cx="676656" cy="475488"/>
-          </a:xfrm>
-          <a:prstGeom prst="rect">
-            <a:avLst/>
-          </a:prstGeom>
-          <a:noFill/>
-          <a:ln/>
-        </p:spPr>
-        <p:txBody>
-          <a:bodyPr wrap="square" lIns="0" tIns="0" rIns="0" bIns="0" rtlCol="0" anchor="ctr"/>
-          <a:lstStyle/>
-          <a:p>
-            <a:pPr algn="ctr" indent="0" marL="0">
-              <a:buNone/>
-            </a:pPr>
-            <a:r>
-              <a:rPr lang="en-US" sz="900" b="1" dirty="0">
-                <a:solidFill>
-                  <a:srgbClr val="9D174D"/>
-                </a:solidFill>
-                <a:latin typeface="Trebuchet MS" pitchFamily="34" charset="0"/>
-                <a:ea typeface="Trebuchet MS" pitchFamily="34" charset="-122"/>
-                <a:cs typeface="Trebuchet MS" pitchFamily="34" charset="-120"/>
-              </a:rPr>
-              <a:t>n</a:t>
-            </a:r>
-            <a:endParaRPr lang="en-US" sz="900" dirty="0"/>
-          </a:p>
-        </p:txBody>
-      </p:sp>
-      <p:sp>
-        <p:nvSpPr>
-          <p:cNvPr id="56" name="Shape 54"/>
-          <p:cNvSpPr/>
-          <p:nvPr/>
-        </p:nvSpPr>
-        <p:spPr>
-          <a:xfrm>
-            <a:off x="7759598" y="4169664"/>
-            <a:ext cx="676656" cy="475488"/>
-          </a:xfrm>
-          <a:prstGeom prst="rect">
-            <a:avLst>
-              <a:gd name="adj" fmla="val 7692"/>
-            </a:avLst>
-          </a:prstGeom>
-          <a:solidFill>
-            <a:srgbClr val="FFFFFF"/>
-          </a:solidFill>
-          <a:ln w="12700">
-            <a:solidFill>
-              <a:srgbClr val="DB2777"/>
-            </a:solidFill>
-            <a:prstDash val="solid"/>
-          </a:ln>
-        </p:spPr>
-      </p:sp>
-      <p:sp>
-        <p:nvSpPr>
-          <p:cNvPr id="57" name="Text 55"/>
-          <p:cNvSpPr/>
-          <p:nvPr/>
-        </p:nvSpPr>
-        <p:spPr>
-          <a:xfrm>
-            <a:off x="7759598" y="4169664"/>
-            <a:ext cx="676656" cy="475488"/>
+          <p:cNvPr id="44" name="Text 42"/>
+          <p:cNvSpPr/>
+          <p:nvPr/>
+        </p:nvSpPr>
+        <p:spPr>
+          <a:xfrm>
+            <a:off x="7447135" y="4169664"/>
+            <a:ext cx="685800" cy="475488"/>
           </a:xfrm>
           <a:prstGeom prst="rect">
             <a:avLst/>
@@ -18531,7 +17670,7 @@
                 <a:ea typeface="Calibri" pitchFamily="34" charset="-122"/>
                 <a:cs typeface="Calibri" pitchFamily="34" charset="-120"/>
               </a:rPr>
-              <a:t>During the </a:t>
+              <a:t>After </a:t>
             </a:r>
             <a:pPr algn="l" indent="0" marL="0">
               <a:buNone/>
@@ -18548,7 +17687,7 @@
                 <a:ea typeface="Calibri" pitchFamily="34" charset="-122"/>
                 <a:cs typeface="Calibri" pitchFamily="34" charset="-120"/>
               </a:rPr>
-              <a:t>contest</a:t>
+              <a:t>protesting</a:t>
             </a:r>
             <a:pPr algn="l" indent="0" marL="0">
               <a:buNone/>
@@ -18562,7 +17701,7 @@
                 <a:ea typeface="Calibri" pitchFamily="34" charset="-122"/>
                 <a:cs typeface="Calibri" pitchFamily="34" charset="-120"/>
               </a:rPr>
-              <a:t>, she had to </a:t>
+              <a:t> the result, the </a:t>
             </a:r>
             <a:pPr algn="l" indent="0" marL="0">
               <a:buNone/>
@@ -18579,7 +17718,7 @@
                 <a:ea typeface="Calibri" pitchFamily="34" charset="-122"/>
                 <a:cs typeface="Calibri" pitchFamily="34" charset="-120"/>
               </a:rPr>
-              <a:t>attest</a:t>
+              <a:t>tester</a:t>
             </a:r>
             <a:pPr algn="l" indent="0" marL="0">
               <a:buNone/>
@@ -18593,7 +17732,7 @@
                 <a:ea typeface="Calibri" pitchFamily="34" charset="-122"/>
                 <a:cs typeface="Calibri" pitchFamily="34" charset="-120"/>
               </a:rPr>
-              <a:t> that her results were real, which was a true </a:t>
+              <a:t> confirmed that the </a:t>
             </a:r>
             <a:pPr algn="l" indent="0" marL="0">
               <a:buNone/>
@@ -18610,7 +17749,7 @@
                 <a:ea typeface="Calibri" pitchFamily="34" charset="-122"/>
                 <a:cs typeface="Calibri" pitchFamily="34" charset="-120"/>
               </a:rPr>
-              <a:t>test</a:t>
+              <a:t>contest</a:t>
             </a:r>
             <a:pPr algn="l" indent="0" marL="0">
               <a:buNone/>
@@ -18624,7 +17763,7 @@
                 <a:ea typeface="Calibri" pitchFamily="34" charset="-122"/>
                 <a:cs typeface="Calibri" pitchFamily="34" charset="-120"/>
               </a:rPr>
-              <a:t> of her honesty.</a:t>
+              <a:t> had been conducted fairly.</a:t>
             </a:r>
             <a:endParaRPr lang="en-US" sz="1800" dirty="0"/>
           </a:p>
@@ -18779,7 +17918,7 @@
                 <a:ea typeface="Trebuchet MS" pitchFamily="34" charset="-122"/>
                 <a:cs typeface="Trebuchet MS" pitchFamily="34" charset="-120"/>
               </a:rPr>
-              <a:t>contest</a:t>
+              <a:t>protesting</a:t>
             </a:r>
             <a:endParaRPr lang="en-US" sz="1400" dirty="0"/>
           </a:p>
@@ -18907,7 +18046,7 @@
                 <a:ea typeface="Trebuchet MS" pitchFamily="34" charset="-122"/>
                 <a:cs typeface="Trebuchet MS" pitchFamily="34" charset="-120"/>
               </a:rPr>
-              <a:t>attest</a:t>
+              <a:t>tester</a:t>
             </a:r>
             <a:endParaRPr lang="en-US" sz="1400" dirty="0"/>
           </a:p>
@@ -19035,7 +18174,7 @@
                 <a:ea typeface="Trebuchet MS" pitchFamily="34" charset="-122"/>
                 <a:cs typeface="Trebuchet MS" pitchFamily="34" charset="-120"/>
               </a:rPr>
-              <a:t>test</a:t>
+              <a:t>contest</a:t>
             </a:r>
             <a:endParaRPr lang="en-US" sz="1400" dirty="0"/>
           </a:p>
@@ -19505,7 +18644,7 @@
                 <a:ea typeface="Trebuchet MS" pitchFamily="34" charset="-122"/>
                 <a:cs typeface="Trebuchet MS" pitchFamily="34" charset="-120"/>
               </a:rPr>
-              <a:t>contest</a:t>
+              <a:t>protesting</a:t>
             </a:r>
             <a:endParaRPr lang="en-US" sz="2800" dirty="0"/>
           </a:p>
@@ -20332,7 +19471,7 @@
                 <a:ea typeface="Trebuchet MS" pitchFamily="34" charset="-122"/>
                 <a:cs typeface="Trebuchet MS" pitchFamily="34" charset="-120"/>
               </a:rPr>
-              <a:t>contest</a:t>
+              <a:t>protesting</a:t>
             </a:r>
             <a:endParaRPr lang="en-US" sz="2800" dirty="0"/>
           </a:p>
@@ -20412,7 +19551,7 @@
         </p:nvSpPr>
         <p:spPr>
           <a:xfrm>
-            <a:off x="2938272" y="2258568"/>
+            <a:off x="2221992" y="2258568"/>
             <a:ext cx="1828800" cy="292608"/>
           </a:xfrm>
           <a:prstGeom prst="rect">
@@ -20446,7 +19585,7 @@
         </p:nvSpPr>
         <p:spPr>
           <a:xfrm>
-            <a:off x="2938272" y="2258568"/>
+            <a:off x="2221992" y="2258568"/>
             <a:ext cx="1828800" cy="292608"/>
           </a:xfrm>
           <a:prstGeom prst="rect">
@@ -20471,7 +19610,7 @@
                 <a:ea typeface="Trebuchet MS" pitchFamily="34" charset="-122"/>
                 <a:cs typeface="Trebuchet MS" pitchFamily="34" charset="-120"/>
               </a:rPr>
-              <a:t>con</a:t>
+              <a:t>pro</a:t>
             </a:r>
             <a:endParaRPr lang="en-US" sz="1300" dirty="0"/>
           </a:p>
@@ -20485,7 +19624,7 @@
         </p:nvSpPr>
         <p:spPr>
           <a:xfrm>
-            <a:off x="2938272" y="2569464"/>
+            <a:off x="2221992" y="2569464"/>
             <a:ext cx="1828800" cy="201168"/>
           </a:xfrm>
           <a:prstGeom prst="rect">
@@ -20510,7 +19649,7 @@
                 <a:ea typeface="Calibri" pitchFamily="34" charset="-122"/>
                 <a:cs typeface="Calibri" pitchFamily="34" charset="-120"/>
               </a:rPr>
-              <a:t>together, with</a:t>
+              <a:t>forward, in favour of</a:t>
             </a:r>
             <a:endParaRPr lang="en-US" sz="850" dirty="0"/>
           </a:p>
@@ -20524,7 +19663,7 @@
         </p:nvSpPr>
         <p:spPr>
           <a:xfrm>
-            <a:off x="5803392" y="2258568"/>
+            <a:off x="4370832" y="2258568"/>
             <a:ext cx="1828800" cy="292608"/>
           </a:xfrm>
           <a:prstGeom prst="rect">
@@ -20558,7 +19697,7 @@
         </p:nvSpPr>
         <p:spPr>
           <a:xfrm>
-            <a:off x="5803392" y="2258568"/>
+            <a:off x="4370832" y="2258568"/>
             <a:ext cx="1828800" cy="292608"/>
           </a:xfrm>
           <a:prstGeom prst="rect">
@@ -20597,7 +19736,7 @@
         </p:nvSpPr>
         <p:spPr>
           <a:xfrm>
-            <a:off x="5803392" y="2569464"/>
+            <a:off x="4370832" y="2569464"/>
             <a:ext cx="1828800" cy="201168"/>
           </a:xfrm>
           <a:prstGeom prst="rect">
@@ -20622,7 +19761,7 @@
                 <a:ea typeface="Calibri" pitchFamily="34" charset="-122"/>
                 <a:cs typeface="Calibri" pitchFamily="34" charset="-120"/>
               </a:rPr>
-              <a:t>to try, witness</a:t>
+              <a:t>to try, examine, witness</a:t>
             </a:r>
             <a:endParaRPr lang="en-US" sz="850" dirty="0"/>
           </a:p>
@@ -20631,6 +19770,118 @@
       <p:sp>
         <p:nvSpPr>
           <p:cNvPr id="22" name="Shape 20"/>
+          <p:cNvSpPr/>
+          <p:nvPr/>
+        </p:nvSpPr>
+        <p:spPr>
+          <a:xfrm>
+            <a:off x="6519672" y="2258568"/>
+            <a:ext cx="1828800" cy="292608"/>
+          </a:xfrm>
+          <a:prstGeom prst="rect">
+            <a:avLst>
+              <a:gd name="adj" fmla="val 25000"/>
+            </a:avLst>
+          </a:prstGeom>
+          <a:solidFill>
+            <a:srgbClr val="FCE7F3"/>
+          </a:solidFill>
+          <a:ln w="19050">
+            <a:solidFill>
+              <a:srgbClr val="DB2777"/>
+            </a:solidFill>
+            <a:prstDash val="solid"/>
+          </a:ln>
+          <a:effectLst>
+            <a:outerShdw sx="100000" sy="100000" kx="0" ky="0" algn="bl" rotWithShape="0" blurRad="101600" dist="38100" dir="8100000">
+              <a:srgbClr val="000000">
+                <a:alpha val="12000"/>
+              </a:srgbClr>
+            </a:outerShdw>
+          </a:effectLst>
+        </p:spPr>
+      </p:sp>
+      <p:sp>
+        <p:nvSpPr>
+          <p:cNvPr id="23" name="Text 21"/>
+          <p:cNvSpPr/>
+          <p:nvPr/>
+        </p:nvSpPr>
+        <p:spPr>
+          <a:xfrm>
+            <a:off x="6519672" y="2258568"/>
+            <a:ext cx="1828800" cy="292608"/>
+          </a:xfrm>
+          <a:prstGeom prst="rect">
+            <a:avLst/>
+          </a:prstGeom>
+          <a:noFill/>
+          <a:ln/>
+        </p:spPr>
+        <p:txBody>
+          <a:bodyPr wrap="square" lIns="0" tIns="0" rIns="0" bIns="0" rtlCol="0" anchor="ctr"/>
+          <a:lstStyle/>
+          <a:p>
+            <a:pPr algn="ctr" indent="0" marL="0">
+              <a:buNone/>
+            </a:pPr>
+            <a:r>
+              <a:rPr lang="en-US" sz="1300" b="1" dirty="0">
+                <a:solidFill>
+                  <a:srgbClr val="9D174D"/>
+                </a:solidFill>
+                <a:latin typeface="Trebuchet MS" pitchFamily="34" charset="0"/>
+                <a:ea typeface="Trebuchet MS" pitchFamily="34" charset="-122"/>
+                <a:cs typeface="Trebuchet MS" pitchFamily="34" charset="-120"/>
+              </a:rPr>
+              <a:t>ing</a:t>
+            </a:r>
+            <a:endParaRPr lang="en-US" sz="1300" dirty="0"/>
+          </a:p>
+        </p:txBody>
+      </p:sp>
+      <p:sp>
+        <p:nvSpPr>
+          <p:cNvPr id="24" name="Text 22"/>
+          <p:cNvSpPr/>
+          <p:nvPr/>
+        </p:nvSpPr>
+        <p:spPr>
+          <a:xfrm>
+            <a:off x="6519672" y="2569464"/>
+            <a:ext cx="1828800" cy="201168"/>
+          </a:xfrm>
+          <a:prstGeom prst="rect">
+            <a:avLst/>
+          </a:prstGeom>
+          <a:noFill/>
+          <a:ln/>
+        </p:spPr>
+        <p:txBody>
+          <a:bodyPr wrap="square" lIns="0" tIns="0" rIns="0" bIns="0" rtlCol="0" anchor="t"/>
+          <a:lstStyle/>
+          <a:p>
+            <a:pPr algn="ctr" indent="0" marL="0">
+              <a:buNone/>
+            </a:pPr>
+            <a:r>
+              <a:rPr lang="en-US" sz="850" dirty="0">
+                <a:solidFill>
+                  <a:srgbClr val="475569"/>
+                </a:solidFill>
+                <a:latin typeface="Calibri" pitchFamily="34" charset="0"/>
+                <a:ea typeface="Calibri" pitchFamily="34" charset="-122"/>
+                <a:cs typeface="Calibri" pitchFamily="34" charset="-120"/>
+              </a:rPr>
+              <a:t>ongoing action</a:t>
+            </a:r>
+            <a:endParaRPr lang="en-US" sz="850" dirty="0"/>
+          </a:p>
+        </p:txBody>
+      </p:sp>
+      <p:sp>
+        <p:nvSpPr>
+          <p:cNvPr id="25" name="Shape 23"/>
           <p:cNvSpPr/>
           <p:nvPr/>
         </p:nvSpPr>
@@ -20657,7 +19908,7 @@
       </p:sp>
       <p:sp>
         <p:nvSpPr>
-          <p:cNvPr id="23" name="Text 21"/>
+          <p:cNvPr id="26" name="Text 24"/>
           <p:cNvSpPr/>
           <p:nvPr/>
         </p:nvSpPr>
@@ -20696,7 +19947,7 @@
       </p:sp>
       <p:sp>
         <p:nvSpPr>
-          <p:cNvPr id="24" name="Shape 22"/>
+          <p:cNvPr id="27" name="Shape 25"/>
           <p:cNvSpPr/>
           <p:nvPr/>
         </p:nvSpPr>
@@ -20723,7 +19974,7 @@
       </p:sp>
       <p:sp>
         <p:nvSpPr>
-          <p:cNvPr id="25" name="Text 23"/>
+          <p:cNvPr id="28" name="Text 26"/>
           <p:cNvSpPr/>
           <p:nvPr/>
         </p:nvSpPr>
@@ -20762,7 +20013,7 @@
       </p:sp>
       <p:sp>
         <p:nvSpPr>
-          <p:cNvPr id="26" name="Shape 24"/>
+          <p:cNvPr id="29" name="Shape 27"/>
           <p:cNvSpPr/>
           <p:nvPr/>
         </p:nvSpPr>
@@ -20789,7 +20040,7 @@
       </p:sp>
       <p:sp>
         <p:nvSpPr>
-          <p:cNvPr id="27" name="Text 25"/>
+          <p:cNvPr id="30" name="Text 28"/>
           <p:cNvSpPr/>
           <p:nvPr/>
         </p:nvSpPr>
@@ -20828,7 +20079,7 @@
       </p:sp>
       <p:sp>
         <p:nvSpPr>
-          <p:cNvPr id="28" name="Shape 26"/>
+          <p:cNvPr id="31" name="Shape 29"/>
           <p:cNvSpPr/>
           <p:nvPr/>
         </p:nvSpPr>
@@ -20855,7 +20106,7 @@
       </p:sp>
       <p:sp>
         <p:nvSpPr>
-          <p:cNvPr id="29" name="Text 27"/>
+          <p:cNvPr id="32" name="Text 30"/>
           <p:cNvSpPr/>
           <p:nvPr/>
         </p:nvSpPr>
@@ -21317,7 +20568,7 @@
                 <a:ea typeface="Trebuchet MS" pitchFamily="34" charset="-122"/>
                 <a:cs typeface="Trebuchet MS" pitchFamily="34" charset="-120"/>
               </a:rPr>
-              <a:t>contest</a:t>
+              <a:t>protesting</a:t>
             </a:r>
             <a:endParaRPr lang="en-US" sz="2800" dirty="0"/>
           </a:p>
@@ -21397,7 +20648,7 @@
         </p:nvSpPr>
         <p:spPr>
           <a:xfrm>
-            <a:off x="2938272" y="2258568"/>
+            <a:off x="2221992" y="2258568"/>
             <a:ext cx="1828800" cy="292608"/>
           </a:xfrm>
           <a:prstGeom prst="rect">
@@ -21431,7 +20682,7 @@
         </p:nvSpPr>
         <p:spPr>
           <a:xfrm>
-            <a:off x="2938272" y="2258568"/>
+            <a:off x="2221992" y="2258568"/>
             <a:ext cx="1828800" cy="292608"/>
           </a:xfrm>
           <a:prstGeom prst="rect">
@@ -21456,7 +20707,7 @@
                 <a:ea typeface="Trebuchet MS" pitchFamily="34" charset="-122"/>
                 <a:cs typeface="Trebuchet MS" pitchFamily="34" charset="-120"/>
               </a:rPr>
-              <a:t>con</a:t>
+              <a:t>pro</a:t>
             </a:r>
             <a:endParaRPr lang="en-US" sz="1300" dirty="0"/>
           </a:p>
@@ -21470,7 +20721,7 @@
         </p:nvSpPr>
         <p:spPr>
           <a:xfrm>
-            <a:off x="2938272" y="2569464"/>
+            <a:off x="2221992" y="2569464"/>
             <a:ext cx="1828800" cy="201168"/>
           </a:xfrm>
           <a:prstGeom prst="rect">
@@ -21495,7 +20746,7 @@
                 <a:ea typeface="Calibri" pitchFamily="34" charset="-122"/>
                 <a:cs typeface="Calibri" pitchFamily="34" charset="-120"/>
               </a:rPr>
-              <a:t>together, with</a:t>
+              <a:t>forward, in favour of</a:t>
             </a:r>
             <a:endParaRPr lang="en-US" sz="850" dirty="0"/>
           </a:p>
@@ -21509,7 +20760,7 @@
         </p:nvSpPr>
         <p:spPr>
           <a:xfrm>
-            <a:off x="5803392" y="2258568"/>
+            <a:off x="4370832" y="2258568"/>
             <a:ext cx="1828800" cy="292608"/>
           </a:xfrm>
           <a:prstGeom prst="rect">
@@ -21543,7 +20794,7 @@
         </p:nvSpPr>
         <p:spPr>
           <a:xfrm>
-            <a:off x="5803392" y="2258568"/>
+            <a:off x="4370832" y="2258568"/>
             <a:ext cx="1828800" cy="292608"/>
           </a:xfrm>
           <a:prstGeom prst="rect">
@@ -21582,7 +20833,7 @@
         </p:nvSpPr>
         <p:spPr>
           <a:xfrm>
-            <a:off x="5803392" y="2569464"/>
+            <a:off x="4370832" y="2569464"/>
             <a:ext cx="1828800" cy="201168"/>
           </a:xfrm>
           <a:prstGeom prst="rect">
@@ -21607,7 +20858,7 @@
                 <a:ea typeface="Calibri" pitchFamily="34" charset="-122"/>
                 <a:cs typeface="Calibri" pitchFamily="34" charset="-120"/>
               </a:rPr>
-              <a:t>to try, witness</a:t>
+              <a:t>to try, examine, witness</a:t>
             </a:r>
             <a:endParaRPr lang="en-US" sz="850" dirty="0"/>
           </a:p>
@@ -21616,6 +20867,118 @@
       <p:sp>
         <p:nvSpPr>
           <p:cNvPr id="22" name="Shape 20"/>
+          <p:cNvSpPr/>
+          <p:nvPr/>
+        </p:nvSpPr>
+        <p:spPr>
+          <a:xfrm>
+            <a:off x="6519672" y="2258568"/>
+            <a:ext cx="1828800" cy="292608"/>
+          </a:xfrm>
+          <a:prstGeom prst="rect">
+            <a:avLst>
+              <a:gd name="adj" fmla="val 25000"/>
+            </a:avLst>
+          </a:prstGeom>
+          <a:solidFill>
+            <a:srgbClr val="FCE7F3"/>
+          </a:solidFill>
+          <a:ln w="19050">
+            <a:solidFill>
+              <a:srgbClr val="DB2777"/>
+            </a:solidFill>
+            <a:prstDash val="solid"/>
+          </a:ln>
+          <a:effectLst>
+            <a:outerShdw sx="100000" sy="100000" kx="0" ky="0" algn="bl" rotWithShape="0" blurRad="101600" dist="38100" dir="8100000">
+              <a:srgbClr val="000000">
+                <a:alpha val="12000"/>
+              </a:srgbClr>
+            </a:outerShdw>
+          </a:effectLst>
+        </p:spPr>
+      </p:sp>
+      <p:sp>
+        <p:nvSpPr>
+          <p:cNvPr id="23" name="Text 21"/>
+          <p:cNvSpPr/>
+          <p:nvPr/>
+        </p:nvSpPr>
+        <p:spPr>
+          <a:xfrm>
+            <a:off x="6519672" y="2258568"/>
+            <a:ext cx="1828800" cy="292608"/>
+          </a:xfrm>
+          <a:prstGeom prst="rect">
+            <a:avLst/>
+          </a:prstGeom>
+          <a:noFill/>
+          <a:ln/>
+        </p:spPr>
+        <p:txBody>
+          <a:bodyPr wrap="square" lIns="0" tIns="0" rIns="0" bIns="0" rtlCol="0" anchor="ctr"/>
+          <a:lstStyle/>
+          <a:p>
+            <a:pPr algn="ctr" indent="0" marL="0">
+              <a:buNone/>
+            </a:pPr>
+            <a:r>
+              <a:rPr lang="en-US" sz="1300" b="1" dirty="0">
+                <a:solidFill>
+                  <a:srgbClr val="9D174D"/>
+                </a:solidFill>
+                <a:latin typeface="Trebuchet MS" pitchFamily="34" charset="0"/>
+                <a:ea typeface="Trebuchet MS" pitchFamily="34" charset="-122"/>
+                <a:cs typeface="Trebuchet MS" pitchFamily="34" charset="-120"/>
+              </a:rPr>
+              <a:t>ing</a:t>
+            </a:r>
+            <a:endParaRPr lang="en-US" sz="1300" dirty="0"/>
+          </a:p>
+        </p:txBody>
+      </p:sp>
+      <p:sp>
+        <p:nvSpPr>
+          <p:cNvPr id="24" name="Text 22"/>
+          <p:cNvSpPr/>
+          <p:nvPr/>
+        </p:nvSpPr>
+        <p:spPr>
+          <a:xfrm>
+            <a:off x="6519672" y="2569464"/>
+            <a:ext cx="1828800" cy="201168"/>
+          </a:xfrm>
+          <a:prstGeom prst="rect">
+            <a:avLst/>
+          </a:prstGeom>
+          <a:noFill/>
+          <a:ln/>
+        </p:spPr>
+        <p:txBody>
+          <a:bodyPr wrap="square" lIns="0" tIns="0" rIns="0" bIns="0" rtlCol="0" anchor="t"/>
+          <a:lstStyle/>
+          <a:p>
+            <a:pPr algn="ctr" indent="0" marL="0">
+              <a:buNone/>
+            </a:pPr>
+            <a:r>
+              <a:rPr lang="en-US" sz="850" dirty="0">
+                <a:solidFill>
+                  <a:srgbClr val="475569"/>
+                </a:solidFill>
+                <a:latin typeface="Calibri" pitchFamily="34" charset="0"/>
+                <a:ea typeface="Calibri" pitchFamily="34" charset="-122"/>
+                <a:cs typeface="Calibri" pitchFamily="34" charset="-120"/>
+              </a:rPr>
+              <a:t>ongoing action</a:t>
+            </a:r>
+            <a:endParaRPr lang="en-US" sz="850" dirty="0"/>
+          </a:p>
+        </p:txBody>
+      </p:sp>
+      <p:sp>
+        <p:nvSpPr>
+          <p:cNvPr id="25" name="Shape 23"/>
           <p:cNvSpPr/>
           <p:nvPr/>
         </p:nvSpPr>
@@ -21642,7 +21005,7 @@
       </p:sp>
       <p:sp>
         <p:nvSpPr>
-          <p:cNvPr id="23" name="Text 21"/>
+          <p:cNvPr id="26" name="Text 24"/>
           <p:cNvSpPr/>
           <p:nvPr/>
         </p:nvSpPr>
@@ -21681,7 +21044,7 @@
       </p:sp>
       <p:sp>
         <p:nvSpPr>
-          <p:cNvPr id="24" name="Shape 22"/>
+          <p:cNvPr id="27" name="Shape 25"/>
           <p:cNvSpPr/>
           <p:nvPr/>
         </p:nvSpPr>
@@ -21708,13 +21071,13 @@
       </p:sp>
       <p:sp>
         <p:nvSpPr>
-          <p:cNvPr id="25" name="Shape 23"/>
-          <p:cNvSpPr/>
-          <p:nvPr/>
-        </p:nvSpPr>
-        <p:spPr>
-          <a:xfrm>
-            <a:off x="2999232" y="3364992"/>
+          <p:cNvPr id="28" name="Shape 26"/>
+          <p:cNvSpPr/>
+          <p:nvPr/>
+        </p:nvSpPr>
+        <p:spPr>
+          <a:xfrm>
+            <a:off x="2313432" y="3364992"/>
             <a:ext cx="1645920" cy="475488"/>
           </a:xfrm>
           <a:prstGeom prst="rect">
@@ -21735,13 +21098,13 @@
       </p:sp>
       <p:sp>
         <p:nvSpPr>
-          <p:cNvPr id="26" name="Text 24"/>
-          <p:cNvSpPr/>
-          <p:nvPr/>
-        </p:nvSpPr>
-        <p:spPr>
-          <a:xfrm>
-            <a:off x="2999232" y="3364992"/>
+          <p:cNvPr id="29" name="Text 27"/>
+          <p:cNvSpPr/>
+          <p:nvPr/>
+        </p:nvSpPr>
+        <p:spPr>
+          <a:xfrm>
+            <a:off x="2313432" y="3364992"/>
             <a:ext cx="1645920" cy="475488"/>
           </a:xfrm>
           <a:prstGeom prst="rect">
@@ -21766,7 +21129,7 @@
                 <a:ea typeface="Trebuchet MS" pitchFamily="34" charset="-122"/>
                 <a:cs typeface="Trebuchet MS" pitchFamily="34" charset="-120"/>
               </a:rPr>
-              <a:t>con</a:t>
+              <a:t>pro</a:t>
             </a:r>
             <a:endParaRPr lang="en-US" sz="1400" dirty="0"/>
           </a:p>
@@ -21774,14 +21137,14 @@
       </p:sp>
       <p:sp>
         <p:nvSpPr>
-          <p:cNvPr id="27" name="Text 25"/>
-          <p:cNvSpPr/>
-          <p:nvPr/>
-        </p:nvSpPr>
-        <p:spPr>
-          <a:xfrm>
-            <a:off x="4645152" y="3364992"/>
-            <a:ext cx="1097280" cy="475488"/>
+          <p:cNvPr id="30" name="Text 28"/>
+          <p:cNvSpPr/>
+          <p:nvPr/>
+        </p:nvSpPr>
+        <p:spPr>
+          <a:xfrm>
+            <a:off x="3959352" y="3364992"/>
+            <a:ext cx="411480" cy="475488"/>
           </a:xfrm>
           <a:prstGeom prst="rect">
             <a:avLst/>
@@ -21813,13 +21176,13 @@
       </p:sp>
       <p:sp>
         <p:nvSpPr>
-          <p:cNvPr id="28" name="Shape 26"/>
-          <p:cNvSpPr/>
-          <p:nvPr/>
-        </p:nvSpPr>
-        <p:spPr>
-          <a:xfrm>
-            <a:off x="5742432" y="3364992"/>
+          <p:cNvPr id="31" name="Shape 29"/>
+          <p:cNvSpPr/>
+          <p:nvPr/>
+        </p:nvSpPr>
+        <p:spPr>
+          <a:xfrm>
+            <a:off x="4370832" y="3364992"/>
             <a:ext cx="1645920" cy="475488"/>
           </a:xfrm>
           <a:prstGeom prst="rect">
@@ -21840,13 +21203,13 @@
       </p:sp>
       <p:sp>
         <p:nvSpPr>
-          <p:cNvPr id="29" name="Text 27"/>
-          <p:cNvSpPr/>
-          <p:nvPr/>
-        </p:nvSpPr>
-        <p:spPr>
-          <a:xfrm>
-            <a:off x="5742432" y="3364992"/>
+          <p:cNvPr id="32" name="Text 30"/>
+          <p:cNvSpPr/>
+          <p:nvPr/>
+        </p:nvSpPr>
+        <p:spPr>
+          <a:xfrm>
+            <a:off x="4370832" y="3364992"/>
             <a:ext cx="1645920" cy="475488"/>
           </a:xfrm>
           <a:prstGeom prst="rect">
@@ -21879,7 +21242,112 @@
       </p:sp>
       <p:sp>
         <p:nvSpPr>
-          <p:cNvPr id="30" name="Shape 28"/>
+          <p:cNvPr id="33" name="Text 31"/>
+          <p:cNvSpPr/>
+          <p:nvPr/>
+        </p:nvSpPr>
+        <p:spPr>
+          <a:xfrm>
+            <a:off x="6016752" y="3364992"/>
+            <a:ext cx="411480" cy="475488"/>
+          </a:xfrm>
+          <a:prstGeom prst="rect">
+            <a:avLst/>
+          </a:prstGeom>
+          <a:noFill/>
+          <a:ln/>
+        </p:spPr>
+        <p:txBody>
+          <a:bodyPr wrap="square" lIns="0" tIns="0" rIns="0" bIns="0" rtlCol="0" anchor="ctr"/>
+          <a:lstStyle/>
+          <a:p>
+            <a:pPr algn="ctr" indent="0" marL="0">
+              <a:buNone/>
+            </a:pPr>
+            <a:r>
+              <a:rPr lang="en-US" sz="1600" b="1" dirty="0">
+                <a:solidFill>
+                  <a:srgbClr val="0D9488"/>
+                </a:solidFill>
+                <a:latin typeface="Trebuchet MS" pitchFamily="34" charset="0"/>
+                <a:ea typeface="Trebuchet MS" pitchFamily="34" charset="-122"/>
+                <a:cs typeface="Trebuchet MS" pitchFamily="34" charset="-120"/>
+              </a:rPr>
+              <a:t>·</a:t>
+            </a:r>
+            <a:endParaRPr lang="en-US" sz="1600" dirty="0"/>
+          </a:p>
+        </p:txBody>
+      </p:sp>
+      <p:sp>
+        <p:nvSpPr>
+          <p:cNvPr id="34" name="Shape 32"/>
+          <p:cNvSpPr/>
+          <p:nvPr/>
+        </p:nvSpPr>
+        <p:spPr>
+          <a:xfrm>
+            <a:off x="6428232" y="3364992"/>
+            <a:ext cx="1645920" cy="475488"/>
+          </a:xfrm>
+          <a:prstGeom prst="rect">
+            <a:avLst>
+              <a:gd name="adj" fmla="val 9615"/>
+            </a:avLst>
+          </a:prstGeom>
+          <a:solidFill>
+            <a:srgbClr val="FFFFFF"/>
+          </a:solidFill>
+          <a:ln w="12700">
+            <a:solidFill>
+              <a:srgbClr val="0D9488"/>
+            </a:solidFill>
+            <a:prstDash val="solid"/>
+          </a:ln>
+        </p:spPr>
+      </p:sp>
+      <p:sp>
+        <p:nvSpPr>
+          <p:cNvPr id="35" name="Text 33"/>
+          <p:cNvSpPr/>
+          <p:nvPr/>
+        </p:nvSpPr>
+        <p:spPr>
+          <a:xfrm>
+            <a:off x="6428232" y="3364992"/>
+            <a:ext cx="1645920" cy="475488"/>
+          </a:xfrm>
+          <a:prstGeom prst="rect">
+            <a:avLst/>
+          </a:prstGeom>
+          <a:noFill/>
+          <a:ln/>
+        </p:spPr>
+        <p:txBody>
+          <a:bodyPr wrap="square" lIns="0" tIns="0" rIns="0" bIns="0" rtlCol="0" anchor="ctr"/>
+          <a:lstStyle/>
+          <a:p>
+            <a:pPr algn="ctr" indent="0" marL="0">
+              <a:buNone/>
+            </a:pPr>
+            <a:r>
+              <a:rPr lang="en-US" sz="1400" b="1" dirty="0">
+                <a:solidFill>
+                  <a:srgbClr val="0D9488"/>
+                </a:solidFill>
+                <a:latin typeface="Trebuchet MS" pitchFamily="34" charset="0"/>
+                <a:ea typeface="Trebuchet MS" pitchFamily="34" charset="-122"/>
+                <a:cs typeface="Trebuchet MS" pitchFamily="34" charset="-120"/>
+              </a:rPr>
+              <a:t>ing</a:t>
+            </a:r>
+            <a:endParaRPr lang="en-US" sz="1400" dirty="0"/>
+          </a:p>
+        </p:txBody>
+      </p:sp>
+      <p:sp>
+        <p:nvSpPr>
+          <p:cNvPr id="36" name="Shape 34"/>
           <p:cNvSpPr/>
           <p:nvPr/>
         </p:nvSpPr>
@@ -21906,7 +21374,7 @@
       </p:sp>
       <p:sp>
         <p:nvSpPr>
-          <p:cNvPr id="31" name="Text 29"/>
+          <p:cNvPr id="37" name="Text 35"/>
           <p:cNvSpPr/>
           <p:nvPr/>
         </p:nvSpPr>
@@ -21945,7 +21413,7 @@
       </p:sp>
       <p:sp>
         <p:nvSpPr>
-          <p:cNvPr id="32" name="Shape 30"/>
+          <p:cNvPr id="38" name="Shape 36"/>
           <p:cNvSpPr/>
           <p:nvPr/>
         </p:nvSpPr>
@@ -21972,7 +21440,7 @@
       </p:sp>
       <p:sp>
         <p:nvSpPr>
-          <p:cNvPr id="33" name="Text 31"/>
+          <p:cNvPr id="39" name="Text 37"/>
           <p:cNvSpPr/>
           <p:nvPr/>
         </p:nvSpPr>
@@ -22434,7 +21902,7 @@
                 <a:ea typeface="Trebuchet MS" pitchFamily="34" charset="-122"/>
                 <a:cs typeface="Trebuchet MS" pitchFamily="34" charset="-120"/>
               </a:rPr>
-              <a:t>contest</a:t>
+              <a:t>protesting</a:t>
             </a:r>
             <a:endParaRPr lang="en-US" sz="2800" dirty="0"/>
           </a:p>
@@ -22514,7 +21982,7 @@
         </p:nvSpPr>
         <p:spPr>
           <a:xfrm>
-            <a:off x="2938272" y="2258568"/>
+            <a:off x="2221992" y="2258568"/>
             <a:ext cx="1828800" cy="292608"/>
           </a:xfrm>
           <a:prstGeom prst="rect">
@@ -22548,7 +22016,7 @@
         </p:nvSpPr>
         <p:spPr>
           <a:xfrm>
-            <a:off x="2938272" y="2258568"/>
+            <a:off x="2221992" y="2258568"/>
             <a:ext cx="1828800" cy="292608"/>
           </a:xfrm>
           <a:prstGeom prst="rect">
@@ -22573,7 +22041,7 @@
                 <a:ea typeface="Trebuchet MS" pitchFamily="34" charset="-122"/>
                 <a:cs typeface="Trebuchet MS" pitchFamily="34" charset="-120"/>
               </a:rPr>
-              <a:t>con</a:t>
+              <a:t>pro</a:t>
             </a:r>
             <a:endParaRPr lang="en-US" sz="1300" dirty="0"/>
           </a:p>
@@ -22587,7 +22055,7 @@
         </p:nvSpPr>
         <p:spPr>
           <a:xfrm>
-            <a:off x="2938272" y="2569464"/>
+            <a:off x="2221992" y="2569464"/>
             <a:ext cx="1828800" cy="201168"/>
           </a:xfrm>
           <a:prstGeom prst="rect">
@@ -22612,7 +22080,7 @@
                 <a:ea typeface="Calibri" pitchFamily="34" charset="-122"/>
                 <a:cs typeface="Calibri" pitchFamily="34" charset="-120"/>
               </a:rPr>
-              <a:t>together, with</a:t>
+              <a:t>forward, in favour of</a:t>
             </a:r>
             <a:endParaRPr lang="en-US" sz="850" dirty="0"/>
           </a:p>
@@ -22626,7 +22094,7 @@
         </p:nvSpPr>
         <p:spPr>
           <a:xfrm>
-            <a:off x="5803392" y="2258568"/>
+            <a:off x="4370832" y="2258568"/>
             <a:ext cx="1828800" cy="292608"/>
           </a:xfrm>
           <a:prstGeom prst="rect">
@@ -22660,7 +22128,7 @@
         </p:nvSpPr>
         <p:spPr>
           <a:xfrm>
-            <a:off x="5803392" y="2258568"/>
+            <a:off x="4370832" y="2258568"/>
             <a:ext cx="1828800" cy="292608"/>
           </a:xfrm>
           <a:prstGeom prst="rect">
@@ -22699,7 +22167,7 @@
         </p:nvSpPr>
         <p:spPr>
           <a:xfrm>
-            <a:off x="5803392" y="2569464"/>
+            <a:off x="4370832" y="2569464"/>
             <a:ext cx="1828800" cy="201168"/>
           </a:xfrm>
           <a:prstGeom prst="rect">
@@ -22724,7 +22192,7 @@
                 <a:ea typeface="Calibri" pitchFamily="34" charset="-122"/>
                 <a:cs typeface="Calibri" pitchFamily="34" charset="-120"/>
               </a:rPr>
-              <a:t>to try, witness</a:t>
+              <a:t>to try, examine, witness</a:t>
             </a:r>
             <a:endParaRPr lang="en-US" sz="850" dirty="0"/>
           </a:p>
@@ -22733,6 +22201,118 @@
       <p:sp>
         <p:nvSpPr>
           <p:cNvPr id="22" name="Shape 20"/>
+          <p:cNvSpPr/>
+          <p:nvPr/>
+        </p:nvSpPr>
+        <p:spPr>
+          <a:xfrm>
+            <a:off x="6519672" y="2258568"/>
+            <a:ext cx="1828800" cy="292608"/>
+          </a:xfrm>
+          <a:prstGeom prst="rect">
+            <a:avLst>
+              <a:gd name="adj" fmla="val 25000"/>
+            </a:avLst>
+          </a:prstGeom>
+          <a:solidFill>
+            <a:srgbClr val="FCE7F3"/>
+          </a:solidFill>
+          <a:ln w="19050">
+            <a:solidFill>
+              <a:srgbClr val="DB2777"/>
+            </a:solidFill>
+            <a:prstDash val="solid"/>
+          </a:ln>
+          <a:effectLst>
+            <a:outerShdw sx="100000" sy="100000" kx="0" ky="0" algn="bl" rotWithShape="0" blurRad="101600" dist="38100" dir="8100000">
+              <a:srgbClr val="000000">
+                <a:alpha val="12000"/>
+              </a:srgbClr>
+            </a:outerShdw>
+          </a:effectLst>
+        </p:spPr>
+      </p:sp>
+      <p:sp>
+        <p:nvSpPr>
+          <p:cNvPr id="23" name="Text 21"/>
+          <p:cNvSpPr/>
+          <p:nvPr/>
+        </p:nvSpPr>
+        <p:spPr>
+          <a:xfrm>
+            <a:off x="6519672" y="2258568"/>
+            <a:ext cx="1828800" cy="292608"/>
+          </a:xfrm>
+          <a:prstGeom prst="rect">
+            <a:avLst/>
+          </a:prstGeom>
+          <a:noFill/>
+          <a:ln/>
+        </p:spPr>
+        <p:txBody>
+          <a:bodyPr wrap="square" lIns="0" tIns="0" rIns="0" bIns="0" rtlCol="0" anchor="ctr"/>
+          <a:lstStyle/>
+          <a:p>
+            <a:pPr algn="ctr" indent="0" marL="0">
+              <a:buNone/>
+            </a:pPr>
+            <a:r>
+              <a:rPr lang="en-US" sz="1300" b="1" dirty="0">
+                <a:solidFill>
+                  <a:srgbClr val="9D174D"/>
+                </a:solidFill>
+                <a:latin typeface="Trebuchet MS" pitchFamily="34" charset="0"/>
+                <a:ea typeface="Trebuchet MS" pitchFamily="34" charset="-122"/>
+                <a:cs typeface="Trebuchet MS" pitchFamily="34" charset="-120"/>
+              </a:rPr>
+              <a:t>ing</a:t>
+            </a:r>
+            <a:endParaRPr lang="en-US" sz="1300" dirty="0"/>
+          </a:p>
+        </p:txBody>
+      </p:sp>
+      <p:sp>
+        <p:nvSpPr>
+          <p:cNvPr id="24" name="Text 22"/>
+          <p:cNvSpPr/>
+          <p:nvPr/>
+        </p:nvSpPr>
+        <p:spPr>
+          <a:xfrm>
+            <a:off x="6519672" y="2569464"/>
+            <a:ext cx="1828800" cy="201168"/>
+          </a:xfrm>
+          <a:prstGeom prst="rect">
+            <a:avLst/>
+          </a:prstGeom>
+          <a:noFill/>
+          <a:ln/>
+        </p:spPr>
+        <p:txBody>
+          <a:bodyPr wrap="square" lIns="0" tIns="0" rIns="0" bIns="0" rtlCol="0" anchor="t"/>
+          <a:lstStyle/>
+          <a:p>
+            <a:pPr algn="ctr" indent="0" marL="0">
+              <a:buNone/>
+            </a:pPr>
+            <a:r>
+              <a:rPr lang="en-US" sz="850" dirty="0">
+                <a:solidFill>
+                  <a:srgbClr val="475569"/>
+                </a:solidFill>
+                <a:latin typeface="Calibri" pitchFamily="34" charset="0"/>
+                <a:ea typeface="Calibri" pitchFamily="34" charset="-122"/>
+                <a:cs typeface="Calibri" pitchFamily="34" charset="-120"/>
+              </a:rPr>
+              <a:t>ongoing action</a:t>
+            </a:r>
+            <a:endParaRPr lang="en-US" sz="850" dirty="0"/>
+          </a:p>
+        </p:txBody>
+      </p:sp>
+      <p:sp>
+        <p:nvSpPr>
+          <p:cNvPr id="25" name="Shape 23"/>
           <p:cNvSpPr/>
           <p:nvPr/>
         </p:nvSpPr>
@@ -22759,7 +22339,7 @@
       </p:sp>
       <p:sp>
         <p:nvSpPr>
-          <p:cNvPr id="23" name="Text 21"/>
+          <p:cNvPr id="26" name="Text 24"/>
           <p:cNvSpPr/>
           <p:nvPr/>
         </p:nvSpPr>
@@ -22798,7 +22378,7 @@
       </p:sp>
       <p:sp>
         <p:nvSpPr>
-          <p:cNvPr id="24" name="Shape 22"/>
+          <p:cNvPr id="27" name="Shape 25"/>
           <p:cNvSpPr/>
           <p:nvPr/>
         </p:nvSpPr>
@@ -22825,13 +22405,13 @@
       </p:sp>
       <p:sp>
         <p:nvSpPr>
-          <p:cNvPr id="25" name="Shape 23"/>
-          <p:cNvSpPr/>
-          <p:nvPr/>
-        </p:nvSpPr>
-        <p:spPr>
-          <a:xfrm>
-            <a:off x="2999232" y="3364992"/>
+          <p:cNvPr id="28" name="Shape 26"/>
+          <p:cNvSpPr/>
+          <p:nvPr/>
+        </p:nvSpPr>
+        <p:spPr>
+          <a:xfrm>
+            <a:off x="2313432" y="3364992"/>
             <a:ext cx="1645920" cy="475488"/>
           </a:xfrm>
           <a:prstGeom prst="rect">
@@ -22852,13 +22432,13 @@
       </p:sp>
       <p:sp>
         <p:nvSpPr>
-          <p:cNvPr id="26" name="Text 24"/>
-          <p:cNvSpPr/>
-          <p:nvPr/>
-        </p:nvSpPr>
-        <p:spPr>
-          <a:xfrm>
-            <a:off x="2999232" y="3364992"/>
+          <p:cNvPr id="29" name="Text 27"/>
+          <p:cNvSpPr/>
+          <p:nvPr/>
+        </p:nvSpPr>
+        <p:spPr>
+          <a:xfrm>
+            <a:off x="2313432" y="3364992"/>
             <a:ext cx="1645920" cy="475488"/>
           </a:xfrm>
           <a:prstGeom prst="rect">
@@ -22883,7 +22463,7 @@
                 <a:ea typeface="Trebuchet MS" pitchFamily="34" charset="-122"/>
                 <a:cs typeface="Trebuchet MS" pitchFamily="34" charset="-120"/>
               </a:rPr>
-              <a:t>con</a:t>
+              <a:t>pro</a:t>
             </a:r>
             <a:endParaRPr lang="en-US" sz="1400" dirty="0"/>
           </a:p>
@@ -22891,14 +22471,14 @@
       </p:sp>
       <p:sp>
         <p:nvSpPr>
-          <p:cNvPr id="27" name="Text 25"/>
-          <p:cNvSpPr/>
-          <p:nvPr/>
-        </p:nvSpPr>
-        <p:spPr>
-          <a:xfrm>
-            <a:off x="4645152" y="3364992"/>
-            <a:ext cx="1097280" cy="475488"/>
+          <p:cNvPr id="30" name="Text 28"/>
+          <p:cNvSpPr/>
+          <p:nvPr/>
+        </p:nvSpPr>
+        <p:spPr>
+          <a:xfrm>
+            <a:off x="3959352" y="3364992"/>
+            <a:ext cx="411480" cy="475488"/>
           </a:xfrm>
           <a:prstGeom prst="rect">
             <a:avLst/>
@@ -22930,13 +22510,13 @@
       </p:sp>
       <p:sp>
         <p:nvSpPr>
-          <p:cNvPr id="28" name="Shape 26"/>
-          <p:cNvSpPr/>
-          <p:nvPr/>
-        </p:nvSpPr>
-        <p:spPr>
-          <a:xfrm>
-            <a:off x="5742432" y="3364992"/>
+          <p:cNvPr id="31" name="Shape 29"/>
+          <p:cNvSpPr/>
+          <p:nvPr/>
+        </p:nvSpPr>
+        <p:spPr>
+          <a:xfrm>
+            <a:off x="4370832" y="3364992"/>
             <a:ext cx="1645920" cy="475488"/>
           </a:xfrm>
           <a:prstGeom prst="rect">
@@ -22957,13 +22537,13 @@
       </p:sp>
       <p:sp>
         <p:nvSpPr>
-          <p:cNvPr id="29" name="Text 27"/>
-          <p:cNvSpPr/>
-          <p:nvPr/>
-        </p:nvSpPr>
-        <p:spPr>
-          <a:xfrm>
-            <a:off x="5742432" y="3364992"/>
+          <p:cNvPr id="32" name="Text 30"/>
+          <p:cNvSpPr/>
+          <p:nvPr/>
+        </p:nvSpPr>
+        <p:spPr>
+          <a:xfrm>
+            <a:off x="4370832" y="3364992"/>
             <a:ext cx="1645920" cy="475488"/>
           </a:xfrm>
           <a:prstGeom prst="rect">
@@ -22996,7 +22576,112 @@
       </p:sp>
       <p:sp>
         <p:nvSpPr>
-          <p:cNvPr id="30" name="Shape 28"/>
+          <p:cNvPr id="33" name="Text 31"/>
+          <p:cNvSpPr/>
+          <p:nvPr/>
+        </p:nvSpPr>
+        <p:spPr>
+          <a:xfrm>
+            <a:off x="6016752" y="3364992"/>
+            <a:ext cx="411480" cy="475488"/>
+          </a:xfrm>
+          <a:prstGeom prst="rect">
+            <a:avLst/>
+          </a:prstGeom>
+          <a:noFill/>
+          <a:ln/>
+        </p:spPr>
+        <p:txBody>
+          <a:bodyPr wrap="square" lIns="0" tIns="0" rIns="0" bIns="0" rtlCol="0" anchor="ctr"/>
+          <a:lstStyle/>
+          <a:p>
+            <a:pPr algn="ctr" indent="0" marL="0">
+              <a:buNone/>
+            </a:pPr>
+            <a:r>
+              <a:rPr lang="en-US" sz="1600" b="1" dirty="0">
+                <a:solidFill>
+                  <a:srgbClr val="0D9488"/>
+                </a:solidFill>
+                <a:latin typeface="Trebuchet MS" pitchFamily="34" charset="0"/>
+                <a:ea typeface="Trebuchet MS" pitchFamily="34" charset="-122"/>
+                <a:cs typeface="Trebuchet MS" pitchFamily="34" charset="-120"/>
+              </a:rPr>
+              <a:t>·</a:t>
+            </a:r>
+            <a:endParaRPr lang="en-US" sz="1600" dirty="0"/>
+          </a:p>
+        </p:txBody>
+      </p:sp>
+      <p:sp>
+        <p:nvSpPr>
+          <p:cNvPr id="34" name="Shape 32"/>
+          <p:cNvSpPr/>
+          <p:nvPr/>
+        </p:nvSpPr>
+        <p:spPr>
+          <a:xfrm>
+            <a:off x="6428232" y="3364992"/>
+            <a:ext cx="1645920" cy="475488"/>
+          </a:xfrm>
+          <a:prstGeom prst="rect">
+            <a:avLst>
+              <a:gd name="adj" fmla="val 9615"/>
+            </a:avLst>
+          </a:prstGeom>
+          <a:solidFill>
+            <a:srgbClr val="FFFFFF"/>
+          </a:solidFill>
+          <a:ln w="12700">
+            <a:solidFill>
+              <a:srgbClr val="0D9488"/>
+            </a:solidFill>
+            <a:prstDash val="solid"/>
+          </a:ln>
+        </p:spPr>
+      </p:sp>
+      <p:sp>
+        <p:nvSpPr>
+          <p:cNvPr id="35" name="Text 33"/>
+          <p:cNvSpPr/>
+          <p:nvPr/>
+        </p:nvSpPr>
+        <p:spPr>
+          <a:xfrm>
+            <a:off x="6428232" y="3364992"/>
+            <a:ext cx="1645920" cy="475488"/>
+          </a:xfrm>
+          <a:prstGeom prst="rect">
+            <a:avLst/>
+          </a:prstGeom>
+          <a:noFill/>
+          <a:ln/>
+        </p:spPr>
+        <p:txBody>
+          <a:bodyPr wrap="square" lIns="0" tIns="0" rIns="0" bIns="0" rtlCol="0" anchor="ctr"/>
+          <a:lstStyle/>
+          <a:p>
+            <a:pPr algn="ctr" indent="0" marL="0">
+              <a:buNone/>
+            </a:pPr>
+            <a:r>
+              <a:rPr lang="en-US" sz="1400" b="1" dirty="0">
+                <a:solidFill>
+                  <a:srgbClr val="0D9488"/>
+                </a:solidFill>
+                <a:latin typeface="Trebuchet MS" pitchFamily="34" charset="0"/>
+                <a:ea typeface="Trebuchet MS" pitchFamily="34" charset="-122"/>
+                <a:cs typeface="Trebuchet MS" pitchFamily="34" charset="-120"/>
+              </a:rPr>
+              <a:t>ing</a:t>
+            </a:r>
+            <a:endParaRPr lang="en-US" sz="1400" dirty="0"/>
+          </a:p>
+        </p:txBody>
+      </p:sp>
+      <p:sp>
+        <p:nvSpPr>
+          <p:cNvPr id="36" name="Shape 34"/>
           <p:cNvSpPr/>
           <p:nvPr/>
         </p:nvSpPr>
@@ -23023,7 +22708,7 @@
       </p:sp>
       <p:sp>
         <p:nvSpPr>
-          <p:cNvPr id="31" name="Text 29"/>
+          <p:cNvPr id="37" name="Text 35"/>
           <p:cNvSpPr/>
           <p:nvPr/>
         </p:nvSpPr>
@@ -23062,18 +22747,18 @@
       </p:sp>
       <p:sp>
         <p:nvSpPr>
-          <p:cNvPr id="32" name="Shape 30"/>
+          <p:cNvPr id="38" name="Shape 36"/>
           <p:cNvSpPr/>
           <p:nvPr/>
         </p:nvSpPr>
         <p:spPr>
           <a:xfrm>
             <a:off x="1874520" y="4096512"/>
-            <a:ext cx="6903720" cy="804672"/>
+            <a:ext cx="6903720" cy="658368"/>
           </a:xfrm>
           <a:prstGeom prst="rect">
             <a:avLst>
-              <a:gd name="adj" fmla="val 6818"/>
+              <a:gd name="adj" fmla="val 8333"/>
             </a:avLst>
           </a:prstGeom>
           <a:solidFill>
@@ -23089,18 +22774,18 @@
       </p:sp>
       <p:sp>
         <p:nvSpPr>
-          <p:cNvPr id="33" name="Shape 31"/>
-          <p:cNvSpPr/>
-          <p:nvPr/>
-        </p:nvSpPr>
-        <p:spPr>
-          <a:xfrm>
-            <a:off x="2124837" y="4169664"/>
-            <a:ext cx="685800" cy="384048"/>
+          <p:cNvPr id="39" name="Shape 37"/>
+          <p:cNvSpPr/>
+          <p:nvPr/>
+        </p:nvSpPr>
+        <p:spPr>
+          <a:xfrm>
+            <a:off x="1951330" y="4169664"/>
+            <a:ext cx="676656" cy="475488"/>
           </a:xfrm>
           <a:prstGeom prst="rect">
             <a:avLst>
-              <a:gd name="adj" fmla="val 9524"/>
+              <a:gd name="adj" fmla="val 7692"/>
             </a:avLst>
           </a:prstGeom>
           <a:solidFill>
@@ -23116,14 +22801,14 @@
       </p:sp>
       <p:sp>
         <p:nvSpPr>
-          <p:cNvPr id="34" name="Text 32"/>
-          <p:cNvSpPr/>
-          <p:nvPr/>
-        </p:nvSpPr>
-        <p:spPr>
-          <a:xfrm>
-            <a:off x="2124837" y="4169664"/>
-            <a:ext cx="685800" cy="384048"/>
+          <p:cNvPr id="40" name="Text 38"/>
+          <p:cNvSpPr/>
+          <p:nvPr/>
+        </p:nvSpPr>
+        <p:spPr>
+          <a:xfrm>
+            <a:off x="1951330" y="4169664"/>
+            <a:ext cx="676656" cy="475488"/>
           </a:xfrm>
           <a:prstGeom prst="rect">
             <a:avLst/>
@@ -23147,7 +22832,7 @@
                 <a:ea typeface="Trebuchet MS" pitchFamily="34" charset="-122"/>
                 <a:cs typeface="Trebuchet MS" pitchFamily="34" charset="-120"/>
               </a:rPr>
-              <a:t>c</a:t>
+              <a:t>p</a:t>
             </a:r>
             <a:endParaRPr lang="en-US" sz="900" dirty="0"/>
           </a:p>
@@ -23155,57 +22840,18 @@
       </p:sp>
       <p:sp>
         <p:nvSpPr>
-          <p:cNvPr id="35" name="Text 33"/>
-          <p:cNvSpPr/>
-          <p:nvPr/>
-        </p:nvSpPr>
-        <p:spPr>
-          <a:xfrm>
-            <a:off x="2124837" y="4572000"/>
-            <a:ext cx="685800" cy="219456"/>
-          </a:xfrm>
-          <a:prstGeom prst="rect">
-            <a:avLst/>
-          </a:prstGeom>
-          <a:noFill/>
-          <a:ln/>
-        </p:spPr>
-        <p:txBody>
-          <a:bodyPr wrap="square" lIns="0" tIns="0" rIns="0" bIns="0" rtlCol="0" anchor="t"/>
-          <a:lstStyle/>
-          <a:p>
-            <a:pPr algn="ctr" indent="0" marL="0">
-              <a:buNone/>
-            </a:pPr>
-            <a:r>
-              <a:rPr lang="en-US" sz="750" i="1" dirty="0">
-                <a:solidFill>
-                  <a:srgbClr val="94A3B8"/>
-                </a:solidFill>
-                <a:latin typeface="Calibri" pitchFamily="34" charset="0"/>
-                <a:ea typeface="Calibri" pitchFamily="34" charset="-122"/>
-                <a:cs typeface="Calibri" pitchFamily="34" charset="-120"/>
-              </a:rPr>
-              <a:t>/k/</a:t>
-            </a:r>
-            <a:endParaRPr lang="en-US" sz="750" dirty="0"/>
-          </a:p>
-        </p:txBody>
-      </p:sp>
-      <p:sp>
-        <p:nvSpPr>
-          <p:cNvPr id="36" name="Shape 34"/>
-          <p:cNvSpPr/>
-          <p:nvPr/>
-        </p:nvSpPr>
-        <p:spPr>
-          <a:xfrm>
-            <a:off x="3033522" y="4169664"/>
-            <a:ext cx="685800" cy="384048"/>
+          <p:cNvPr id="41" name="Shape 39"/>
+          <p:cNvSpPr/>
+          <p:nvPr/>
+        </p:nvSpPr>
+        <p:spPr>
+          <a:xfrm>
+            <a:off x="2677363" y="4169664"/>
+            <a:ext cx="676656" cy="475488"/>
           </a:xfrm>
           <a:prstGeom prst="rect">
             <a:avLst>
-              <a:gd name="adj" fmla="val 9524"/>
+              <a:gd name="adj" fmla="val 7692"/>
             </a:avLst>
           </a:prstGeom>
           <a:solidFill>
@@ -23221,14 +22867,14 @@
       </p:sp>
       <p:sp>
         <p:nvSpPr>
-          <p:cNvPr id="37" name="Text 35"/>
-          <p:cNvSpPr/>
-          <p:nvPr/>
-        </p:nvSpPr>
-        <p:spPr>
-          <a:xfrm>
-            <a:off x="3033522" y="4169664"/>
-            <a:ext cx="685800" cy="384048"/>
+          <p:cNvPr id="42" name="Text 40"/>
+          <p:cNvSpPr/>
+          <p:nvPr/>
+        </p:nvSpPr>
+        <p:spPr>
+          <a:xfrm>
+            <a:off x="2677363" y="4169664"/>
+            <a:ext cx="676656" cy="475488"/>
           </a:xfrm>
           <a:prstGeom prst="rect">
             <a:avLst/>
@@ -23252,7 +22898,7 @@
                 <a:ea typeface="Trebuchet MS" pitchFamily="34" charset="-122"/>
                 <a:cs typeface="Trebuchet MS" pitchFamily="34" charset="-120"/>
               </a:rPr>
-              <a:t>o</a:t>
+              <a:t>r</a:t>
             </a:r>
             <a:endParaRPr lang="en-US" sz="900" dirty="0"/>
           </a:p>
@@ -23260,18 +22906,18 @@
       </p:sp>
       <p:sp>
         <p:nvSpPr>
-          <p:cNvPr id="38" name="Shape 36"/>
-          <p:cNvSpPr/>
-          <p:nvPr/>
-        </p:nvSpPr>
-        <p:spPr>
-          <a:xfrm>
-            <a:off x="3942207" y="4169664"/>
-            <a:ext cx="685800" cy="384048"/>
+          <p:cNvPr id="43" name="Shape 41"/>
+          <p:cNvSpPr/>
+          <p:nvPr/>
+        </p:nvSpPr>
+        <p:spPr>
+          <a:xfrm>
+            <a:off x="3403397" y="4169664"/>
+            <a:ext cx="676656" cy="475488"/>
           </a:xfrm>
           <a:prstGeom prst="rect">
             <a:avLst>
-              <a:gd name="adj" fmla="val 9524"/>
+              <a:gd name="adj" fmla="val 7692"/>
             </a:avLst>
           </a:prstGeom>
           <a:solidFill>
@@ -23287,14 +22933,14 @@
       </p:sp>
       <p:sp>
         <p:nvSpPr>
-          <p:cNvPr id="39" name="Text 37"/>
-          <p:cNvSpPr/>
-          <p:nvPr/>
-        </p:nvSpPr>
-        <p:spPr>
-          <a:xfrm>
-            <a:off x="3942207" y="4169664"/>
-            <a:ext cx="685800" cy="384048"/>
+          <p:cNvPr id="44" name="Text 42"/>
+          <p:cNvSpPr/>
+          <p:nvPr/>
+        </p:nvSpPr>
+        <p:spPr>
+          <a:xfrm>
+            <a:off x="3403397" y="4169664"/>
+            <a:ext cx="676656" cy="475488"/>
           </a:xfrm>
           <a:prstGeom prst="rect">
             <a:avLst/>
@@ -23318,7 +22964,7 @@
                 <a:ea typeface="Trebuchet MS" pitchFamily="34" charset="-122"/>
                 <a:cs typeface="Trebuchet MS" pitchFamily="34" charset="-120"/>
               </a:rPr>
-              <a:t>n</a:t>
+              <a:t>o</a:t>
             </a:r>
             <a:endParaRPr lang="en-US" sz="900" dirty="0"/>
           </a:p>
@@ -23326,18 +22972,18 @@
       </p:sp>
       <p:sp>
         <p:nvSpPr>
-          <p:cNvPr id="40" name="Shape 38"/>
-          <p:cNvSpPr/>
-          <p:nvPr/>
-        </p:nvSpPr>
-        <p:spPr>
-          <a:xfrm>
-            <a:off x="4850892" y="4169664"/>
-            <a:ext cx="685800" cy="384048"/>
+          <p:cNvPr id="45" name="Shape 43"/>
+          <p:cNvSpPr/>
+          <p:nvPr/>
+        </p:nvSpPr>
+        <p:spPr>
+          <a:xfrm>
+            <a:off x="4129430" y="4169664"/>
+            <a:ext cx="676656" cy="475488"/>
           </a:xfrm>
           <a:prstGeom prst="rect">
             <a:avLst>
-              <a:gd name="adj" fmla="val 9524"/>
+              <a:gd name="adj" fmla="val 7692"/>
             </a:avLst>
           </a:prstGeom>
           <a:solidFill>
@@ -23353,14 +22999,14 @@
       </p:sp>
       <p:sp>
         <p:nvSpPr>
-          <p:cNvPr id="41" name="Text 39"/>
-          <p:cNvSpPr/>
-          <p:nvPr/>
-        </p:nvSpPr>
-        <p:spPr>
-          <a:xfrm>
-            <a:off x="4850892" y="4169664"/>
-            <a:ext cx="685800" cy="384048"/>
+          <p:cNvPr id="46" name="Text 44"/>
+          <p:cNvSpPr/>
+          <p:nvPr/>
+        </p:nvSpPr>
+        <p:spPr>
+          <a:xfrm>
+            <a:off x="4129430" y="4169664"/>
+            <a:ext cx="676656" cy="475488"/>
           </a:xfrm>
           <a:prstGeom prst="rect">
             <a:avLst/>
@@ -23392,18 +23038,18 @@
       </p:sp>
       <p:sp>
         <p:nvSpPr>
-          <p:cNvPr id="42" name="Shape 40"/>
-          <p:cNvSpPr/>
-          <p:nvPr/>
-        </p:nvSpPr>
-        <p:spPr>
-          <a:xfrm>
-            <a:off x="5759577" y="4169664"/>
-            <a:ext cx="685800" cy="384048"/>
+          <p:cNvPr id="47" name="Shape 45"/>
+          <p:cNvSpPr/>
+          <p:nvPr/>
+        </p:nvSpPr>
+        <p:spPr>
+          <a:xfrm>
+            <a:off x="4855464" y="4169664"/>
+            <a:ext cx="676656" cy="475488"/>
           </a:xfrm>
           <a:prstGeom prst="rect">
             <a:avLst>
-              <a:gd name="adj" fmla="val 9524"/>
+              <a:gd name="adj" fmla="val 7692"/>
             </a:avLst>
           </a:prstGeom>
           <a:solidFill>
@@ -23419,14 +23065,14 @@
       </p:sp>
       <p:sp>
         <p:nvSpPr>
-          <p:cNvPr id="43" name="Text 41"/>
-          <p:cNvSpPr/>
-          <p:nvPr/>
-        </p:nvSpPr>
-        <p:spPr>
-          <a:xfrm>
-            <a:off x="5759577" y="4169664"/>
-            <a:ext cx="685800" cy="384048"/>
+          <p:cNvPr id="48" name="Text 46"/>
+          <p:cNvSpPr/>
+          <p:nvPr/>
+        </p:nvSpPr>
+        <p:spPr>
+          <a:xfrm>
+            <a:off x="4855464" y="4169664"/>
+            <a:ext cx="676656" cy="475488"/>
           </a:xfrm>
           <a:prstGeom prst="rect">
             <a:avLst/>
@@ -23458,18 +23104,18 @@
       </p:sp>
       <p:sp>
         <p:nvSpPr>
-          <p:cNvPr id="44" name="Shape 42"/>
-          <p:cNvSpPr/>
-          <p:nvPr/>
-        </p:nvSpPr>
-        <p:spPr>
-          <a:xfrm>
-            <a:off x="6668262" y="4169664"/>
-            <a:ext cx="685800" cy="384048"/>
+          <p:cNvPr id="49" name="Shape 47"/>
+          <p:cNvSpPr/>
+          <p:nvPr/>
+        </p:nvSpPr>
+        <p:spPr>
+          <a:xfrm>
+            <a:off x="5581498" y="4169664"/>
+            <a:ext cx="676656" cy="475488"/>
           </a:xfrm>
           <a:prstGeom prst="rect">
             <a:avLst>
-              <a:gd name="adj" fmla="val 9524"/>
+              <a:gd name="adj" fmla="val 7692"/>
             </a:avLst>
           </a:prstGeom>
           <a:solidFill>
@@ -23485,14 +23131,14 @@
       </p:sp>
       <p:sp>
         <p:nvSpPr>
-          <p:cNvPr id="45" name="Text 43"/>
-          <p:cNvSpPr/>
-          <p:nvPr/>
-        </p:nvSpPr>
-        <p:spPr>
-          <a:xfrm>
-            <a:off x="6668262" y="4169664"/>
-            <a:ext cx="685800" cy="384048"/>
+          <p:cNvPr id="50" name="Text 48"/>
+          <p:cNvSpPr/>
+          <p:nvPr/>
+        </p:nvSpPr>
+        <p:spPr>
+          <a:xfrm>
+            <a:off x="5581498" y="4169664"/>
+            <a:ext cx="676656" cy="475488"/>
           </a:xfrm>
           <a:prstGeom prst="rect">
             <a:avLst/>
@@ -23524,18 +23170,18 @@
       </p:sp>
       <p:sp>
         <p:nvSpPr>
-          <p:cNvPr id="46" name="Shape 44"/>
-          <p:cNvSpPr/>
-          <p:nvPr/>
-        </p:nvSpPr>
-        <p:spPr>
-          <a:xfrm>
-            <a:off x="7576947" y="4169664"/>
-            <a:ext cx="685800" cy="384048"/>
+          <p:cNvPr id="51" name="Shape 49"/>
+          <p:cNvSpPr/>
+          <p:nvPr/>
+        </p:nvSpPr>
+        <p:spPr>
+          <a:xfrm>
+            <a:off x="6307531" y="4169664"/>
+            <a:ext cx="676656" cy="475488"/>
           </a:xfrm>
           <a:prstGeom prst="rect">
             <a:avLst>
-              <a:gd name="adj" fmla="val 9524"/>
+              <a:gd name="adj" fmla="val 7692"/>
             </a:avLst>
           </a:prstGeom>
           <a:solidFill>
@@ -23551,14 +23197,14 @@
       </p:sp>
       <p:sp>
         <p:nvSpPr>
-          <p:cNvPr id="47" name="Text 45"/>
-          <p:cNvSpPr/>
-          <p:nvPr/>
-        </p:nvSpPr>
-        <p:spPr>
-          <a:xfrm>
-            <a:off x="7576947" y="4169664"/>
-            <a:ext cx="685800" cy="384048"/>
+          <p:cNvPr id="52" name="Text 50"/>
+          <p:cNvSpPr/>
+          <p:nvPr/>
+        </p:nvSpPr>
+        <p:spPr>
+          <a:xfrm>
+            <a:off x="6307531" y="4169664"/>
+            <a:ext cx="676656" cy="475488"/>
           </a:xfrm>
           <a:prstGeom prst="rect">
             <a:avLst/>
@@ -23583,6 +23229,138 @@
                 <a:cs typeface="Trebuchet MS" pitchFamily="34" charset="-120"/>
               </a:rPr>
               <a:t>t</a:t>
+            </a:r>
+            <a:endParaRPr lang="en-US" sz="900" dirty="0"/>
+          </a:p>
+        </p:txBody>
+      </p:sp>
+      <p:sp>
+        <p:nvSpPr>
+          <p:cNvPr id="53" name="Shape 51"/>
+          <p:cNvSpPr/>
+          <p:nvPr/>
+        </p:nvSpPr>
+        <p:spPr>
+          <a:xfrm>
+            <a:off x="7033565" y="4169664"/>
+            <a:ext cx="676656" cy="475488"/>
+          </a:xfrm>
+          <a:prstGeom prst="rect">
+            <a:avLst>
+              <a:gd name="adj" fmla="val 7692"/>
+            </a:avLst>
+          </a:prstGeom>
+          <a:solidFill>
+            <a:srgbClr val="FFFFFF"/>
+          </a:solidFill>
+          <a:ln w="12700">
+            <a:solidFill>
+              <a:srgbClr val="DB2777"/>
+            </a:solidFill>
+            <a:prstDash val="solid"/>
+          </a:ln>
+        </p:spPr>
+      </p:sp>
+      <p:sp>
+        <p:nvSpPr>
+          <p:cNvPr id="54" name="Text 52"/>
+          <p:cNvSpPr/>
+          <p:nvPr/>
+        </p:nvSpPr>
+        <p:spPr>
+          <a:xfrm>
+            <a:off x="7033565" y="4169664"/>
+            <a:ext cx="676656" cy="475488"/>
+          </a:xfrm>
+          <a:prstGeom prst="rect">
+            <a:avLst/>
+          </a:prstGeom>
+          <a:noFill/>
+          <a:ln/>
+        </p:spPr>
+        <p:txBody>
+          <a:bodyPr wrap="square" lIns="0" tIns="0" rIns="0" bIns="0" rtlCol="0" anchor="ctr"/>
+          <a:lstStyle/>
+          <a:p>
+            <a:pPr algn="ctr" indent="0" marL="0">
+              <a:buNone/>
+            </a:pPr>
+            <a:r>
+              <a:rPr lang="en-US" sz="900" b="1" dirty="0">
+                <a:solidFill>
+                  <a:srgbClr val="9D174D"/>
+                </a:solidFill>
+                <a:latin typeface="Trebuchet MS" pitchFamily="34" charset="0"/>
+                <a:ea typeface="Trebuchet MS" pitchFamily="34" charset="-122"/>
+                <a:cs typeface="Trebuchet MS" pitchFamily="34" charset="-120"/>
+              </a:rPr>
+              <a:t>i</a:t>
+            </a:r>
+            <a:endParaRPr lang="en-US" sz="900" dirty="0"/>
+          </a:p>
+        </p:txBody>
+      </p:sp>
+      <p:sp>
+        <p:nvSpPr>
+          <p:cNvPr id="55" name="Shape 53"/>
+          <p:cNvSpPr/>
+          <p:nvPr/>
+        </p:nvSpPr>
+        <p:spPr>
+          <a:xfrm>
+            <a:off x="7759598" y="4169664"/>
+            <a:ext cx="676656" cy="475488"/>
+          </a:xfrm>
+          <a:prstGeom prst="rect">
+            <a:avLst>
+              <a:gd name="adj" fmla="val 7692"/>
+            </a:avLst>
+          </a:prstGeom>
+          <a:solidFill>
+            <a:srgbClr val="FFFFFF"/>
+          </a:solidFill>
+          <a:ln w="12700">
+            <a:solidFill>
+              <a:srgbClr val="DB2777"/>
+            </a:solidFill>
+            <a:prstDash val="solid"/>
+          </a:ln>
+        </p:spPr>
+      </p:sp>
+      <p:sp>
+        <p:nvSpPr>
+          <p:cNvPr id="56" name="Text 54"/>
+          <p:cNvSpPr/>
+          <p:nvPr/>
+        </p:nvSpPr>
+        <p:spPr>
+          <a:xfrm>
+            <a:off x="7759598" y="4169664"/>
+            <a:ext cx="676656" cy="475488"/>
+          </a:xfrm>
+          <a:prstGeom prst="rect">
+            <a:avLst/>
+          </a:prstGeom>
+          <a:noFill/>
+          <a:ln/>
+        </p:spPr>
+        <p:txBody>
+          <a:bodyPr wrap="square" lIns="0" tIns="0" rIns="0" bIns="0" rtlCol="0" anchor="ctr"/>
+          <a:lstStyle/>
+          <a:p>
+            <a:pPr algn="ctr" indent="0" marL="0">
+              <a:buNone/>
+            </a:pPr>
+            <a:r>
+              <a:rPr lang="en-US" sz="900" b="1" dirty="0">
+                <a:solidFill>
+                  <a:srgbClr val="9D174D"/>
+                </a:solidFill>
+                <a:latin typeface="Trebuchet MS" pitchFamily="34" charset="0"/>
+                <a:ea typeface="Trebuchet MS" pitchFamily="34" charset="-122"/>
+                <a:cs typeface="Trebuchet MS" pitchFamily="34" charset="-120"/>
+              </a:rPr>
+              <a:t>ng</a:t>
             </a:r>
             <a:endParaRPr lang="en-US" sz="900" dirty="0"/>
           </a:p>
@@ -24013,7 +23791,7 @@
                 <a:ea typeface="Trebuchet MS" pitchFamily="34" charset="-122"/>
                 <a:cs typeface="Trebuchet MS" pitchFamily="34" charset="-120"/>
               </a:rPr>
-              <a:t>attest</a:t>
+              <a:t>tester</a:t>
             </a:r>
             <a:endParaRPr lang="en-US" sz="2800" dirty="0"/>
           </a:p>
@@ -24840,7 +24618,7 @@
                 <a:ea typeface="Trebuchet MS" pitchFamily="34" charset="-122"/>
                 <a:cs typeface="Trebuchet MS" pitchFamily="34" charset="-120"/>
               </a:rPr>
-              <a:t>attest</a:t>
+              <a:t>tester</a:t>
             </a:r>
             <a:endParaRPr lang="en-US" sz="2800" dirty="0"/>
           </a:p>
@@ -24929,11 +24707,11 @@
             </a:avLst>
           </a:prstGeom>
           <a:solidFill>
-            <a:srgbClr val="DDD6FE"/>
+            <a:srgbClr val="CCFBF1"/>
           </a:solidFill>
           <a:ln w="19050">
             <a:solidFill>
-              <a:srgbClr val="7C3AED"/>
+              <a:srgbClr val="0D9488"/>
             </a:solidFill>
             <a:prstDash val="solid"/>
           </a:ln>
@@ -24973,13 +24751,13 @@
             <a:r>
               <a:rPr lang="en-US" sz="1300" b="1" dirty="0">
                 <a:solidFill>
-                  <a:srgbClr val="4C1D95"/>
+                  <a:srgbClr val="0F766E"/>
                 </a:solidFill>
                 <a:latin typeface="Trebuchet MS" pitchFamily="34" charset="0"/>
                 <a:ea typeface="Trebuchet MS" pitchFamily="34" charset="-122"/>
                 <a:cs typeface="Trebuchet MS" pitchFamily="34" charset="-120"/>
               </a:rPr>
-              <a:t>at</a:t>
+              <a:t>test</a:t>
             </a:r>
             <a:endParaRPr lang="en-US" sz="1300" dirty="0"/>
           </a:p>
@@ -25018,7 +24796,7 @@
                 <a:ea typeface="Calibri" pitchFamily="34" charset="-122"/>
                 <a:cs typeface="Calibri" pitchFamily="34" charset="-120"/>
               </a:rPr>
-              <a:t>to, toward</a:t>
+              <a:t>to try, examine, witness</a:t>
             </a:r>
             <a:endParaRPr lang="en-US" sz="850" dirty="0"/>
           </a:p>
@@ -25026,46 +24804,7 @@
       </p:sp>
       <p:sp>
         <p:nvSpPr>
-          <p:cNvPr id="19" name="Text 17"/>
-          <p:cNvSpPr/>
-          <p:nvPr/>
-        </p:nvSpPr>
-        <p:spPr>
-          <a:xfrm>
-            <a:off x="2938272" y="2752344"/>
-            <a:ext cx="1828800" cy="182880"/>
-          </a:xfrm>
-          <a:prstGeom prst="rect">
-            <a:avLst/>
-          </a:prstGeom>
-          <a:noFill/>
-          <a:ln/>
-        </p:spPr>
-        <p:txBody>
-          <a:bodyPr wrap="square" lIns="0" tIns="0" rIns="0" bIns="0" rtlCol="0" anchor="t"/>
-          <a:lstStyle/>
-          <a:p>
-            <a:pPr algn="ctr" indent="0" marL="0">
-              <a:buNone/>
-            </a:pPr>
-            <a:r>
-              <a:rPr lang="en-US" sz="700" i="1" dirty="0">
-                <a:solidFill>
-                  <a:srgbClr val="94A3B8"/>
-                </a:solidFill>
-                <a:latin typeface="Calibri" pitchFamily="34" charset="0"/>
-                <a:ea typeface="Calibri" pitchFamily="34" charset="-122"/>
-                <a:cs typeface="Calibri" pitchFamily="34" charset="-120"/>
-              </a:rPr>
-              <a:t>ad → at before 't'</a:t>
-            </a:r>
-            <a:endParaRPr lang="en-US" sz="700" dirty="0"/>
-          </a:p>
-        </p:txBody>
-      </p:sp>
-      <p:sp>
-        <p:nvSpPr>
-          <p:cNvPr id="20" name="Shape 18"/>
+          <p:cNvPr id="19" name="Shape 17"/>
           <p:cNvSpPr/>
           <p:nvPr/>
         </p:nvSpPr>
@@ -25080,11 +24819,11 @@
             </a:avLst>
           </a:prstGeom>
           <a:solidFill>
-            <a:srgbClr val="CCFBF1"/>
+            <a:srgbClr val="FCE7F3"/>
           </a:solidFill>
           <a:ln w="19050">
             <a:solidFill>
-              <a:srgbClr val="0D9488"/>
+              <a:srgbClr val="DB2777"/>
             </a:solidFill>
             <a:prstDash val="solid"/>
           </a:ln>
@@ -25099,7 +24838,7 @@
       </p:sp>
       <p:sp>
         <p:nvSpPr>
-          <p:cNvPr id="21" name="Text 19"/>
+          <p:cNvPr id="20" name="Text 18"/>
           <p:cNvSpPr/>
           <p:nvPr/>
         </p:nvSpPr>
@@ -25124,13 +24863,13 @@
             <a:r>
               <a:rPr lang="en-US" sz="1300" b="1" dirty="0">
                 <a:solidFill>
-                  <a:srgbClr val="0F766E"/>
+                  <a:srgbClr val="9D174D"/>
                 </a:solidFill>
                 <a:latin typeface="Trebuchet MS" pitchFamily="34" charset="0"/>
                 <a:ea typeface="Trebuchet MS" pitchFamily="34" charset="-122"/>
                 <a:cs typeface="Trebuchet MS" pitchFamily="34" charset="-120"/>
               </a:rPr>
-              <a:t>test</a:t>
+              <a:t>er</a:t>
             </a:r>
             <a:endParaRPr lang="en-US" sz="1300" dirty="0"/>
           </a:p>
@@ -25138,7 +24877,7 @@
       </p:sp>
       <p:sp>
         <p:nvSpPr>
-          <p:cNvPr id="22" name="Text 20"/>
+          <p:cNvPr id="21" name="Text 19"/>
           <p:cNvSpPr/>
           <p:nvPr/>
         </p:nvSpPr>
@@ -25169,7 +24908,7 @@
                 <a:ea typeface="Calibri" pitchFamily="34" charset="-122"/>
                 <a:cs typeface="Calibri" pitchFamily="34" charset="-120"/>
               </a:rPr>
-              <a:t>to try, witness</a:t>
+              <a:t>one who does</a:t>
             </a:r>
             <a:endParaRPr lang="en-US" sz="850" dirty="0"/>
           </a:p>
@@ -25177,7 +24916,7 @@
       </p:sp>
       <p:sp>
         <p:nvSpPr>
-          <p:cNvPr id="23" name="Shape 21"/>
+          <p:cNvPr id="22" name="Shape 20"/>
           <p:cNvSpPr/>
           <p:nvPr/>
         </p:nvSpPr>
@@ -25204,7 +24943,7 @@
       </p:sp>
       <p:sp>
         <p:nvSpPr>
-          <p:cNvPr id="24" name="Text 22"/>
+          <p:cNvPr id="23" name="Text 21"/>
           <p:cNvSpPr/>
           <p:nvPr/>
         </p:nvSpPr>
@@ -25243,7 +24982,7 @@
       </p:sp>
       <p:sp>
         <p:nvSpPr>
-          <p:cNvPr id="25" name="Shape 23"/>
+          <p:cNvPr id="24" name="Shape 22"/>
           <p:cNvSpPr/>
           <p:nvPr/>
         </p:nvSpPr>
@@ -25270,7 +25009,7 @@
       </p:sp>
       <p:sp>
         <p:nvSpPr>
-          <p:cNvPr id="26" name="Text 24"/>
+          <p:cNvPr id="25" name="Text 23"/>
           <p:cNvSpPr/>
           <p:nvPr/>
         </p:nvSpPr>
@@ -25309,7 +25048,7 @@
       </p:sp>
       <p:sp>
         <p:nvSpPr>
-          <p:cNvPr id="27" name="Shape 25"/>
+          <p:cNvPr id="26" name="Shape 24"/>
           <p:cNvSpPr/>
           <p:nvPr/>
         </p:nvSpPr>
@@ -25336,7 +25075,7 @@
       </p:sp>
       <p:sp>
         <p:nvSpPr>
-          <p:cNvPr id="28" name="Text 26"/>
+          <p:cNvPr id="27" name="Text 25"/>
           <p:cNvSpPr/>
           <p:nvPr/>
         </p:nvSpPr>
@@ -25375,7 +25114,7 @@
       </p:sp>
       <p:sp>
         <p:nvSpPr>
-          <p:cNvPr id="29" name="Shape 27"/>
+          <p:cNvPr id="28" name="Shape 26"/>
           <p:cNvSpPr/>
           <p:nvPr/>
         </p:nvSpPr>
@@ -25402,7 +25141,7 @@
       </p:sp>
       <p:sp>
         <p:nvSpPr>
-          <p:cNvPr id="30" name="Text 28"/>
+          <p:cNvPr id="29" name="Text 27"/>
           <p:cNvSpPr/>
           <p:nvPr/>
         </p:nvSpPr>
@@ -26583,7 +26322,7 @@
                 <a:ea typeface="Trebuchet MS" pitchFamily="34" charset="-122"/>
                 <a:cs typeface="Trebuchet MS" pitchFamily="34" charset="-120"/>
               </a:rPr>
-              <a:t>attest</a:t>
+              <a:t>tester</a:t>
             </a:r>
             <a:endParaRPr lang="en-US" sz="2800" dirty="0"/>
           </a:p>
@@ -26672,11 +26411,11 @@
             </a:avLst>
           </a:prstGeom>
           <a:solidFill>
-            <a:srgbClr val="DDD6FE"/>
+            <a:srgbClr val="CCFBF1"/>
           </a:solidFill>
           <a:ln w="19050">
             <a:solidFill>
-              <a:srgbClr val="7C3AED"/>
+              <a:srgbClr val="0D9488"/>
             </a:solidFill>
             <a:prstDash val="solid"/>
           </a:ln>
@@ -26716,13 +26455,13 @@
             <a:r>
               <a:rPr lang="en-US" sz="1300" b="1" dirty="0">
                 <a:solidFill>
-                  <a:srgbClr val="4C1D95"/>
+                  <a:srgbClr val="0F766E"/>
                 </a:solidFill>
                 <a:latin typeface="Trebuchet MS" pitchFamily="34" charset="0"/>
                 <a:ea typeface="Trebuchet MS" pitchFamily="34" charset="-122"/>
                 <a:cs typeface="Trebuchet MS" pitchFamily="34" charset="-120"/>
               </a:rPr>
-              <a:t>at</a:t>
+              <a:t>test</a:t>
             </a:r>
             <a:endParaRPr lang="en-US" sz="1300" dirty="0"/>
           </a:p>
@@ -26761,7 +26500,7 @@
                 <a:ea typeface="Calibri" pitchFamily="34" charset="-122"/>
                 <a:cs typeface="Calibri" pitchFamily="34" charset="-120"/>
               </a:rPr>
-              <a:t>to, toward</a:t>
+              <a:t>to try, examine, witness</a:t>
             </a:r>
             <a:endParaRPr lang="en-US" sz="850" dirty="0"/>
           </a:p>
@@ -26769,46 +26508,7 @@
       </p:sp>
       <p:sp>
         <p:nvSpPr>
-          <p:cNvPr id="19" name="Text 17"/>
-          <p:cNvSpPr/>
-          <p:nvPr/>
-        </p:nvSpPr>
-        <p:spPr>
-          <a:xfrm>
-            <a:off x="2938272" y="2752344"/>
-            <a:ext cx="1828800" cy="182880"/>
-          </a:xfrm>
-          <a:prstGeom prst="rect">
-            <a:avLst/>
-          </a:prstGeom>
-          <a:noFill/>
-          <a:ln/>
-        </p:spPr>
-        <p:txBody>
-          <a:bodyPr wrap="square" lIns="0" tIns="0" rIns="0" bIns="0" rtlCol="0" anchor="t"/>
-          <a:lstStyle/>
-          <a:p>
-            <a:pPr algn="ctr" indent="0" marL="0">
-              <a:buNone/>
-            </a:pPr>
-            <a:r>
-              <a:rPr lang="en-US" sz="700" i="1" dirty="0">
-                <a:solidFill>
-                  <a:srgbClr val="94A3B8"/>
-                </a:solidFill>
-                <a:latin typeface="Calibri" pitchFamily="34" charset="0"/>
-                <a:ea typeface="Calibri" pitchFamily="34" charset="-122"/>
-                <a:cs typeface="Calibri" pitchFamily="34" charset="-120"/>
-              </a:rPr>
-              <a:t>ad → at before 't'</a:t>
-            </a:r>
-            <a:endParaRPr lang="en-US" sz="700" dirty="0"/>
-          </a:p>
-        </p:txBody>
-      </p:sp>
-      <p:sp>
-        <p:nvSpPr>
-          <p:cNvPr id="20" name="Shape 18"/>
+          <p:cNvPr id="19" name="Shape 17"/>
           <p:cNvSpPr/>
           <p:nvPr/>
         </p:nvSpPr>
@@ -26823,11 +26523,11 @@
             </a:avLst>
           </a:prstGeom>
           <a:solidFill>
-            <a:srgbClr val="CCFBF1"/>
+            <a:srgbClr val="FCE7F3"/>
           </a:solidFill>
           <a:ln w="19050">
             <a:solidFill>
-              <a:srgbClr val="0D9488"/>
+              <a:srgbClr val="DB2777"/>
             </a:solidFill>
             <a:prstDash val="solid"/>
           </a:ln>
@@ -26842,7 +26542,7 @@
       </p:sp>
       <p:sp>
         <p:nvSpPr>
-          <p:cNvPr id="21" name="Text 19"/>
+          <p:cNvPr id="20" name="Text 18"/>
           <p:cNvSpPr/>
           <p:nvPr/>
         </p:nvSpPr>
@@ -26867,13 +26567,13 @@
             <a:r>
               <a:rPr lang="en-US" sz="1300" b="1" dirty="0">
                 <a:solidFill>
-                  <a:srgbClr val="0F766E"/>
+                  <a:srgbClr val="9D174D"/>
                 </a:solidFill>
                 <a:latin typeface="Trebuchet MS" pitchFamily="34" charset="0"/>
                 <a:ea typeface="Trebuchet MS" pitchFamily="34" charset="-122"/>
                 <a:cs typeface="Trebuchet MS" pitchFamily="34" charset="-120"/>
               </a:rPr>
-              <a:t>test</a:t>
+              <a:t>er</a:t>
             </a:r>
             <a:endParaRPr lang="en-US" sz="1300" dirty="0"/>
           </a:p>
@@ -26881,7 +26581,7 @@
       </p:sp>
       <p:sp>
         <p:nvSpPr>
-          <p:cNvPr id="22" name="Text 20"/>
+          <p:cNvPr id="21" name="Text 19"/>
           <p:cNvSpPr/>
           <p:nvPr/>
         </p:nvSpPr>
@@ -26912,7 +26612,7 @@
                 <a:ea typeface="Calibri" pitchFamily="34" charset="-122"/>
                 <a:cs typeface="Calibri" pitchFamily="34" charset="-120"/>
               </a:rPr>
-              <a:t>to try, witness</a:t>
+              <a:t>one who does</a:t>
             </a:r>
             <a:endParaRPr lang="en-US" sz="850" dirty="0"/>
           </a:p>
@@ -26920,7 +26620,7 @@
       </p:sp>
       <p:sp>
         <p:nvSpPr>
-          <p:cNvPr id="23" name="Shape 21"/>
+          <p:cNvPr id="22" name="Shape 20"/>
           <p:cNvSpPr/>
           <p:nvPr/>
         </p:nvSpPr>
@@ -26947,7 +26647,7 @@
       </p:sp>
       <p:sp>
         <p:nvSpPr>
-          <p:cNvPr id="24" name="Text 22"/>
+          <p:cNvPr id="23" name="Text 21"/>
           <p:cNvSpPr/>
           <p:nvPr/>
         </p:nvSpPr>
@@ -26986,7 +26686,7 @@
       </p:sp>
       <p:sp>
         <p:nvSpPr>
-          <p:cNvPr id="25" name="Shape 23"/>
+          <p:cNvPr id="24" name="Shape 22"/>
           <p:cNvSpPr/>
           <p:nvPr/>
         </p:nvSpPr>
@@ -27013,7 +26713,7 @@
       </p:sp>
       <p:sp>
         <p:nvSpPr>
-          <p:cNvPr id="26" name="Shape 24"/>
+          <p:cNvPr id="25" name="Shape 23"/>
           <p:cNvSpPr/>
           <p:nvPr/>
         </p:nvSpPr>
@@ -27040,7 +26740,7 @@
       </p:sp>
       <p:sp>
         <p:nvSpPr>
-          <p:cNvPr id="27" name="Text 25"/>
+          <p:cNvPr id="26" name="Text 24"/>
           <p:cNvSpPr/>
           <p:nvPr/>
         </p:nvSpPr>
@@ -27071,7 +26771,7 @@
                 <a:ea typeface="Trebuchet MS" pitchFamily="34" charset="-122"/>
                 <a:cs typeface="Trebuchet MS" pitchFamily="34" charset="-120"/>
               </a:rPr>
-              <a:t>at</a:t>
+              <a:t>test</a:t>
             </a:r>
             <a:endParaRPr lang="en-US" sz="1400" dirty="0"/>
           </a:p>
@@ -27079,7 +26779,7 @@
       </p:sp>
       <p:sp>
         <p:nvSpPr>
-          <p:cNvPr id="28" name="Text 26"/>
+          <p:cNvPr id="27" name="Text 25"/>
           <p:cNvSpPr/>
           <p:nvPr/>
         </p:nvSpPr>
@@ -27118,7 +26818,7 @@
       </p:sp>
       <p:sp>
         <p:nvSpPr>
-          <p:cNvPr id="29" name="Shape 27"/>
+          <p:cNvPr id="28" name="Shape 26"/>
           <p:cNvSpPr/>
           <p:nvPr/>
         </p:nvSpPr>
@@ -27145,7 +26845,7 @@
       </p:sp>
       <p:sp>
         <p:nvSpPr>
-          <p:cNvPr id="30" name="Text 28"/>
+          <p:cNvPr id="29" name="Text 27"/>
           <p:cNvSpPr/>
           <p:nvPr/>
         </p:nvSpPr>
@@ -27176,7 +26876,7 @@
                 <a:ea typeface="Trebuchet MS" pitchFamily="34" charset="-122"/>
                 <a:cs typeface="Trebuchet MS" pitchFamily="34" charset="-120"/>
               </a:rPr>
-              <a:t>test</a:t>
+              <a:t>er</a:t>
             </a:r>
             <a:endParaRPr lang="en-US" sz="1400" dirty="0"/>
           </a:p>
@@ -27184,7 +26884,7 @@
       </p:sp>
       <p:sp>
         <p:nvSpPr>
-          <p:cNvPr id="31" name="Shape 29"/>
+          <p:cNvPr id="30" name="Shape 28"/>
           <p:cNvSpPr/>
           <p:nvPr/>
         </p:nvSpPr>
@@ -27211,7 +26911,7 @@
       </p:sp>
       <p:sp>
         <p:nvSpPr>
-          <p:cNvPr id="32" name="Text 30"/>
+          <p:cNvPr id="31" name="Text 29"/>
           <p:cNvSpPr/>
           <p:nvPr/>
         </p:nvSpPr>
@@ -27250,7 +26950,7 @@
       </p:sp>
       <p:sp>
         <p:nvSpPr>
-          <p:cNvPr id="33" name="Shape 31"/>
+          <p:cNvPr id="32" name="Shape 30"/>
           <p:cNvSpPr/>
           <p:nvPr/>
         </p:nvSpPr>
@@ -27277,7 +26977,7 @@
       </p:sp>
       <p:sp>
         <p:nvSpPr>
-          <p:cNvPr id="34" name="Text 32"/>
+          <p:cNvPr id="33" name="Text 31"/>
           <p:cNvSpPr/>
           <p:nvPr/>
         </p:nvSpPr>
@@ -27739,7 +27439,7 @@
                 <a:ea typeface="Trebuchet MS" pitchFamily="34" charset="-122"/>
                 <a:cs typeface="Trebuchet MS" pitchFamily="34" charset="-120"/>
               </a:rPr>
-              <a:t>attest</a:t>
+              <a:t>tester</a:t>
             </a:r>
             <a:endParaRPr lang="en-US" sz="2800" dirty="0"/>
           </a:p>
@@ -27828,11 +27528,11 @@
             </a:avLst>
           </a:prstGeom>
           <a:solidFill>
-            <a:srgbClr val="DDD6FE"/>
+            <a:srgbClr val="CCFBF1"/>
           </a:solidFill>
           <a:ln w="19050">
             <a:solidFill>
-              <a:srgbClr val="7C3AED"/>
+              <a:srgbClr val="0D9488"/>
             </a:solidFill>
             <a:prstDash val="solid"/>
           </a:ln>
@@ -27872,13 +27572,13 @@
             <a:r>
               <a:rPr lang="en-US" sz="1300" b="1" dirty="0">
                 <a:solidFill>
-                  <a:srgbClr val="4C1D95"/>
+                  <a:srgbClr val="0F766E"/>
                 </a:solidFill>
                 <a:latin typeface="Trebuchet MS" pitchFamily="34" charset="0"/>
                 <a:ea typeface="Trebuchet MS" pitchFamily="34" charset="-122"/>
                 <a:cs typeface="Trebuchet MS" pitchFamily="34" charset="-120"/>
               </a:rPr>
-              <a:t>at</a:t>
+              <a:t>test</a:t>
             </a:r>
             <a:endParaRPr lang="en-US" sz="1300" dirty="0"/>
           </a:p>
@@ -27917,7 +27617,7 @@
                 <a:ea typeface="Calibri" pitchFamily="34" charset="-122"/>
                 <a:cs typeface="Calibri" pitchFamily="34" charset="-120"/>
               </a:rPr>
-              <a:t>to, toward</a:t>
+              <a:t>to try, examine, witness</a:t>
             </a:r>
             <a:endParaRPr lang="en-US" sz="850" dirty="0"/>
           </a:p>
@@ -27925,46 +27625,7 @@
       </p:sp>
       <p:sp>
         <p:nvSpPr>
-          <p:cNvPr id="19" name="Text 17"/>
-          <p:cNvSpPr/>
-          <p:nvPr/>
-        </p:nvSpPr>
-        <p:spPr>
-          <a:xfrm>
-            <a:off x="2938272" y="2752344"/>
-            <a:ext cx="1828800" cy="182880"/>
-          </a:xfrm>
-          <a:prstGeom prst="rect">
-            <a:avLst/>
-          </a:prstGeom>
-          <a:noFill/>
-          <a:ln/>
-        </p:spPr>
-        <p:txBody>
-          <a:bodyPr wrap="square" lIns="0" tIns="0" rIns="0" bIns="0" rtlCol="0" anchor="t"/>
-          <a:lstStyle/>
-          <a:p>
-            <a:pPr algn="ctr" indent="0" marL="0">
-              <a:buNone/>
-            </a:pPr>
-            <a:r>
-              <a:rPr lang="en-US" sz="700" i="1" dirty="0">
-                <a:solidFill>
-                  <a:srgbClr val="94A3B8"/>
-                </a:solidFill>
-                <a:latin typeface="Calibri" pitchFamily="34" charset="0"/>
-                <a:ea typeface="Calibri" pitchFamily="34" charset="-122"/>
-                <a:cs typeface="Calibri" pitchFamily="34" charset="-120"/>
-              </a:rPr>
-              <a:t>ad → at before 't'</a:t>
-            </a:r>
-            <a:endParaRPr lang="en-US" sz="700" dirty="0"/>
-          </a:p>
-        </p:txBody>
-      </p:sp>
-      <p:sp>
-        <p:nvSpPr>
-          <p:cNvPr id="20" name="Shape 18"/>
+          <p:cNvPr id="19" name="Shape 17"/>
           <p:cNvSpPr/>
           <p:nvPr/>
         </p:nvSpPr>
@@ -27979,11 +27640,11 @@
             </a:avLst>
           </a:prstGeom>
           <a:solidFill>
-            <a:srgbClr val="CCFBF1"/>
+            <a:srgbClr val="FCE7F3"/>
           </a:solidFill>
           <a:ln w="19050">
             <a:solidFill>
-              <a:srgbClr val="0D9488"/>
+              <a:srgbClr val="DB2777"/>
             </a:solidFill>
             <a:prstDash val="solid"/>
           </a:ln>
@@ -27998,7 +27659,7 @@
       </p:sp>
       <p:sp>
         <p:nvSpPr>
-          <p:cNvPr id="21" name="Text 19"/>
+          <p:cNvPr id="20" name="Text 18"/>
           <p:cNvSpPr/>
           <p:nvPr/>
         </p:nvSpPr>
@@ -28023,13 +27684,13 @@
             <a:r>
               <a:rPr lang="en-US" sz="1300" b="1" dirty="0">
                 <a:solidFill>
-                  <a:srgbClr val="0F766E"/>
+                  <a:srgbClr val="9D174D"/>
                 </a:solidFill>
                 <a:latin typeface="Trebuchet MS" pitchFamily="34" charset="0"/>
                 <a:ea typeface="Trebuchet MS" pitchFamily="34" charset="-122"/>
                 <a:cs typeface="Trebuchet MS" pitchFamily="34" charset="-120"/>
               </a:rPr>
-              <a:t>test</a:t>
+              <a:t>er</a:t>
             </a:r>
             <a:endParaRPr lang="en-US" sz="1300" dirty="0"/>
           </a:p>
@@ -28037,7 +27698,7 @@
       </p:sp>
       <p:sp>
         <p:nvSpPr>
-          <p:cNvPr id="22" name="Text 20"/>
+          <p:cNvPr id="21" name="Text 19"/>
           <p:cNvSpPr/>
           <p:nvPr/>
         </p:nvSpPr>
@@ -28068,7 +27729,7 @@
                 <a:ea typeface="Calibri" pitchFamily="34" charset="-122"/>
                 <a:cs typeface="Calibri" pitchFamily="34" charset="-120"/>
               </a:rPr>
-              <a:t>to try, witness</a:t>
+              <a:t>one who does</a:t>
             </a:r>
             <a:endParaRPr lang="en-US" sz="850" dirty="0"/>
           </a:p>
@@ -28076,7 +27737,7 @@
       </p:sp>
       <p:sp>
         <p:nvSpPr>
-          <p:cNvPr id="23" name="Shape 21"/>
+          <p:cNvPr id="22" name="Shape 20"/>
           <p:cNvSpPr/>
           <p:nvPr/>
         </p:nvSpPr>
@@ -28103,7 +27764,7 @@
       </p:sp>
       <p:sp>
         <p:nvSpPr>
-          <p:cNvPr id="24" name="Text 22"/>
+          <p:cNvPr id="23" name="Text 21"/>
           <p:cNvSpPr/>
           <p:nvPr/>
         </p:nvSpPr>
@@ -28142,7 +27803,7 @@
       </p:sp>
       <p:sp>
         <p:nvSpPr>
-          <p:cNvPr id="25" name="Shape 23"/>
+          <p:cNvPr id="24" name="Shape 22"/>
           <p:cNvSpPr/>
           <p:nvPr/>
         </p:nvSpPr>
@@ -28169,7 +27830,7 @@
       </p:sp>
       <p:sp>
         <p:nvSpPr>
-          <p:cNvPr id="26" name="Shape 24"/>
+          <p:cNvPr id="25" name="Shape 23"/>
           <p:cNvSpPr/>
           <p:nvPr/>
         </p:nvSpPr>
@@ -28196,7 +27857,7 @@
       </p:sp>
       <p:sp>
         <p:nvSpPr>
-          <p:cNvPr id="27" name="Text 25"/>
+          <p:cNvPr id="26" name="Text 24"/>
           <p:cNvSpPr/>
           <p:nvPr/>
         </p:nvSpPr>
@@ -28227,7 +27888,7 @@
                 <a:ea typeface="Trebuchet MS" pitchFamily="34" charset="-122"/>
                 <a:cs typeface="Trebuchet MS" pitchFamily="34" charset="-120"/>
               </a:rPr>
-              <a:t>at</a:t>
+              <a:t>test</a:t>
             </a:r>
             <a:endParaRPr lang="en-US" sz="1400" dirty="0"/>
           </a:p>
@@ -28235,7 +27896,7 @@
       </p:sp>
       <p:sp>
         <p:nvSpPr>
-          <p:cNvPr id="28" name="Text 26"/>
+          <p:cNvPr id="27" name="Text 25"/>
           <p:cNvSpPr/>
           <p:nvPr/>
         </p:nvSpPr>
@@ -28274,7 +27935,7 @@
       </p:sp>
       <p:sp>
         <p:nvSpPr>
-          <p:cNvPr id="29" name="Shape 27"/>
+          <p:cNvPr id="28" name="Shape 26"/>
           <p:cNvSpPr/>
           <p:nvPr/>
         </p:nvSpPr>
@@ -28301,7 +27962,7 @@
       </p:sp>
       <p:sp>
         <p:nvSpPr>
-          <p:cNvPr id="30" name="Text 28"/>
+          <p:cNvPr id="29" name="Text 27"/>
           <p:cNvSpPr/>
           <p:nvPr/>
         </p:nvSpPr>
@@ -28332,7 +27993,7 @@
                 <a:ea typeface="Trebuchet MS" pitchFamily="34" charset="-122"/>
                 <a:cs typeface="Trebuchet MS" pitchFamily="34" charset="-120"/>
               </a:rPr>
-              <a:t>test</a:t>
+              <a:t>er</a:t>
             </a:r>
             <a:endParaRPr lang="en-US" sz="1400" dirty="0"/>
           </a:p>
@@ -28340,7 +28001,7 @@
       </p:sp>
       <p:sp>
         <p:nvSpPr>
-          <p:cNvPr id="31" name="Shape 29"/>
+          <p:cNvPr id="30" name="Shape 28"/>
           <p:cNvSpPr/>
           <p:nvPr/>
         </p:nvSpPr>
@@ -28367,7 +28028,7 @@
       </p:sp>
       <p:sp>
         <p:nvSpPr>
-          <p:cNvPr id="32" name="Text 30"/>
+          <p:cNvPr id="31" name="Text 29"/>
           <p:cNvSpPr/>
           <p:nvPr/>
         </p:nvSpPr>
@@ -28406,7 +28067,7 @@
       </p:sp>
       <p:sp>
         <p:nvSpPr>
-          <p:cNvPr id="33" name="Shape 31"/>
+          <p:cNvPr id="32" name="Shape 30"/>
           <p:cNvSpPr/>
           <p:nvPr/>
         </p:nvSpPr>
@@ -28433,7 +28094,7 @@
       </p:sp>
       <p:sp>
         <p:nvSpPr>
-          <p:cNvPr id="34" name="Shape 32"/>
+          <p:cNvPr id="33" name="Shape 31"/>
           <p:cNvSpPr/>
           <p:nvPr/>
         </p:nvSpPr>
@@ -28460,7 +28121,7 @@
       </p:sp>
       <p:sp>
         <p:nvSpPr>
-          <p:cNvPr id="35" name="Text 33"/>
+          <p:cNvPr id="34" name="Text 32"/>
           <p:cNvSpPr/>
           <p:nvPr/>
         </p:nvSpPr>
@@ -28491,7 +28152,7 @@
                 <a:ea typeface="Trebuchet MS" pitchFamily="34" charset="-122"/>
                 <a:cs typeface="Trebuchet MS" pitchFamily="34" charset="-120"/>
               </a:rPr>
-              <a:t>a</a:t>
+              <a:t>t</a:t>
             </a:r>
             <a:endParaRPr lang="en-US" sz="900" dirty="0"/>
           </a:p>
@@ -28499,7 +28160,7 @@
       </p:sp>
       <p:sp>
         <p:nvSpPr>
-          <p:cNvPr id="36" name="Shape 34"/>
+          <p:cNvPr id="35" name="Shape 33"/>
           <p:cNvSpPr/>
           <p:nvPr/>
         </p:nvSpPr>
@@ -28526,7 +28187,7 @@
       </p:sp>
       <p:sp>
         <p:nvSpPr>
-          <p:cNvPr id="37" name="Text 35"/>
+          <p:cNvPr id="36" name="Text 34"/>
           <p:cNvSpPr/>
           <p:nvPr/>
         </p:nvSpPr>
@@ -28557,7 +28218,7 @@
                 <a:ea typeface="Trebuchet MS" pitchFamily="34" charset="-122"/>
                 <a:cs typeface="Trebuchet MS" pitchFamily="34" charset="-120"/>
               </a:rPr>
-              <a:t>tt</a:t>
+              <a:t>e</a:t>
             </a:r>
             <a:endParaRPr lang="en-US" sz="900" dirty="0"/>
           </a:p>
@@ -28565,7 +28226,7 @@
       </p:sp>
       <p:sp>
         <p:nvSpPr>
-          <p:cNvPr id="38" name="Shape 36"/>
+          <p:cNvPr id="37" name="Shape 35"/>
           <p:cNvSpPr/>
           <p:nvPr/>
         </p:nvSpPr>
@@ -28592,7 +28253,7 @@
       </p:sp>
       <p:sp>
         <p:nvSpPr>
-          <p:cNvPr id="39" name="Text 37"/>
+          <p:cNvPr id="38" name="Text 36"/>
           <p:cNvSpPr/>
           <p:nvPr/>
         </p:nvSpPr>
@@ -28623,7 +28284,7 @@
                 <a:ea typeface="Trebuchet MS" pitchFamily="34" charset="-122"/>
                 <a:cs typeface="Trebuchet MS" pitchFamily="34" charset="-120"/>
               </a:rPr>
-              <a:t>e</a:t>
+              <a:t>s</a:t>
             </a:r>
             <a:endParaRPr lang="en-US" sz="900" dirty="0"/>
           </a:p>
@@ -28631,7 +28292,7 @@
       </p:sp>
       <p:sp>
         <p:nvSpPr>
-          <p:cNvPr id="40" name="Shape 38"/>
+          <p:cNvPr id="39" name="Shape 37"/>
           <p:cNvSpPr/>
           <p:nvPr/>
         </p:nvSpPr>
@@ -28658,7 +28319,7 @@
       </p:sp>
       <p:sp>
         <p:nvSpPr>
-          <p:cNvPr id="41" name="Text 39"/>
+          <p:cNvPr id="40" name="Text 38"/>
           <p:cNvSpPr/>
           <p:nvPr/>
         </p:nvSpPr>
@@ -28689,7 +28350,7 @@
                 <a:ea typeface="Trebuchet MS" pitchFamily="34" charset="-122"/>
                 <a:cs typeface="Trebuchet MS" pitchFamily="34" charset="-120"/>
               </a:rPr>
-              <a:t>s</a:t>
+              <a:t>t</a:t>
             </a:r>
             <a:endParaRPr lang="en-US" sz="900" dirty="0"/>
           </a:p>
@@ -28697,7 +28358,7 @@
       </p:sp>
       <p:sp>
         <p:nvSpPr>
-          <p:cNvPr id="42" name="Shape 40"/>
+          <p:cNvPr id="41" name="Shape 39"/>
           <p:cNvSpPr/>
           <p:nvPr/>
         </p:nvSpPr>
@@ -28724,7 +28385,7 @@
       </p:sp>
       <p:sp>
         <p:nvSpPr>
-          <p:cNvPr id="43" name="Text 41"/>
+          <p:cNvPr id="42" name="Text 40"/>
           <p:cNvSpPr/>
           <p:nvPr/>
         </p:nvSpPr>
@@ -28755,7 +28416,7 @@
                 <a:ea typeface="Trebuchet MS" pitchFamily="34" charset="-122"/>
                 <a:cs typeface="Trebuchet MS" pitchFamily="34" charset="-120"/>
               </a:rPr>
-              <a:t>t</a:t>
+              <a:t>er</a:t>
             </a:r>
             <a:endParaRPr lang="en-US" sz="900" dirty="0"/>
           </a:p>
@@ -29186,7 +28847,7 @@
                 <a:ea typeface="Trebuchet MS" pitchFamily="34" charset="-122"/>
                 <a:cs typeface="Trebuchet MS" pitchFamily="34" charset="-120"/>
               </a:rPr>
-              <a:t>test</a:t>
+              <a:t>contest</a:t>
             </a:r>
             <a:endParaRPr lang="en-US" sz="2800" dirty="0"/>
           </a:p>
@@ -30013,7 +29674,7 @@
                 <a:ea typeface="Trebuchet MS" pitchFamily="34" charset="-122"/>
                 <a:cs typeface="Trebuchet MS" pitchFamily="34" charset="-120"/>
               </a:rPr>
-              <a:t>test</a:t>
+              <a:t>contest</a:t>
             </a:r>
             <a:endParaRPr lang="en-US" sz="2800" dirty="0"/>
           </a:p>
@@ -30093,7 +29754,7 @@
         </p:nvSpPr>
         <p:spPr>
           <a:xfrm>
-            <a:off x="4370832" y="2258568"/>
+            <a:off x="2938272" y="2258568"/>
             <a:ext cx="1828800" cy="292608"/>
           </a:xfrm>
           <a:prstGeom prst="rect">
@@ -30102,11 +29763,11 @@
             </a:avLst>
           </a:prstGeom>
           <a:solidFill>
-            <a:srgbClr val="CCFBF1"/>
+            <a:srgbClr val="DDD6FE"/>
           </a:solidFill>
           <a:ln w="19050">
             <a:solidFill>
-              <a:srgbClr val="0D9488"/>
+              <a:srgbClr val="7C3AED"/>
             </a:solidFill>
             <a:prstDash val="solid"/>
           </a:ln>
@@ -30127,7 +29788,7 @@
         </p:nvSpPr>
         <p:spPr>
           <a:xfrm>
-            <a:off x="4370832" y="2258568"/>
+            <a:off x="2938272" y="2258568"/>
             <a:ext cx="1828800" cy="292608"/>
           </a:xfrm>
           <a:prstGeom prst="rect">
@@ -30146,13 +29807,13 @@
             <a:r>
               <a:rPr lang="en-US" sz="1300" b="1" dirty="0">
                 <a:solidFill>
-                  <a:srgbClr val="0F766E"/>
+                  <a:srgbClr val="4C1D95"/>
                 </a:solidFill>
                 <a:latin typeface="Trebuchet MS" pitchFamily="34" charset="0"/>
                 <a:ea typeface="Trebuchet MS" pitchFamily="34" charset="-122"/>
                 <a:cs typeface="Trebuchet MS" pitchFamily="34" charset="-120"/>
               </a:rPr>
-              <a:t>test</a:t>
+              <a:t>con</a:t>
             </a:r>
             <a:endParaRPr lang="en-US" sz="1300" dirty="0"/>
           </a:p>
@@ -30166,7 +29827,7 @@
         </p:nvSpPr>
         <p:spPr>
           <a:xfrm>
-            <a:off x="4370832" y="2569464"/>
+            <a:off x="2938272" y="2569464"/>
             <a:ext cx="1828800" cy="201168"/>
           </a:xfrm>
           <a:prstGeom prst="rect">
@@ -30191,7 +29852,7 @@
                 <a:ea typeface="Calibri" pitchFamily="34" charset="-122"/>
                 <a:cs typeface="Calibri" pitchFamily="34" charset="-120"/>
               </a:rPr>
-              <a:t>to try, witness</a:t>
+              <a:t>together, with</a:t>
             </a:r>
             <a:endParaRPr lang="en-US" sz="850" dirty="0"/>
           </a:p>
@@ -30200,6 +29861,118 @@
       <p:sp>
         <p:nvSpPr>
           <p:cNvPr id="19" name="Shape 17"/>
+          <p:cNvSpPr/>
+          <p:nvPr/>
+        </p:nvSpPr>
+        <p:spPr>
+          <a:xfrm>
+            <a:off x="5803392" y="2258568"/>
+            <a:ext cx="1828800" cy="292608"/>
+          </a:xfrm>
+          <a:prstGeom prst="rect">
+            <a:avLst>
+              <a:gd name="adj" fmla="val 25000"/>
+            </a:avLst>
+          </a:prstGeom>
+          <a:solidFill>
+            <a:srgbClr val="CCFBF1"/>
+          </a:solidFill>
+          <a:ln w="19050">
+            <a:solidFill>
+              <a:srgbClr val="0D9488"/>
+            </a:solidFill>
+            <a:prstDash val="solid"/>
+          </a:ln>
+          <a:effectLst>
+            <a:outerShdw sx="100000" sy="100000" kx="0" ky="0" algn="bl" rotWithShape="0" blurRad="101600" dist="38100" dir="8100000">
+              <a:srgbClr val="000000">
+                <a:alpha val="12000"/>
+              </a:srgbClr>
+            </a:outerShdw>
+          </a:effectLst>
+        </p:spPr>
+      </p:sp>
+      <p:sp>
+        <p:nvSpPr>
+          <p:cNvPr id="20" name="Text 18"/>
+          <p:cNvSpPr/>
+          <p:nvPr/>
+        </p:nvSpPr>
+        <p:spPr>
+          <a:xfrm>
+            <a:off x="5803392" y="2258568"/>
+            <a:ext cx="1828800" cy="292608"/>
+          </a:xfrm>
+          <a:prstGeom prst="rect">
+            <a:avLst/>
+          </a:prstGeom>
+          <a:noFill/>
+          <a:ln/>
+        </p:spPr>
+        <p:txBody>
+          <a:bodyPr wrap="square" lIns="0" tIns="0" rIns="0" bIns="0" rtlCol="0" anchor="ctr"/>
+          <a:lstStyle/>
+          <a:p>
+            <a:pPr algn="ctr" indent="0" marL="0">
+              <a:buNone/>
+            </a:pPr>
+            <a:r>
+              <a:rPr lang="en-US" sz="1300" b="1" dirty="0">
+                <a:solidFill>
+                  <a:srgbClr val="0F766E"/>
+                </a:solidFill>
+                <a:latin typeface="Trebuchet MS" pitchFamily="34" charset="0"/>
+                <a:ea typeface="Trebuchet MS" pitchFamily="34" charset="-122"/>
+                <a:cs typeface="Trebuchet MS" pitchFamily="34" charset="-120"/>
+              </a:rPr>
+              <a:t>test</a:t>
+            </a:r>
+            <a:endParaRPr lang="en-US" sz="1300" dirty="0"/>
+          </a:p>
+        </p:txBody>
+      </p:sp>
+      <p:sp>
+        <p:nvSpPr>
+          <p:cNvPr id="21" name="Text 19"/>
+          <p:cNvSpPr/>
+          <p:nvPr/>
+        </p:nvSpPr>
+        <p:spPr>
+          <a:xfrm>
+            <a:off x="5803392" y="2569464"/>
+            <a:ext cx="1828800" cy="201168"/>
+          </a:xfrm>
+          <a:prstGeom prst="rect">
+            <a:avLst/>
+          </a:prstGeom>
+          <a:noFill/>
+          <a:ln/>
+        </p:spPr>
+        <p:txBody>
+          <a:bodyPr wrap="square" lIns="0" tIns="0" rIns="0" bIns="0" rtlCol="0" anchor="t"/>
+          <a:lstStyle/>
+          <a:p>
+            <a:pPr algn="ctr" indent="0" marL="0">
+              <a:buNone/>
+            </a:pPr>
+            <a:r>
+              <a:rPr lang="en-US" sz="850" dirty="0">
+                <a:solidFill>
+                  <a:srgbClr val="475569"/>
+                </a:solidFill>
+                <a:latin typeface="Calibri" pitchFamily="34" charset="0"/>
+                <a:ea typeface="Calibri" pitchFamily="34" charset="-122"/>
+                <a:cs typeface="Calibri" pitchFamily="34" charset="-120"/>
+              </a:rPr>
+              <a:t>to try, examine, witness</a:t>
+            </a:r>
+            <a:endParaRPr lang="en-US" sz="850" dirty="0"/>
+          </a:p>
+        </p:txBody>
+      </p:sp>
+      <p:sp>
+        <p:nvSpPr>
+          <p:cNvPr id="22" name="Shape 20"/>
           <p:cNvSpPr/>
           <p:nvPr/>
         </p:nvSpPr>
@@ -30226,7 +29999,7 @@
       </p:sp>
       <p:sp>
         <p:nvSpPr>
-          <p:cNvPr id="20" name="Text 18"/>
+          <p:cNvPr id="23" name="Text 21"/>
           <p:cNvSpPr/>
           <p:nvPr/>
         </p:nvSpPr>
@@ -30265,7 +30038,7 @@
       </p:sp>
       <p:sp>
         <p:nvSpPr>
-          <p:cNvPr id="21" name="Shape 19"/>
+          <p:cNvPr id="24" name="Shape 22"/>
           <p:cNvSpPr/>
           <p:nvPr/>
         </p:nvSpPr>
@@ -30292,7 +30065,7 @@
       </p:sp>
       <p:sp>
         <p:nvSpPr>
-          <p:cNvPr id="22" name="Text 20"/>
+          <p:cNvPr id="25" name="Text 23"/>
           <p:cNvSpPr/>
           <p:nvPr/>
         </p:nvSpPr>
@@ -30331,7 +30104,7 @@
       </p:sp>
       <p:sp>
         <p:nvSpPr>
-          <p:cNvPr id="23" name="Shape 21"/>
+          <p:cNvPr id="26" name="Shape 24"/>
           <p:cNvSpPr/>
           <p:nvPr/>
         </p:nvSpPr>
@@ -30358,7 +30131,7 @@
       </p:sp>
       <p:sp>
         <p:nvSpPr>
-          <p:cNvPr id="24" name="Text 22"/>
+          <p:cNvPr id="27" name="Text 25"/>
           <p:cNvSpPr/>
           <p:nvPr/>
         </p:nvSpPr>
@@ -30397,7 +30170,7 @@
       </p:sp>
       <p:sp>
         <p:nvSpPr>
-          <p:cNvPr id="25" name="Shape 23"/>
+          <p:cNvPr id="28" name="Shape 26"/>
           <p:cNvSpPr/>
           <p:nvPr/>
         </p:nvSpPr>
@@ -30424,7 +30197,7 @@
       </p:sp>
       <p:sp>
         <p:nvSpPr>
-          <p:cNvPr id="26" name="Text 24"/>
+          <p:cNvPr id="29" name="Text 27"/>
           <p:cNvSpPr/>
           <p:nvPr/>
         </p:nvSpPr>
@@ -30886,7 +30659,7 @@
                 <a:ea typeface="Trebuchet MS" pitchFamily="34" charset="-122"/>
                 <a:cs typeface="Trebuchet MS" pitchFamily="34" charset="-120"/>
               </a:rPr>
-              <a:t>test</a:t>
+              <a:t>contest</a:t>
             </a:r>
             <a:endParaRPr lang="en-US" sz="2800" dirty="0"/>
           </a:p>
@@ -30966,7 +30739,7 @@
         </p:nvSpPr>
         <p:spPr>
           <a:xfrm>
-            <a:off x="4370832" y="2258568"/>
+            <a:off x="2938272" y="2258568"/>
             <a:ext cx="1828800" cy="292608"/>
           </a:xfrm>
           <a:prstGeom prst="rect">
@@ -30975,11 +30748,11 @@
             </a:avLst>
           </a:prstGeom>
           <a:solidFill>
-            <a:srgbClr val="CCFBF1"/>
+            <a:srgbClr val="DDD6FE"/>
           </a:solidFill>
           <a:ln w="19050">
             <a:solidFill>
-              <a:srgbClr val="0D9488"/>
+              <a:srgbClr val="7C3AED"/>
             </a:solidFill>
             <a:prstDash val="solid"/>
           </a:ln>
@@ -31000,7 +30773,7 @@
         </p:nvSpPr>
         <p:spPr>
           <a:xfrm>
-            <a:off x="4370832" y="2258568"/>
+            <a:off x="2938272" y="2258568"/>
             <a:ext cx="1828800" cy="292608"/>
           </a:xfrm>
           <a:prstGeom prst="rect">
@@ -31019,13 +30792,13 @@
             <a:r>
               <a:rPr lang="en-US" sz="1300" b="1" dirty="0">
                 <a:solidFill>
-                  <a:srgbClr val="0F766E"/>
+                  <a:srgbClr val="4C1D95"/>
                 </a:solidFill>
                 <a:latin typeface="Trebuchet MS" pitchFamily="34" charset="0"/>
                 <a:ea typeface="Trebuchet MS" pitchFamily="34" charset="-122"/>
                 <a:cs typeface="Trebuchet MS" pitchFamily="34" charset="-120"/>
               </a:rPr>
-              <a:t>test</a:t>
+              <a:t>con</a:t>
             </a:r>
             <a:endParaRPr lang="en-US" sz="1300" dirty="0"/>
           </a:p>
@@ -31039,7 +30812,7 @@
         </p:nvSpPr>
         <p:spPr>
           <a:xfrm>
-            <a:off x="4370832" y="2569464"/>
+            <a:off x="2938272" y="2569464"/>
             <a:ext cx="1828800" cy="201168"/>
           </a:xfrm>
           <a:prstGeom prst="rect">
@@ -31064,7 +30837,7 @@
                 <a:ea typeface="Calibri" pitchFamily="34" charset="-122"/>
                 <a:cs typeface="Calibri" pitchFamily="34" charset="-120"/>
               </a:rPr>
-              <a:t>to try, witness</a:t>
+              <a:t>together, with</a:t>
             </a:r>
             <a:endParaRPr lang="en-US" sz="850" dirty="0"/>
           </a:p>
@@ -31073,6 +30846,118 @@
       <p:sp>
         <p:nvSpPr>
           <p:cNvPr id="19" name="Shape 17"/>
+          <p:cNvSpPr/>
+          <p:nvPr/>
+        </p:nvSpPr>
+        <p:spPr>
+          <a:xfrm>
+            <a:off x="5803392" y="2258568"/>
+            <a:ext cx="1828800" cy="292608"/>
+          </a:xfrm>
+          <a:prstGeom prst="rect">
+            <a:avLst>
+              <a:gd name="adj" fmla="val 25000"/>
+            </a:avLst>
+          </a:prstGeom>
+          <a:solidFill>
+            <a:srgbClr val="CCFBF1"/>
+          </a:solidFill>
+          <a:ln w="19050">
+            <a:solidFill>
+              <a:srgbClr val="0D9488"/>
+            </a:solidFill>
+            <a:prstDash val="solid"/>
+          </a:ln>
+          <a:effectLst>
+            <a:outerShdw sx="100000" sy="100000" kx="0" ky="0" algn="bl" rotWithShape="0" blurRad="101600" dist="38100" dir="8100000">
+              <a:srgbClr val="000000">
+                <a:alpha val="12000"/>
+              </a:srgbClr>
+            </a:outerShdw>
+          </a:effectLst>
+        </p:spPr>
+      </p:sp>
+      <p:sp>
+        <p:nvSpPr>
+          <p:cNvPr id="20" name="Text 18"/>
+          <p:cNvSpPr/>
+          <p:nvPr/>
+        </p:nvSpPr>
+        <p:spPr>
+          <a:xfrm>
+            <a:off x="5803392" y="2258568"/>
+            <a:ext cx="1828800" cy="292608"/>
+          </a:xfrm>
+          <a:prstGeom prst="rect">
+            <a:avLst/>
+          </a:prstGeom>
+          <a:noFill/>
+          <a:ln/>
+        </p:spPr>
+        <p:txBody>
+          <a:bodyPr wrap="square" lIns="0" tIns="0" rIns="0" bIns="0" rtlCol="0" anchor="ctr"/>
+          <a:lstStyle/>
+          <a:p>
+            <a:pPr algn="ctr" indent="0" marL="0">
+              <a:buNone/>
+            </a:pPr>
+            <a:r>
+              <a:rPr lang="en-US" sz="1300" b="1" dirty="0">
+                <a:solidFill>
+                  <a:srgbClr val="0F766E"/>
+                </a:solidFill>
+                <a:latin typeface="Trebuchet MS" pitchFamily="34" charset="0"/>
+                <a:ea typeface="Trebuchet MS" pitchFamily="34" charset="-122"/>
+                <a:cs typeface="Trebuchet MS" pitchFamily="34" charset="-120"/>
+              </a:rPr>
+              <a:t>test</a:t>
+            </a:r>
+            <a:endParaRPr lang="en-US" sz="1300" dirty="0"/>
+          </a:p>
+        </p:txBody>
+      </p:sp>
+      <p:sp>
+        <p:nvSpPr>
+          <p:cNvPr id="21" name="Text 19"/>
+          <p:cNvSpPr/>
+          <p:nvPr/>
+        </p:nvSpPr>
+        <p:spPr>
+          <a:xfrm>
+            <a:off x="5803392" y="2569464"/>
+            <a:ext cx="1828800" cy="201168"/>
+          </a:xfrm>
+          <a:prstGeom prst="rect">
+            <a:avLst/>
+          </a:prstGeom>
+          <a:noFill/>
+          <a:ln/>
+        </p:spPr>
+        <p:txBody>
+          <a:bodyPr wrap="square" lIns="0" tIns="0" rIns="0" bIns="0" rtlCol="0" anchor="t"/>
+          <a:lstStyle/>
+          <a:p>
+            <a:pPr algn="ctr" indent="0" marL="0">
+              <a:buNone/>
+            </a:pPr>
+            <a:r>
+              <a:rPr lang="en-US" sz="850" dirty="0">
+                <a:solidFill>
+                  <a:srgbClr val="475569"/>
+                </a:solidFill>
+                <a:latin typeface="Calibri" pitchFamily="34" charset="0"/>
+                <a:ea typeface="Calibri" pitchFamily="34" charset="-122"/>
+                <a:cs typeface="Calibri" pitchFamily="34" charset="-120"/>
+              </a:rPr>
+              <a:t>to try, examine, witness</a:t>
+            </a:r>
+            <a:endParaRPr lang="en-US" sz="850" dirty="0"/>
+          </a:p>
+        </p:txBody>
+      </p:sp>
+      <p:sp>
+        <p:nvSpPr>
+          <p:cNvPr id="22" name="Shape 20"/>
           <p:cNvSpPr/>
           <p:nvPr/>
         </p:nvSpPr>
@@ -31099,7 +30984,7 @@
       </p:sp>
       <p:sp>
         <p:nvSpPr>
-          <p:cNvPr id="20" name="Text 18"/>
+          <p:cNvPr id="23" name="Text 21"/>
           <p:cNvSpPr/>
           <p:nvPr/>
         </p:nvSpPr>
@@ -31138,7 +31023,7 @@
       </p:sp>
       <p:sp>
         <p:nvSpPr>
-          <p:cNvPr id="21" name="Shape 19"/>
+          <p:cNvPr id="24" name="Shape 22"/>
           <p:cNvSpPr/>
           <p:nvPr/>
         </p:nvSpPr>
@@ -31165,13 +31050,13 @@
       </p:sp>
       <p:sp>
         <p:nvSpPr>
-          <p:cNvPr id="22" name="Shape 20"/>
-          <p:cNvSpPr/>
-          <p:nvPr/>
-        </p:nvSpPr>
-        <p:spPr>
-          <a:xfrm>
-            <a:off x="4370832" y="3364992"/>
+          <p:cNvPr id="25" name="Shape 23"/>
+          <p:cNvSpPr/>
+          <p:nvPr/>
+        </p:nvSpPr>
+        <p:spPr>
+          <a:xfrm>
+            <a:off x="2999232" y="3364992"/>
             <a:ext cx="1645920" cy="475488"/>
           </a:xfrm>
           <a:prstGeom prst="rect">
@@ -31192,13 +31077,13 @@
       </p:sp>
       <p:sp>
         <p:nvSpPr>
-          <p:cNvPr id="23" name="Text 21"/>
-          <p:cNvSpPr/>
-          <p:nvPr/>
-        </p:nvSpPr>
-        <p:spPr>
-          <a:xfrm>
-            <a:off x="4370832" y="3364992"/>
+          <p:cNvPr id="26" name="Text 24"/>
+          <p:cNvSpPr/>
+          <p:nvPr/>
+        </p:nvSpPr>
+        <p:spPr>
+          <a:xfrm>
+            <a:off x="2999232" y="3364992"/>
             <a:ext cx="1645920" cy="475488"/>
           </a:xfrm>
           <a:prstGeom prst="rect">
@@ -31223,6 +31108,111 @@
                 <a:ea typeface="Trebuchet MS" pitchFamily="34" charset="-122"/>
                 <a:cs typeface="Trebuchet MS" pitchFamily="34" charset="-120"/>
               </a:rPr>
+              <a:t>con</a:t>
+            </a:r>
+            <a:endParaRPr lang="en-US" sz="1400" dirty="0"/>
+          </a:p>
+        </p:txBody>
+      </p:sp>
+      <p:sp>
+        <p:nvSpPr>
+          <p:cNvPr id="27" name="Text 25"/>
+          <p:cNvSpPr/>
+          <p:nvPr/>
+        </p:nvSpPr>
+        <p:spPr>
+          <a:xfrm>
+            <a:off x="4645152" y="3364992"/>
+            <a:ext cx="1097280" cy="475488"/>
+          </a:xfrm>
+          <a:prstGeom prst="rect">
+            <a:avLst/>
+          </a:prstGeom>
+          <a:noFill/>
+          <a:ln/>
+        </p:spPr>
+        <p:txBody>
+          <a:bodyPr wrap="square" lIns="0" tIns="0" rIns="0" bIns="0" rtlCol="0" anchor="ctr"/>
+          <a:lstStyle/>
+          <a:p>
+            <a:pPr algn="ctr" indent="0" marL="0">
+              <a:buNone/>
+            </a:pPr>
+            <a:r>
+              <a:rPr lang="en-US" sz="1600" b="1" dirty="0">
+                <a:solidFill>
+                  <a:srgbClr val="0D9488"/>
+                </a:solidFill>
+                <a:latin typeface="Trebuchet MS" pitchFamily="34" charset="0"/>
+                <a:ea typeface="Trebuchet MS" pitchFamily="34" charset="-122"/>
+                <a:cs typeface="Trebuchet MS" pitchFamily="34" charset="-120"/>
+              </a:rPr>
+              <a:t>·</a:t>
+            </a:r>
+            <a:endParaRPr lang="en-US" sz="1600" dirty="0"/>
+          </a:p>
+        </p:txBody>
+      </p:sp>
+      <p:sp>
+        <p:nvSpPr>
+          <p:cNvPr id="28" name="Shape 26"/>
+          <p:cNvSpPr/>
+          <p:nvPr/>
+        </p:nvSpPr>
+        <p:spPr>
+          <a:xfrm>
+            <a:off x="5742432" y="3364992"/>
+            <a:ext cx="1645920" cy="475488"/>
+          </a:xfrm>
+          <a:prstGeom prst="rect">
+            <a:avLst>
+              <a:gd name="adj" fmla="val 9615"/>
+            </a:avLst>
+          </a:prstGeom>
+          <a:solidFill>
+            <a:srgbClr val="FFFFFF"/>
+          </a:solidFill>
+          <a:ln w="12700">
+            <a:solidFill>
+              <a:srgbClr val="0D9488"/>
+            </a:solidFill>
+            <a:prstDash val="solid"/>
+          </a:ln>
+        </p:spPr>
+      </p:sp>
+      <p:sp>
+        <p:nvSpPr>
+          <p:cNvPr id="29" name="Text 27"/>
+          <p:cNvSpPr/>
+          <p:nvPr/>
+        </p:nvSpPr>
+        <p:spPr>
+          <a:xfrm>
+            <a:off x="5742432" y="3364992"/>
+            <a:ext cx="1645920" cy="475488"/>
+          </a:xfrm>
+          <a:prstGeom prst="rect">
+            <a:avLst/>
+          </a:prstGeom>
+          <a:noFill/>
+          <a:ln/>
+        </p:spPr>
+        <p:txBody>
+          <a:bodyPr wrap="square" lIns="0" tIns="0" rIns="0" bIns="0" rtlCol="0" anchor="ctr"/>
+          <a:lstStyle/>
+          <a:p>
+            <a:pPr algn="ctr" indent="0" marL="0">
+              <a:buNone/>
+            </a:pPr>
+            <a:r>
+              <a:rPr lang="en-US" sz="1400" b="1" dirty="0">
+                <a:solidFill>
+                  <a:srgbClr val="0D9488"/>
+                </a:solidFill>
+                <a:latin typeface="Trebuchet MS" pitchFamily="34" charset="0"/>
+                <a:ea typeface="Trebuchet MS" pitchFamily="34" charset="-122"/>
+                <a:cs typeface="Trebuchet MS" pitchFamily="34" charset="-120"/>
+              </a:rPr>
               <a:t>test</a:t>
             </a:r>
             <a:endParaRPr lang="en-US" sz="1400" dirty="0"/>
@@ -31231,7 +31221,7 @@
       </p:sp>
       <p:sp>
         <p:nvSpPr>
-          <p:cNvPr id="24" name="Shape 22"/>
+          <p:cNvPr id="30" name="Shape 28"/>
           <p:cNvSpPr/>
           <p:nvPr/>
         </p:nvSpPr>
@@ -31258,7 +31248,7 @@
       </p:sp>
       <p:sp>
         <p:nvSpPr>
-          <p:cNvPr id="25" name="Text 23"/>
+          <p:cNvPr id="31" name="Text 29"/>
           <p:cNvSpPr/>
           <p:nvPr/>
         </p:nvSpPr>
@@ -31297,7 +31287,7 @@
       </p:sp>
       <p:sp>
         <p:nvSpPr>
-          <p:cNvPr id="26" name="Shape 24"/>
+          <p:cNvPr id="32" name="Shape 30"/>
           <p:cNvSpPr/>
           <p:nvPr/>
         </p:nvSpPr>
@@ -31324,7 +31314,7 @@
       </p:sp>
       <p:sp>
         <p:nvSpPr>
-          <p:cNvPr id="27" name="Text 25"/>
+          <p:cNvPr id="33" name="Text 31"/>
           <p:cNvSpPr/>
           <p:nvPr/>
         </p:nvSpPr>
@@ -31786,7 +31776,7 @@
                 <a:ea typeface="Trebuchet MS" pitchFamily="34" charset="-122"/>
                 <a:cs typeface="Trebuchet MS" pitchFamily="34" charset="-120"/>
               </a:rPr>
-              <a:t>test</a:t>
+              <a:t>contest</a:t>
             </a:r>
             <a:endParaRPr lang="en-US" sz="2800" dirty="0"/>
           </a:p>
@@ -31866,7 +31856,7 @@
         </p:nvSpPr>
         <p:spPr>
           <a:xfrm>
-            <a:off x="4370832" y="2258568"/>
+            <a:off x="2938272" y="2258568"/>
             <a:ext cx="1828800" cy="292608"/>
           </a:xfrm>
           <a:prstGeom prst="rect">
@@ -31875,11 +31865,11 @@
             </a:avLst>
           </a:prstGeom>
           <a:solidFill>
-            <a:srgbClr val="CCFBF1"/>
+            <a:srgbClr val="DDD6FE"/>
           </a:solidFill>
           <a:ln w="19050">
             <a:solidFill>
-              <a:srgbClr val="0D9488"/>
+              <a:srgbClr val="7C3AED"/>
             </a:solidFill>
             <a:prstDash val="solid"/>
           </a:ln>
@@ -31900,7 +31890,7 @@
         </p:nvSpPr>
         <p:spPr>
           <a:xfrm>
-            <a:off x="4370832" y="2258568"/>
+            <a:off x="2938272" y="2258568"/>
             <a:ext cx="1828800" cy="292608"/>
           </a:xfrm>
           <a:prstGeom prst="rect">
@@ -31919,13 +31909,13 @@
             <a:r>
               <a:rPr lang="en-US" sz="1300" b="1" dirty="0">
                 <a:solidFill>
-                  <a:srgbClr val="0F766E"/>
+                  <a:srgbClr val="4C1D95"/>
                 </a:solidFill>
                 <a:latin typeface="Trebuchet MS" pitchFamily="34" charset="0"/>
                 <a:ea typeface="Trebuchet MS" pitchFamily="34" charset="-122"/>
                 <a:cs typeface="Trebuchet MS" pitchFamily="34" charset="-120"/>
               </a:rPr>
-              <a:t>test</a:t>
+              <a:t>con</a:t>
             </a:r>
             <a:endParaRPr lang="en-US" sz="1300" dirty="0"/>
           </a:p>
@@ -31939,7 +31929,7 @@
         </p:nvSpPr>
         <p:spPr>
           <a:xfrm>
-            <a:off x="4370832" y="2569464"/>
+            <a:off x="2938272" y="2569464"/>
             <a:ext cx="1828800" cy="201168"/>
           </a:xfrm>
           <a:prstGeom prst="rect">
@@ -31964,7 +31954,7 @@
                 <a:ea typeface="Calibri" pitchFamily="34" charset="-122"/>
                 <a:cs typeface="Calibri" pitchFamily="34" charset="-120"/>
               </a:rPr>
-              <a:t>to try, witness</a:t>
+              <a:t>together, with</a:t>
             </a:r>
             <a:endParaRPr lang="en-US" sz="850" dirty="0"/>
           </a:p>
@@ -31973,6 +31963,118 @@
       <p:sp>
         <p:nvSpPr>
           <p:cNvPr id="19" name="Shape 17"/>
+          <p:cNvSpPr/>
+          <p:nvPr/>
+        </p:nvSpPr>
+        <p:spPr>
+          <a:xfrm>
+            <a:off x="5803392" y="2258568"/>
+            <a:ext cx="1828800" cy="292608"/>
+          </a:xfrm>
+          <a:prstGeom prst="rect">
+            <a:avLst>
+              <a:gd name="adj" fmla="val 25000"/>
+            </a:avLst>
+          </a:prstGeom>
+          <a:solidFill>
+            <a:srgbClr val="CCFBF1"/>
+          </a:solidFill>
+          <a:ln w="19050">
+            <a:solidFill>
+              <a:srgbClr val="0D9488"/>
+            </a:solidFill>
+            <a:prstDash val="solid"/>
+          </a:ln>
+          <a:effectLst>
+            <a:outerShdw sx="100000" sy="100000" kx="0" ky="0" algn="bl" rotWithShape="0" blurRad="101600" dist="38100" dir="8100000">
+              <a:srgbClr val="000000">
+                <a:alpha val="12000"/>
+              </a:srgbClr>
+            </a:outerShdw>
+          </a:effectLst>
+        </p:spPr>
+      </p:sp>
+      <p:sp>
+        <p:nvSpPr>
+          <p:cNvPr id="20" name="Text 18"/>
+          <p:cNvSpPr/>
+          <p:nvPr/>
+        </p:nvSpPr>
+        <p:spPr>
+          <a:xfrm>
+            <a:off x="5803392" y="2258568"/>
+            <a:ext cx="1828800" cy="292608"/>
+          </a:xfrm>
+          <a:prstGeom prst="rect">
+            <a:avLst/>
+          </a:prstGeom>
+          <a:noFill/>
+          <a:ln/>
+        </p:spPr>
+        <p:txBody>
+          <a:bodyPr wrap="square" lIns="0" tIns="0" rIns="0" bIns="0" rtlCol="0" anchor="ctr"/>
+          <a:lstStyle/>
+          <a:p>
+            <a:pPr algn="ctr" indent="0" marL="0">
+              <a:buNone/>
+            </a:pPr>
+            <a:r>
+              <a:rPr lang="en-US" sz="1300" b="1" dirty="0">
+                <a:solidFill>
+                  <a:srgbClr val="0F766E"/>
+                </a:solidFill>
+                <a:latin typeface="Trebuchet MS" pitchFamily="34" charset="0"/>
+                <a:ea typeface="Trebuchet MS" pitchFamily="34" charset="-122"/>
+                <a:cs typeface="Trebuchet MS" pitchFamily="34" charset="-120"/>
+              </a:rPr>
+              <a:t>test</a:t>
+            </a:r>
+            <a:endParaRPr lang="en-US" sz="1300" dirty="0"/>
+          </a:p>
+        </p:txBody>
+      </p:sp>
+      <p:sp>
+        <p:nvSpPr>
+          <p:cNvPr id="21" name="Text 19"/>
+          <p:cNvSpPr/>
+          <p:nvPr/>
+        </p:nvSpPr>
+        <p:spPr>
+          <a:xfrm>
+            <a:off x="5803392" y="2569464"/>
+            <a:ext cx="1828800" cy="201168"/>
+          </a:xfrm>
+          <a:prstGeom prst="rect">
+            <a:avLst/>
+          </a:prstGeom>
+          <a:noFill/>
+          <a:ln/>
+        </p:spPr>
+        <p:txBody>
+          <a:bodyPr wrap="square" lIns="0" tIns="0" rIns="0" bIns="0" rtlCol="0" anchor="t"/>
+          <a:lstStyle/>
+          <a:p>
+            <a:pPr algn="ctr" indent="0" marL="0">
+              <a:buNone/>
+            </a:pPr>
+            <a:r>
+              <a:rPr lang="en-US" sz="850" dirty="0">
+                <a:solidFill>
+                  <a:srgbClr val="475569"/>
+                </a:solidFill>
+                <a:latin typeface="Calibri" pitchFamily="34" charset="0"/>
+                <a:ea typeface="Calibri" pitchFamily="34" charset="-122"/>
+                <a:cs typeface="Calibri" pitchFamily="34" charset="-120"/>
+              </a:rPr>
+              <a:t>to try, examine, witness</a:t>
+            </a:r>
+            <a:endParaRPr lang="en-US" sz="850" dirty="0"/>
+          </a:p>
+        </p:txBody>
+      </p:sp>
+      <p:sp>
+        <p:nvSpPr>
+          <p:cNvPr id="22" name="Shape 20"/>
           <p:cNvSpPr/>
           <p:nvPr/>
         </p:nvSpPr>
@@ -31999,7 +32101,7 @@
       </p:sp>
       <p:sp>
         <p:nvSpPr>
-          <p:cNvPr id="20" name="Text 18"/>
+          <p:cNvPr id="23" name="Text 21"/>
           <p:cNvSpPr/>
           <p:nvPr/>
         </p:nvSpPr>
@@ -32038,7 +32140,7 @@
       </p:sp>
       <p:sp>
         <p:nvSpPr>
-          <p:cNvPr id="21" name="Shape 19"/>
+          <p:cNvPr id="24" name="Shape 22"/>
           <p:cNvSpPr/>
           <p:nvPr/>
         </p:nvSpPr>
@@ -32065,13 +32167,13 @@
       </p:sp>
       <p:sp>
         <p:nvSpPr>
-          <p:cNvPr id="22" name="Shape 20"/>
-          <p:cNvSpPr/>
-          <p:nvPr/>
-        </p:nvSpPr>
-        <p:spPr>
-          <a:xfrm>
-            <a:off x="4370832" y="3364992"/>
+          <p:cNvPr id="25" name="Shape 23"/>
+          <p:cNvSpPr/>
+          <p:nvPr/>
+        </p:nvSpPr>
+        <p:spPr>
+          <a:xfrm>
+            <a:off x="2999232" y="3364992"/>
             <a:ext cx="1645920" cy="475488"/>
           </a:xfrm>
           <a:prstGeom prst="rect">
@@ -32092,13 +32194,13 @@
       </p:sp>
       <p:sp>
         <p:nvSpPr>
-          <p:cNvPr id="23" name="Text 21"/>
-          <p:cNvSpPr/>
-          <p:nvPr/>
-        </p:nvSpPr>
-        <p:spPr>
-          <a:xfrm>
-            <a:off x="4370832" y="3364992"/>
+          <p:cNvPr id="26" name="Text 24"/>
+          <p:cNvSpPr/>
+          <p:nvPr/>
+        </p:nvSpPr>
+        <p:spPr>
+          <a:xfrm>
+            <a:off x="2999232" y="3364992"/>
             <a:ext cx="1645920" cy="475488"/>
           </a:xfrm>
           <a:prstGeom prst="rect">
@@ -32123,6 +32225,111 @@
                 <a:ea typeface="Trebuchet MS" pitchFamily="34" charset="-122"/>
                 <a:cs typeface="Trebuchet MS" pitchFamily="34" charset="-120"/>
               </a:rPr>
+              <a:t>con</a:t>
+            </a:r>
+            <a:endParaRPr lang="en-US" sz="1400" dirty="0"/>
+          </a:p>
+        </p:txBody>
+      </p:sp>
+      <p:sp>
+        <p:nvSpPr>
+          <p:cNvPr id="27" name="Text 25"/>
+          <p:cNvSpPr/>
+          <p:nvPr/>
+        </p:nvSpPr>
+        <p:spPr>
+          <a:xfrm>
+            <a:off x="4645152" y="3364992"/>
+            <a:ext cx="1097280" cy="475488"/>
+          </a:xfrm>
+          <a:prstGeom prst="rect">
+            <a:avLst/>
+          </a:prstGeom>
+          <a:noFill/>
+          <a:ln/>
+        </p:spPr>
+        <p:txBody>
+          <a:bodyPr wrap="square" lIns="0" tIns="0" rIns="0" bIns="0" rtlCol="0" anchor="ctr"/>
+          <a:lstStyle/>
+          <a:p>
+            <a:pPr algn="ctr" indent="0" marL="0">
+              <a:buNone/>
+            </a:pPr>
+            <a:r>
+              <a:rPr lang="en-US" sz="1600" b="1" dirty="0">
+                <a:solidFill>
+                  <a:srgbClr val="0D9488"/>
+                </a:solidFill>
+                <a:latin typeface="Trebuchet MS" pitchFamily="34" charset="0"/>
+                <a:ea typeface="Trebuchet MS" pitchFamily="34" charset="-122"/>
+                <a:cs typeface="Trebuchet MS" pitchFamily="34" charset="-120"/>
+              </a:rPr>
+              <a:t>·</a:t>
+            </a:r>
+            <a:endParaRPr lang="en-US" sz="1600" dirty="0"/>
+          </a:p>
+        </p:txBody>
+      </p:sp>
+      <p:sp>
+        <p:nvSpPr>
+          <p:cNvPr id="28" name="Shape 26"/>
+          <p:cNvSpPr/>
+          <p:nvPr/>
+        </p:nvSpPr>
+        <p:spPr>
+          <a:xfrm>
+            <a:off x="5742432" y="3364992"/>
+            <a:ext cx="1645920" cy="475488"/>
+          </a:xfrm>
+          <a:prstGeom prst="rect">
+            <a:avLst>
+              <a:gd name="adj" fmla="val 9615"/>
+            </a:avLst>
+          </a:prstGeom>
+          <a:solidFill>
+            <a:srgbClr val="FFFFFF"/>
+          </a:solidFill>
+          <a:ln w="12700">
+            <a:solidFill>
+              <a:srgbClr val="0D9488"/>
+            </a:solidFill>
+            <a:prstDash val="solid"/>
+          </a:ln>
+        </p:spPr>
+      </p:sp>
+      <p:sp>
+        <p:nvSpPr>
+          <p:cNvPr id="29" name="Text 27"/>
+          <p:cNvSpPr/>
+          <p:nvPr/>
+        </p:nvSpPr>
+        <p:spPr>
+          <a:xfrm>
+            <a:off x="5742432" y="3364992"/>
+            <a:ext cx="1645920" cy="475488"/>
+          </a:xfrm>
+          <a:prstGeom prst="rect">
+            <a:avLst/>
+          </a:prstGeom>
+          <a:noFill/>
+          <a:ln/>
+        </p:spPr>
+        <p:txBody>
+          <a:bodyPr wrap="square" lIns="0" tIns="0" rIns="0" bIns="0" rtlCol="0" anchor="ctr"/>
+          <a:lstStyle/>
+          <a:p>
+            <a:pPr algn="ctr" indent="0" marL="0">
+              <a:buNone/>
+            </a:pPr>
+            <a:r>
+              <a:rPr lang="en-US" sz="1400" b="1" dirty="0">
+                <a:solidFill>
+                  <a:srgbClr val="0D9488"/>
+                </a:solidFill>
+                <a:latin typeface="Trebuchet MS" pitchFamily="34" charset="0"/>
+                <a:ea typeface="Trebuchet MS" pitchFamily="34" charset="-122"/>
+                <a:cs typeface="Trebuchet MS" pitchFamily="34" charset="-120"/>
+              </a:rPr>
               <a:t>test</a:t>
             </a:r>
             <a:endParaRPr lang="en-US" sz="1400" dirty="0"/>
@@ -32131,7 +32338,7 @@
       </p:sp>
       <p:sp>
         <p:nvSpPr>
-          <p:cNvPr id="24" name="Shape 22"/>
+          <p:cNvPr id="30" name="Shape 28"/>
           <p:cNvSpPr/>
           <p:nvPr/>
         </p:nvSpPr>
@@ -32158,7 +32365,7 @@
       </p:sp>
       <p:sp>
         <p:nvSpPr>
-          <p:cNvPr id="25" name="Text 23"/>
+          <p:cNvPr id="31" name="Text 29"/>
           <p:cNvSpPr/>
           <p:nvPr/>
         </p:nvSpPr>
@@ -32197,18 +32404,18 @@
       </p:sp>
       <p:sp>
         <p:nvSpPr>
-          <p:cNvPr id="26" name="Shape 24"/>
+          <p:cNvPr id="32" name="Shape 30"/>
           <p:cNvSpPr/>
           <p:nvPr/>
         </p:nvSpPr>
         <p:spPr>
           <a:xfrm>
             <a:off x="1874520" y="4096512"/>
-            <a:ext cx="6903720" cy="658368"/>
+            <a:ext cx="6903720" cy="804672"/>
           </a:xfrm>
           <a:prstGeom prst="rect">
             <a:avLst>
-              <a:gd name="adj" fmla="val 8333"/>
+              <a:gd name="adj" fmla="val 6818"/>
             </a:avLst>
           </a:prstGeom>
           <a:solidFill>
@@ -32224,18 +32431,18 @@
       </p:sp>
       <p:sp>
         <p:nvSpPr>
-          <p:cNvPr id="27" name="Shape 25"/>
-          <p:cNvSpPr/>
-          <p:nvPr/>
-        </p:nvSpPr>
-        <p:spPr>
-          <a:xfrm>
-            <a:off x="2670048" y="4169664"/>
-            <a:ext cx="685800" cy="475488"/>
+          <p:cNvPr id="33" name="Shape 31"/>
+          <p:cNvSpPr/>
+          <p:nvPr/>
+        </p:nvSpPr>
+        <p:spPr>
+          <a:xfrm>
+            <a:off x="2124837" y="4169664"/>
+            <a:ext cx="685800" cy="384048"/>
           </a:xfrm>
           <a:prstGeom prst="rect">
             <a:avLst>
-              <a:gd name="adj" fmla="val 7692"/>
+              <a:gd name="adj" fmla="val 9524"/>
             </a:avLst>
           </a:prstGeom>
           <a:solidFill>
@@ -32251,14 +32458,14 @@
       </p:sp>
       <p:sp>
         <p:nvSpPr>
-          <p:cNvPr id="28" name="Text 26"/>
-          <p:cNvSpPr/>
-          <p:nvPr/>
-        </p:nvSpPr>
-        <p:spPr>
-          <a:xfrm>
-            <a:off x="2670048" y="4169664"/>
-            <a:ext cx="685800" cy="475488"/>
+          <p:cNvPr id="34" name="Text 32"/>
+          <p:cNvSpPr/>
+          <p:nvPr/>
+        </p:nvSpPr>
+        <p:spPr>
+          <a:xfrm>
+            <a:off x="2124837" y="4169664"/>
+            <a:ext cx="685800" cy="384048"/>
           </a:xfrm>
           <a:prstGeom prst="rect">
             <a:avLst/>
@@ -32282,7 +32489,7 @@
                 <a:ea typeface="Trebuchet MS" pitchFamily="34" charset="-122"/>
                 <a:cs typeface="Trebuchet MS" pitchFamily="34" charset="-120"/>
               </a:rPr>
-              <a:t>t</a:t>
+              <a:t>c</a:t>
             </a:r>
             <a:endParaRPr lang="en-US" sz="900" dirty="0"/>
           </a:p>
@@ -32290,18 +32497,57 @@
       </p:sp>
       <p:sp>
         <p:nvSpPr>
-          <p:cNvPr id="29" name="Shape 27"/>
-          <p:cNvSpPr/>
-          <p:nvPr/>
-        </p:nvSpPr>
-        <p:spPr>
-          <a:xfrm>
-            <a:off x="4123944" y="4169664"/>
-            <a:ext cx="685800" cy="475488"/>
+          <p:cNvPr id="35" name="Text 33"/>
+          <p:cNvSpPr/>
+          <p:nvPr/>
+        </p:nvSpPr>
+        <p:spPr>
+          <a:xfrm>
+            <a:off x="2124837" y="4572000"/>
+            <a:ext cx="685800" cy="219456"/>
+          </a:xfrm>
+          <a:prstGeom prst="rect">
+            <a:avLst/>
+          </a:prstGeom>
+          <a:noFill/>
+          <a:ln/>
+        </p:spPr>
+        <p:txBody>
+          <a:bodyPr wrap="square" lIns="0" tIns="0" rIns="0" bIns="0" rtlCol="0" anchor="t"/>
+          <a:lstStyle/>
+          <a:p>
+            <a:pPr algn="ctr" indent="0" marL="0">
+              <a:buNone/>
+            </a:pPr>
+            <a:r>
+              <a:rPr lang="en-US" sz="750" i="1" dirty="0">
+                <a:solidFill>
+                  <a:srgbClr val="94A3B8"/>
+                </a:solidFill>
+                <a:latin typeface="Calibri" pitchFamily="34" charset="0"/>
+                <a:ea typeface="Calibri" pitchFamily="34" charset="-122"/>
+                <a:cs typeface="Calibri" pitchFamily="34" charset="-120"/>
+              </a:rPr>
+              <a:t>/k/</a:t>
+            </a:r>
+            <a:endParaRPr lang="en-US" sz="750" dirty="0"/>
+          </a:p>
+        </p:txBody>
+      </p:sp>
+      <p:sp>
+        <p:nvSpPr>
+          <p:cNvPr id="36" name="Shape 34"/>
+          <p:cNvSpPr/>
+          <p:nvPr/>
+        </p:nvSpPr>
+        <p:spPr>
+          <a:xfrm>
+            <a:off x="3033522" y="4169664"/>
+            <a:ext cx="685800" cy="384048"/>
           </a:xfrm>
           <a:prstGeom prst="rect">
             <a:avLst>
-              <a:gd name="adj" fmla="val 7692"/>
+              <a:gd name="adj" fmla="val 9524"/>
             </a:avLst>
           </a:prstGeom>
           <a:solidFill>
@@ -32317,14 +32563,14 @@
       </p:sp>
       <p:sp>
         <p:nvSpPr>
-          <p:cNvPr id="30" name="Text 28"/>
-          <p:cNvSpPr/>
-          <p:nvPr/>
-        </p:nvSpPr>
-        <p:spPr>
-          <a:xfrm>
-            <a:off x="4123944" y="4169664"/>
-            <a:ext cx="685800" cy="475488"/>
+          <p:cNvPr id="37" name="Text 35"/>
+          <p:cNvSpPr/>
+          <p:nvPr/>
+        </p:nvSpPr>
+        <p:spPr>
+          <a:xfrm>
+            <a:off x="3033522" y="4169664"/>
+            <a:ext cx="685800" cy="384048"/>
           </a:xfrm>
           <a:prstGeom prst="rect">
             <a:avLst/>
@@ -32348,7 +32594,7 @@
                 <a:ea typeface="Trebuchet MS" pitchFamily="34" charset="-122"/>
                 <a:cs typeface="Trebuchet MS" pitchFamily="34" charset="-120"/>
               </a:rPr>
-              <a:t>e</a:t>
+              <a:t>o</a:t>
             </a:r>
             <a:endParaRPr lang="en-US" sz="900" dirty="0"/>
           </a:p>
@@ -32356,18 +32602,18 @@
       </p:sp>
       <p:sp>
         <p:nvSpPr>
-          <p:cNvPr id="31" name="Shape 29"/>
-          <p:cNvSpPr/>
-          <p:nvPr/>
-        </p:nvSpPr>
-        <p:spPr>
-          <a:xfrm>
-            <a:off x="5577840" y="4169664"/>
-            <a:ext cx="685800" cy="475488"/>
+          <p:cNvPr id="38" name="Shape 36"/>
+          <p:cNvSpPr/>
+          <p:nvPr/>
+        </p:nvSpPr>
+        <p:spPr>
+          <a:xfrm>
+            <a:off x="3942207" y="4169664"/>
+            <a:ext cx="685800" cy="384048"/>
           </a:xfrm>
           <a:prstGeom prst="rect">
             <a:avLst>
-              <a:gd name="adj" fmla="val 7692"/>
+              <a:gd name="adj" fmla="val 9524"/>
             </a:avLst>
           </a:prstGeom>
           <a:solidFill>
@@ -32383,14 +32629,14 @@
       </p:sp>
       <p:sp>
         <p:nvSpPr>
-          <p:cNvPr id="32" name="Text 30"/>
-          <p:cNvSpPr/>
-          <p:nvPr/>
-        </p:nvSpPr>
-        <p:spPr>
-          <a:xfrm>
-            <a:off x="5577840" y="4169664"/>
-            <a:ext cx="685800" cy="475488"/>
+          <p:cNvPr id="39" name="Text 37"/>
+          <p:cNvSpPr/>
+          <p:nvPr/>
+        </p:nvSpPr>
+        <p:spPr>
+          <a:xfrm>
+            <a:off x="3942207" y="4169664"/>
+            <a:ext cx="685800" cy="384048"/>
           </a:xfrm>
           <a:prstGeom prst="rect">
             <a:avLst/>
@@ -32414,6 +32660,204 @@
                 <a:ea typeface="Trebuchet MS" pitchFamily="34" charset="-122"/>
                 <a:cs typeface="Trebuchet MS" pitchFamily="34" charset="-120"/>
               </a:rPr>
+              <a:t>n</a:t>
+            </a:r>
+            <a:endParaRPr lang="en-US" sz="900" dirty="0"/>
+          </a:p>
+        </p:txBody>
+      </p:sp>
+      <p:sp>
+        <p:nvSpPr>
+          <p:cNvPr id="40" name="Shape 38"/>
+          <p:cNvSpPr/>
+          <p:nvPr/>
+        </p:nvSpPr>
+        <p:spPr>
+          <a:xfrm>
+            <a:off x="4850892" y="4169664"/>
+            <a:ext cx="685800" cy="384048"/>
+          </a:xfrm>
+          <a:prstGeom prst="rect">
+            <a:avLst>
+              <a:gd name="adj" fmla="val 9524"/>
+            </a:avLst>
+          </a:prstGeom>
+          <a:solidFill>
+            <a:srgbClr val="FFFFFF"/>
+          </a:solidFill>
+          <a:ln w="12700">
+            <a:solidFill>
+              <a:srgbClr val="DB2777"/>
+            </a:solidFill>
+            <a:prstDash val="solid"/>
+          </a:ln>
+        </p:spPr>
+      </p:sp>
+      <p:sp>
+        <p:nvSpPr>
+          <p:cNvPr id="41" name="Text 39"/>
+          <p:cNvSpPr/>
+          <p:nvPr/>
+        </p:nvSpPr>
+        <p:spPr>
+          <a:xfrm>
+            <a:off x="4850892" y="4169664"/>
+            <a:ext cx="685800" cy="384048"/>
+          </a:xfrm>
+          <a:prstGeom prst="rect">
+            <a:avLst/>
+          </a:prstGeom>
+          <a:noFill/>
+          <a:ln/>
+        </p:spPr>
+        <p:txBody>
+          <a:bodyPr wrap="square" lIns="0" tIns="0" rIns="0" bIns="0" rtlCol="0" anchor="ctr"/>
+          <a:lstStyle/>
+          <a:p>
+            <a:pPr algn="ctr" indent="0" marL="0">
+              <a:buNone/>
+            </a:pPr>
+            <a:r>
+              <a:rPr lang="en-US" sz="900" b="1" dirty="0">
+                <a:solidFill>
+                  <a:srgbClr val="9D174D"/>
+                </a:solidFill>
+                <a:latin typeface="Trebuchet MS" pitchFamily="34" charset="0"/>
+                <a:ea typeface="Trebuchet MS" pitchFamily="34" charset="-122"/>
+                <a:cs typeface="Trebuchet MS" pitchFamily="34" charset="-120"/>
+              </a:rPr>
+              <a:t>t</a:t>
+            </a:r>
+            <a:endParaRPr lang="en-US" sz="900" dirty="0"/>
+          </a:p>
+        </p:txBody>
+      </p:sp>
+      <p:sp>
+        <p:nvSpPr>
+          <p:cNvPr id="42" name="Shape 40"/>
+          <p:cNvSpPr/>
+          <p:nvPr/>
+        </p:nvSpPr>
+        <p:spPr>
+          <a:xfrm>
+            <a:off x="5759577" y="4169664"/>
+            <a:ext cx="685800" cy="384048"/>
+          </a:xfrm>
+          <a:prstGeom prst="rect">
+            <a:avLst>
+              <a:gd name="adj" fmla="val 9524"/>
+            </a:avLst>
+          </a:prstGeom>
+          <a:solidFill>
+            <a:srgbClr val="FFFFFF"/>
+          </a:solidFill>
+          <a:ln w="12700">
+            <a:solidFill>
+              <a:srgbClr val="DB2777"/>
+            </a:solidFill>
+            <a:prstDash val="solid"/>
+          </a:ln>
+        </p:spPr>
+      </p:sp>
+      <p:sp>
+        <p:nvSpPr>
+          <p:cNvPr id="43" name="Text 41"/>
+          <p:cNvSpPr/>
+          <p:nvPr/>
+        </p:nvSpPr>
+        <p:spPr>
+          <a:xfrm>
+            <a:off x="5759577" y="4169664"/>
+            <a:ext cx="685800" cy="384048"/>
+          </a:xfrm>
+          <a:prstGeom prst="rect">
+            <a:avLst/>
+          </a:prstGeom>
+          <a:noFill/>
+          <a:ln/>
+        </p:spPr>
+        <p:txBody>
+          <a:bodyPr wrap="square" lIns="0" tIns="0" rIns="0" bIns="0" rtlCol="0" anchor="ctr"/>
+          <a:lstStyle/>
+          <a:p>
+            <a:pPr algn="ctr" indent="0" marL="0">
+              <a:buNone/>
+            </a:pPr>
+            <a:r>
+              <a:rPr lang="en-US" sz="900" b="1" dirty="0">
+                <a:solidFill>
+                  <a:srgbClr val="9D174D"/>
+                </a:solidFill>
+                <a:latin typeface="Trebuchet MS" pitchFamily="34" charset="0"/>
+                <a:ea typeface="Trebuchet MS" pitchFamily="34" charset="-122"/>
+                <a:cs typeface="Trebuchet MS" pitchFamily="34" charset="-120"/>
+              </a:rPr>
+              <a:t>e</a:t>
+            </a:r>
+            <a:endParaRPr lang="en-US" sz="900" dirty="0"/>
+          </a:p>
+        </p:txBody>
+      </p:sp>
+      <p:sp>
+        <p:nvSpPr>
+          <p:cNvPr id="44" name="Shape 42"/>
+          <p:cNvSpPr/>
+          <p:nvPr/>
+        </p:nvSpPr>
+        <p:spPr>
+          <a:xfrm>
+            <a:off x="6668262" y="4169664"/>
+            <a:ext cx="685800" cy="384048"/>
+          </a:xfrm>
+          <a:prstGeom prst="rect">
+            <a:avLst>
+              <a:gd name="adj" fmla="val 9524"/>
+            </a:avLst>
+          </a:prstGeom>
+          <a:solidFill>
+            <a:srgbClr val="FFFFFF"/>
+          </a:solidFill>
+          <a:ln w="12700">
+            <a:solidFill>
+              <a:srgbClr val="DB2777"/>
+            </a:solidFill>
+            <a:prstDash val="solid"/>
+          </a:ln>
+        </p:spPr>
+      </p:sp>
+      <p:sp>
+        <p:nvSpPr>
+          <p:cNvPr id="45" name="Text 43"/>
+          <p:cNvSpPr/>
+          <p:nvPr/>
+        </p:nvSpPr>
+        <p:spPr>
+          <a:xfrm>
+            <a:off x="6668262" y="4169664"/>
+            <a:ext cx="685800" cy="384048"/>
+          </a:xfrm>
+          <a:prstGeom prst="rect">
+            <a:avLst/>
+          </a:prstGeom>
+          <a:noFill/>
+          <a:ln/>
+        </p:spPr>
+        <p:txBody>
+          <a:bodyPr wrap="square" lIns="0" tIns="0" rIns="0" bIns="0" rtlCol="0" anchor="ctr"/>
+          <a:lstStyle/>
+          <a:p>
+            <a:pPr algn="ctr" indent="0" marL="0">
+              <a:buNone/>
+            </a:pPr>
+            <a:r>
+              <a:rPr lang="en-US" sz="900" b="1" dirty="0">
+                <a:solidFill>
+                  <a:srgbClr val="9D174D"/>
+                </a:solidFill>
+                <a:latin typeface="Trebuchet MS" pitchFamily="34" charset="0"/>
+                <a:ea typeface="Trebuchet MS" pitchFamily="34" charset="-122"/>
+                <a:cs typeface="Trebuchet MS" pitchFamily="34" charset="-120"/>
+              </a:rPr>
               <a:t>s</a:t>
             </a:r>
             <a:endParaRPr lang="en-US" sz="900" dirty="0"/>
@@ -32422,18 +32866,18 @@
       </p:sp>
       <p:sp>
         <p:nvSpPr>
-          <p:cNvPr id="33" name="Shape 31"/>
-          <p:cNvSpPr/>
-          <p:nvPr/>
-        </p:nvSpPr>
-        <p:spPr>
-          <a:xfrm>
-            <a:off x="7031736" y="4169664"/>
-            <a:ext cx="685800" cy="475488"/>
+          <p:cNvPr id="46" name="Shape 44"/>
+          <p:cNvSpPr/>
+          <p:nvPr/>
+        </p:nvSpPr>
+        <p:spPr>
+          <a:xfrm>
+            <a:off x="7576947" y="4169664"/>
+            <a:ext cx="685800" cy="384048"/>
           </a:xfrm>
           <a:prstGeom prst="rect">
             <a:avLst>
-              <a:gd name="adj" fmla="val 7692"/>
+              <a:gd name="adj" fmla="val 9524"/>
             </a:avLst>
           </a:prstGeom>
           <a:solidFill>
@@ -32449,14 +32893,14 @@
       </p:sp>
       <p:sp>
         <p:nvSpPr>
-          <p:cNvPr id="34" name="Text 32"/>
-          <p:cNvSpPr/>
-          <p:nvPr/>
-        </p:nvSpPr>
-        <p:spPr>
-          <a:xfrm>
-            <a:off x="7031736" y="4169664"/>
-            <a:ext cx="685800" cy="475488"/>
+          <p:cNvPr id="47" name="Text 45"/>
+          <p:cNvSpPr/>
+          <p:nvPr/>
+        </p:nvSpPr>
+        <p:spPr>
+          <a:xfrm>
+            <a:off x="7576947" y="4169664"/>
+            <a:ext cx="685800" cy="384048"/>
           </a:xfrm>
           <a:prstGeom prst="rect">
             <a:avLst/>
@@ -34242,7 +34686,7 @@
                 <a:ea typeface="Trebuchet MS" pitchFamily="34" charset="-122"/>
                 <a:cs typeface="Trebuchet MS" pitchFamily="34" charset="-120"/>
               </a:rPr>
-              <a:t>at-</a:t>
+              <a:t>con-</a:t>
             </a:r>
             <a:endParaRPr lang="en-US" sz="1300" dirty="0"/>
           </a:p>
@@ -34434,7 +34878,7 @@
                 <a:ea typeface="Trebuchet MS" pitchFamily="34" charset="-122"/>
                 <a:cs typeface="Trebuchet MS" pitchFamily="34" charset="-120"/>
               </a:rPr>
-              <a:t>con-</a:t>
+              <a:t>pro-</a:t>
             </a:r>
             <a:endParaRPr lang="en-US" sz="1300" dirty="0"/>
           </a:p>
@@ -34523,7 +34967,7 @@
                 <a:ea typeface="Trebuchet MS" pitchFamily="34" charset="-122"/>
                 <a:cs typeface="Trebuchet MS" pitchFamily="34" charset="-120"/>
               </a:rPr>
-              <a:t>-er</a:t>
+              <a:t>-ing</a:t>
             </a:r>
             <a:endParaRPr lang="en-US" sz="1300" dirty="0"/>
           </a:p>
@@ -34587,7 +35031,7 @@
                 <a:ea typeface="Trebuchet MS" pitchFamily="34" charset="-122"/>
                 <a:cs typeface="Trebuchet MS" pitchFamily="34" charset="-120"/>
               </a:rPr>
-              <a:t>de-</a:t>
+              <a:t>at-</a:t>
             </a:r>
             <a:endParaRPr lang="en-US" sz="1300" dirty="0"/>
           </a:p>
@@ -34676,7 +35120,7 @@
                 <a:ea typeface="Trebuchet MS" pitchFamily="34" charset="-122"/>
                 <a:cs typeface="Trebuchet MS" pitchFamily="34" charset="-120"/>
               </a:rPr>
-              <a:t>-ing</a:t>
+              <a:t>-er</a:t>
             </a:r>
             <a:endParaRPr lang="en-US" sz="1300" dirty="0"/>
           </a:p>
@@ -34740,7 +35184,7 @@
                 <a:ea typeface="Trebuchet MS" pitchFamily="34" charset="-122"/>
                 <a:cs typeface="Trebuchet MS" pitchFamily="34" charset="-120"/>
               </a:rPr>
-              <a:t>pro-</a:t>
+              <a:t>de-</a:t>
             </a:r>
             <a:endParaRPr lang="en-US" sz="1300" dirty="0"/>
           </a:p>
@@ -34893,7 +35337,7 @@
                 <a:ea typeface="Trebuchet MS" pitchFamily="34" charset="-122"/>
                 <a:cs typeface="Trebuchet MS" pitchFamily="34" charset="-120"/>
               </a:rPr>
-              <a:t>re-</a:t>
+              <a:t>pre-</a:t>
             </a:r>
             <a:endParaRPr lang="en-US" sz="1300" dirty="0"/>
           </a:p>
@@ -35087,7 +35531,7 @@
                 <a:ea typeface="Trebuchet MS" pitchFamily="34" charset="-122"/>
                 <a:cs typeface="Trebuchet MS" pitchFamily="34" charset="-120"/>
               </a:rPr>
-              <a:t>test</a:t>
+              <a:t>contest</a:t>
             </a:r>
             <a:endParaRPr lang="en-US" sz="1200" dirty="0"/>
           </a:p>
@@ -35153,7 +35597,7 @@
                 <a:ea typeface="Trebuchet MS" pitchFamily="34" charset="-122"/>
                 <a:cs typeface="Trebuchet MS" pitchFamily="34" charset="-120"/>
               </a:rPr>
-              <a:t>contest</a:t>
+              <a:t>protest</a:t>
             </a:r>
             <a:endParaRPr lang="en-US" sz="1200" dirty="0"/>
           </a:p>
@@ -35219,7 +35663,7 @@
                 <a:ea typeface="Trebuchet MS" pitchFamily="34" charset="-122"/>
                 <a:cs typeface="Trebuchet MS" pitchFamily="34" charset="-120"/>
               </a:rPr>
-              <a:t>protest</a:t>
+              <a:t>attest</a:t>
             </a:r>
             <a:endParaRPr lang="en-US" sz="1200" dirty="0"/>
           </a:p>
@@ -35285,7 +35729,7 @@
                 <a:ea typeface="Trebuchet MS" pitchFamily="34" charset="-122"/>
                 <a:cs typeface="Trebuchet MS" pitchFamily="34" charset="-120"/>
               </a:rPr>
-              <a:t>attest</a:t>
+              <a:t>testing</a:t>
             </a:r>
             <a:endParaRPr lang="en-US" sz="1200" dirty="0"/>
           </a:p>
@@ -35351,7 +35795,7 @@
                 <a:ea typeface="Trebuchet MS" pitchFamily="34" charset="-122"/>
                 <a:cs typeface="Trebuchet MS" pitchFamily="34" charset="-120"/>
               </a:rPr>
-              <a:t>detest</a:t>
+              <a:t>tested</a:t>
             </a:r>
             <a:endParaRPr lang="en-US" sz="1200" dirty="0"/>
           </a:p>
@@ -35417,7 +35861,7 @@
                 <a:ea typeface="Trebuchet MS" pitchFamily="34" charset="-122"/>
                 <a:cs typeface="Trebuchet MS" pitchFamily="34" charset="-120"/>
               </a:rPr>
-              <a:t>testing</a:t>
+              <a:t>tester</a:t>
             </a:r>
             <a:endParaRPr lang="en-US" sz="1200" dirty="0"/>
           </a:p>
@@ -35483,7 +35927,7 @@
                 <a:ea typeface="Trebuchet MS" pitchFamily="34" charset="-122"/>
                 <a:cs typeface="Trebuchet MS" pitchFamily="34" charset="-120"/>
               </a:rPr>
-              <a:t>testament</a:t>
+              <a:t>contestant</a:t>
             </a:r>
             <a:endParaRPr lang="en-US" sz="1200" dirty="0"/>
           </a:p>
@@ -35549,7 +35993,7 @@
                 <a:ea typeface="Trebuchet MS" pitchFamily="34" charset="-122"/>
                 <a:cs typeface="Trebuchet MS" pitchFamily="34" charset="-120"/>
               </a:rPr>
-              <a:t>contestant</a:t>
+              <a:t>detest</a:t>
             </a:r>
             <a:endParaRPr lang="en-US" sz="1200" dirty="0"/>
           </a:p>
@@ -36737,7 +37181,7 @@
                 <a:ea typeface="Calibri" pitchFamily="34" charset="-122"/>
                 <a:cs typeface="Calibri" pitchFamily="34" charset="-120"/>
               </a:rPr>
-              <a:t>1.  The root 'test' comes from Latin and relates to witnessing or trying something.</a:t>
+              <a:t>1.  The root 'test' is found in the word 'festival'.</a:t>
             </a:r>
             <a:endParaRPr lang="en-US" sz="1300" dirty="0"/>
           </a:p>
@@ -36760,11 +37204,11 @@
             </a:avLst>
           </a:prstGeom>
           <a:solidFill>
-            <a:srgbClr val="DCFCE7"/>
-          </a:solidFill>
-          <a:ln w="12700">
-            <a:solidFill>
-              <a:srgbClr val="16A34A"/>
+            <a:srgbClr val="FEE2E2"/>
+          </a:solidFill>
+          <a:ln w="12700">
+            <a:solidFill>
+              <a:srgbClr val="DC2626"/>
             </a:solidFill>
             <a:prstDash val="solid"/>
           </a:ln>
@@ -36797,13 +37241,13 @@
             <a:r>
               <a:rPr lang="en-US" sz="1100" b="1" dirty="0">
                 <a:solidFill>
-                  <a:srgbClr val="16A34A"/>
+                  <a:srgbClr val="DC2626"/>
                 </a:solidFill>
                 <a:latin typeface="Trebuchet MS" pitchFamily="34" charset="0"/>
                 <a:ea typeface="Trebuchet MS" pitchFamily="34" charset="-122"/>
                 <a:cs typeface="Trebuchet MS" pitchFamily="34" charset="-120"/>
               </a:rPr>
-              <a:t>TRUE</a:t>
+              <a:t>FALSE</a:t>
             </a:r>
             <a:endParaRPr lang="en-US" sz="1100" dirty="0"/>
           </a:p>
@@ -36876,7 +37320,7 @@
                 <a:ea typeface="Calibri" pitchFamily="34" charset="-122"/>
                 <a:cs typeface="Calibri" pitchFamily="34" charset="-120"/>
               </a:rPr>
-              <a:t>2.  The word 'detest' means to enjoy something very much.</a:t>
+              <a:t>2.  The word 'detest' means to love something deeply.</a:t>
             </a:r>
             <a:endParaRPr lang="en-US" sz="1300" dirty="0"/>
           </a:p>
@@ -37015,7 +37459,7 @@
                 <a:ea typeface="Calibri" pitchFamily="34" charset="-122"/>
                 <a:cs typeface="Calibri" pitchFamily="34" charset="-120"/>
               </a:rPr>
-              <a:t>3.  A contestant is a person who takes part in a contest.</a:t>
+              <a:t>3.  A contestant is someone who takes part in a competition.</a:t>
             </a:r>
             <a:endParaRPr lang="en-US" sz="1300" dirty="0"/>
           </a:p>
@@ -37154,7 +37598,7 @@
                 <a:ea typeface="Calibri" pitchFamily="34" charset="-122"/>
                 <a:cs typeface="Calibri" pitchFamily="34" charset="-120"/>
               </a:rPr>
-              <a:t>4.  The word 'protest' contains the root 'test'.</a:t>
+              <a:t>4.  The prefix 'pro' can combine with 'test' to make the word 'protest'.</a:t>
             </a:r>
             <a:endParaRPr lang="en-US" sz="1300" dirty="0"/>
           </a:p>
@@ -37293,7 +37737,7 @@
                 <a:ea typeface="Calibri" pitchFamily="34" charset="-122"/>
                 <a:cs typeface="Calibri" pitchFamily="34" charset="-120"/>
               </a:rPr>
-              <a:t>5.  The prefix 'de-' in 'detest' means 'again'.</a:t>
+              <a:t>5.  The root 'test' comes from a Latin word.</a:t>
             </a:r>
             <a:endParaRPr lang="en-US" sz="1300" dirty="0"/>
           </a:p>
@@ -37316,11 +37760,11 @@
             </a:avLst>
           </a:prstGeom>
           <a:solidFill>
-            <a:srgbClr val="FEE2E2"/>
-          </a:solidFill>
-          <a:ln w="12700">
-            <a:solidFill>
-              <a:srgbClr val="DC2626"/>
+            <a:srgbClr val="DCFCE7"/>
+          </a:solidFill>
+          <a:ln w="12700">
+            <a:solidFill>
+              <a:srgbClr val="16A34A"/>
             </a:solidFill>
             <a:prstDash val="solid"/>
           </a:ln>
@@ -37353,13 +37797,13 @@
             <a:r>
               <a:rPr lang="en-US" sz="1100" b="1" dirty="0">
                 <a:solidFill>
-                  <a:srgbClr val="DC2626"/>
+                  <a:srgbClr val="16A34A"/>
                 </a:solidFill>
                 <a:latin typeface="Trebuchet MS" pitchFamily="34" charset="0"/>
                 <a:ea typeface="Trebuchet MS" pitchFamily="34" charset="-122"/>
                 <a:cs typeface="Trebuchet MS" pitchFamily="34" charset="-120"/>
               </a:rPr>
-              <a:t>FALSE</a:t>
+              <a:t>TRUE</a:t>
             </a:r>
             <a:endParaRPr lang="en-US" sz="1100" dirty="0"/>
           </a:p>
@@ -37932,7 +38376,7 @@
                 <a:ea typeface="Trebuchet MS" pitchFamily="34" charset="-122"/>
                 <a:cs typeface="Trebuchet MS" pitchFamily="34" charset="-120"/>
               </a:rPr>
-              <a:t>test</a:t>
+              <a:t>contest</a:t>
             </a:r>
             <a:endParaRPr lang="en-US" sz="1300" dirty="0"/>
           </a:p>
@@ -37998,7 +38442,7 @@
                 <a:ea typeface="Trebuchet MS" pitchFamily="34" charset="-122"/>
                 <a:cs typeface="Trebuchet MS" pitchFamily="34" charset="-120"/>
               </a:rPr>
-              <a:t>contest</a:t>
+              <a:t>protest</a:t>
             </a:r>
             <a:endParaRPr lang="en-US" sz="1300" dirty="0"/>
           </a:p>
@@ -38064,7 +38508,7 @@
                 <a:ea typeface="Trebuchet MS" pitchFamily="34" charset="-122"/>
                 <a:cs typeface="Trebuchet MS" pitchFamily="34" charset="-120"/>
               </a:rPr>
-              <a:t>protest</a:t>
+              <a:t>attest</a:t>
             </a:r>
             <a:endParaRPr lang="en-US" sz="1300" dirty="0"/>
           </a:p>
@@ -38130,7 +38574,7 @@
                 <a:ea typeface="Trebuchet MS" pitchFamily="34" charset="-122"/>
                 <a:cs typeface="Trebuchet MS" pitchFamily="34" charset="-120"/>
               </a:rPr>
-              <a:t>attest</a:t>
+              <a:t>testing</a:t>
             </a:r>
             <a:endParaRPr lang="en-US" sz="1300" dirty="0"/>
           </a:p>
@@ -38196,7 +38640,7 @@
                 <a:ea typeface="Trebuchet MS" pitchFamily="34" charset="-122"/>
                 <a:cs typeface="Trebuchet MS" pitchFamily="34" charset="-120"/>
               </a:rPr>
-              <a:t>detest</a:t>
+              <a:t>tested</a:t>
             </a:r>
             <a:endParaRPr lang="en-US" sz="1300" dirty="0"/>
           </a:p>
@@ -38262,7 +38706,7 @@
                 <a:ea typeface="Trebuchet MS" pitchFamily="34" charset="-122"/>
                 <a:cs typeface="Trebuchet MS" pitchFamily="34" charset="-120"/>
               </a:rPr>
-              <a:t>testing</a:t>
+              <a:t>tester</a:t>
             </a:r>
             <a:endParaRPr lang="en-US" sz="1300" dirty="0"/>
           </a:p>
@@ -38328,7 +38772,7 @@
                 <a:ea typeface="Trebuchet MS" pitchFamily="34" charset="-122"/>
                 <a:cs typeface="Trebuchet MS" pitchFamily="34" charset="-120"/>
               </a:rPr>
-              <a:t>testament</a:t>
+              <a:t>contestant</a:t>
             </a:r>
             <a:endParaRPr lang="en-US" sz="1300" dirty="0"/>
           </a:p>
@@ -38921,7 +39365,7 @@
                 <a:ea typeface="Trebuchet MS" pitchFamily="34" charset="-122"/>
                 <a:cs typeface="Trebuchet MS" pitchFamily="34" charset="-120"/>
               </a:rPr>
-              <a:t>at-</a:t>
+              <a:t>con-</a:t>
             </a:r>
             <a:endParaRPr lang="en-US" sz="1300" dirty="0"/>
           </a:p>
@@ -39113,7 +39557,7 @@
                 <a:ea typeface="Trebuchet MS" pitchFamily="34" charset="-122"/>
                 <a:cs typeface="Trebuchet MS" pitchFamily="34" charset="-120"/>
               </a:rPr>
-              <a:t>con-</a:t>
+              <a:t>pro-</a:t>
             </a:r>
             <a:endParaRPr lang="en-US" sz="1300" dirty="0"/>
           </a:p>
@@ -39202,7 +39646,7 @@
                 <a:ea typeface="Trebuchet MS" pitchFamily="34" charset="-122"/>
                 <a:cs typeface="Trebuchet MS" pitchFamily="34" charset="-120"/>
               </a:rPr>
-              <a:t>-er</a:t>
+              <a:t>-ing</a:t>
             </a:r>
             <a:endParaRPr lang="en-US" sz="1300" dirty="0"/>
           </a:p>
@@ -39266,7 +39710,7 @@
                 <a:ea typeface="Trebuchet MS" pitchFamily="34" charset="-122"/>
                 <a:cs typeface="Trebuchet MS" pitchFamily="34" charset="-120"/>
               </a:rPr>
-              <a:t>de-</a:t>
+              <a:t>at-</a:t>
             </a:r>
             <a:endParaRPr lang="en-US" sz="1300" dirty="0"/>
           </a:p>
@@ -39355,7 +39799,7 @@
                 <a:ea typeface="Trebuchet MS" pitchFamily="34" charset="-122"/>
                 <a:cs typeface="Trebuchet MS" pitchFamily="34" charset="-120"/>
               </a:rPr>
-              <a:t>-ing</a:t>
+              <a:t>-er</a:t>
             </a:r>
             <a:endParaRPr lang="en-US" sz="1300" dirty="0"/>
           </a:p>
@@ -39419,7 +39863,7 @@
                 <a:ea typeface="Trebuchet MS" pitchFamily="34" charset="-122"/>
                 <a:cs typeface="Trebuchet MS" pitchFamily="34" charset="-120"/>
               </a:rPr>
-              <a:t>pro-</a:t>
+              <a:t>de-</a:t>
             </a:r>
             <a:endParaRPr lang="en-US" sz="1300" dirty="0"/>
           </a:p>
@@ -39572,7 +40016,7 @@
                 <a:ea typeface="Trebuchet MS" pitchFamily="34" charset="-122"/>
                 <a:cs typeface="Trebuchet MS" pitchFamily="34" charset="-120"/>
               </a:rPr>
-              <a:t>re-</a:t>
+              <a:t>pre-</a:t>
             </a:r>
             <a:endParaRPr lang="en-US" sz="1300" dirty="0"/>
           </a:p>
@@ -39715,7 +40159,7 @@
         <p:spPr>
           <a:xfrm>
             <a:off x="1508760" y="4178808"/>
-            <a:ext cx="822960" cy="420624"/>
+            <a:ext cx="950976" cy="420624"/>
           </a:xfrm>
           <a:prstGeom prst="rect">
             <a:avLst>
@@ -39749,7 +40193,7 @@
         <p:spPr>
           <a:xfrm>
             <a:off x="1508760" y="4178808"/>
-            <a:ext cx="822960" cy="420624"/>
+            <a:ext cx="950976" cy="420624"/>
           </a:xfrm>
           <a:prstGeom prst="rect">
             <a:avLst/>
@@ -39773,7 +40217,7 @@
                 <a:ea typeface="Trebuchet MS" pitchFamily="34" charset="-122"/>
                 <a:cs typeface="Trebuchet MS" pitchFamily="34" charset="-120"/>
               </a:rPr>
-              <a:t>at-</a:t>
+              <a:t>con-</a:t>
             </a:r>
             <a:endParaRPr lang="en-US" sz="1300" dirty="0"/>
           </a:p>
@@ -39787,7 +40231,7 @@
         </p:nvSpPr>
         <p:spPr>
           <a:xfrm>
-            <a:off x="2359152" y="4178808"/>
+            <a:off x="2487168" y="4178808"/>
             <a:ext cx="320040" cy="420624"/>
           </a:xfrm>
           <a:prstGeom prst="rect">
@@ -39826,7 +40270,7 @@
         </p:nvSpPr>
         <p:spPr>
           <a:xfrm>
-            <a:off x="2706624" y="4178808"/>
+            <a:off x="2834640" y="4178808"/>
             <a:ext cx="1243584" cy="420624"/>
           </a:xfrm>
           <a:prstGeom prst="rect">
@@ -39860,7 +40304,7 @@
         </p:nvSpPr>
         <p:spPr>
           <a:xfrm>
-            <a:off x="2706624" y="4178808"/>
+            <a:off x="2834640" y="4178808"/>
             <a:ext cx="1243584" cy="420624"/>
           </a:xfrm>
           <a:prstGeom prst="rect">
@@ -39899,7 +40343,7 @@
         </p:nvSpPr>
         <p:spPr>
           <a:xfrm>
-            <a:off x="3977640" y="4178808"/>
+            <a:off x="4105656" y="4178808"/>
             <a:ext cx="320040" cy="420624"/>
           </a:xfrm>
           <a:prstGeom prst="rect">
@@ -39938,7 +40382,7 @@
         </p:nvSpPr>
         <p:spPr>
           <a:xfrm>
-            <a:off x="4325112" y="4178808"/>
+            <a:off x="4453128" y="4178808"/>
             <a:ext cx="822960" cy="420624"/>
           </a:xfrm>
           <a:prstGeom prst="rect">
@@ -39972,7 +40416,7 @@
         </p:nvSpPr>
         <p:spPr>
           <a:xfrm>
-            <a:off x="4325112" y="4178808"/>
+            <a:off x="4453128" y="4178808"/>
             <a:ext cx="822960" cy="420624"/>
           </a:xfrm>
           <a:prstGeom prst="rect">
@@ -40011,7 +40455,7 @@
         </p:nvSpPr>
         <p:spPr>
           <a:xfrm>
-            <a:off x="5221224" y="4178808"/>
+            <a:off x="5349240" y="4178808"/>
             <a:ext cx="365760" cy="420624"/>
           </a:xfrm>
           <a:prstGeom prst="rect">
@@ -40050,7 +40494,7 @@
         </p:nvSpPr>
         <p:spPr>
           <a:xfrm>
-            <a:off x="5632704" y="4178808"/>
+            <a:off x="5760720" y="4178808"/>
             <a:ext cx="2194560" cy="420624"/>
           </a:xfrm>
           <a:prstGeom prst="rect">
@@ -40077,7 +40521,7 @@
         </p:nvSpPr>
         <p:spPr>
           <a:xfrm>
-            <a:off x="5632704" y="4178808"/>
+            <a:off x="5760720" y="4178808"/>
             <a:ext cx="2194560" cy="420624"/>
           </a:xfrm>
           <a:prstGeom prst="rect">
@@ -40102,7 +40546,7 @@
                 <a:ea typeface="Trebuchet MS" pitchFamily="34" charset="-122"/>
                 <a:cs typeface="Trebuchet MS" pitchFamily="34" charset="-120"/>
               </a:rPr>
-              <a:t>test</a:t>
+              <a:t>contest</a:t>
             </a:r>
             <a:endParaRPr lang="en-US" sz="1400" dirty="0"/>
           </a:p>
@@ -40506,7 +40950,7 @@
                 <a:ea typeface="Trebuchet MS" pitchFamily="34" charset="-122"/>
                 <a:cs typeface="Trebuchet MS" pitchFamily="34" charset="-120"/>
               </a:rPr>
-              <a:t>test</a:t>
+              <a:t>contest</a:t>
             </a:r>
             <a:endParaRPr lang="en-US" sz="1200" dirty="0"/>
           </a:p>
@@ -40572,7 +41016,7 @@
                 <a:ea typeface="Calibri" pitchFamily="34" charset="-122"/>
                 <a:cs typeface="Calibri" pitchFamily="34" charset="-120"/>
               </a:rPr>
-              <a:t>A set of questions or tasks used to find out what someone knows or can do.</a:t>
+              <a:t>A competition where people try to win against each other.</a:t>
             </a:r>
             <a:endParaRPr lang="en-US" sz="1200" dirty="0"/>
           </a:p>
@@ -40645,7 +41089,7 @@
                 <a:ea typeface="Trebuchet MS" pitchFamily="34" charset="-122"/>
                 <a:cs typeface="Trebuchet MS" pitchFamily="34" charset="-120"/>
               </a:rPr>
-              <a:t>contest</a:t>
+              <a:t>protest</a:t>
             </a:r>
             <a:endParaRPr lang="en-US" sz="1200" dirty="0"/>
           </a:p>
@@ -40711,7 +41155,7 @@
                 <a:ea typeface="Calibri" pitchFamily="34" charset="-122"/>
                 <a:cs typeface="Calibri" pitchFamily="34" charset="-120"/>
               </a:rPr>
-              <a:t>To show that you strongly disagree with something, often by speaking out or marching.</a:t>
+              <a:t>To say or show that something is true or real.</a:t>
             </a:r>
             <a:endParaRPr lang="en-US" sz="1200" dirty="0"/>
           </a:p>
@@ -40784,7 +41228,7 @@
                 <a:ea typeface="Trebuchet MS" pitchFamily="34" charset="-122"/>
                 <a:cs typeface="Trebuchet MS" pitchFamily="34" charset="-120"/>
               </a:rPr>
-              <a:t>protest</a:t>
+              <a:t>attest</a:t>
             </a:r>
             <a:endParaRPr lang="en-US" sz="1200" dirty="0"/>
           </a:p>
@@ -40850,7 +41294,7 @@
                 <a:ea typeface="Calibri" pitchFamily="34" charset="-122"/>
                 <a:cs typeface="Calibri" pitchFamily="34" charset="-120"/>
               </a:rPr>
-              <a:t>The process of checking or examining something to see how well it works.</a:t>
+              <a:t>A person or tool that checks whether something works properly.</a:t>
             </a:r>
             <a:endParaRPr lang="en-US" sz="1200" dirty="0"/>
           </a:p>
@@ -40923,7 +41367,7 @@
                 <a:ea typeface="Trebuchet MS" pitchFamily="34" charset="-122"/>
                 <a:cs typeface="Trebuchet MS" pitchFamily="34" charset="-120"/>
               </a:rPr>
-              <a:t>attest</a:t>
+              <a:t>testing</a:t>
             </a:r>
             <a:endParaRPr lang="en-US" sz="1200" dirty="0"/>
           </a:p>
@@ -40989,7 +41433,7 @@
                 <a:ea typeface="Calibri" pitchFamily="34" charset="-122"/>
                 <a:cs typeface="Calibri" pitchFamily="34" charset="-120"/>
               </a:rPr>
-              <a:t>To say or show that something is true or real.</a:t>
+              <a:t>Checking or trying something out to see if it works or what it is like.</a:t>
             </a:r>
             <a:endParaRPr lang="en-US" sz="1200" dirty="0"/>
           </a:p>
@@ -41062,7 +41506,7 @@
                 <a:ea typeface="Trebuchet MS" pitchFamily="34" charset="-122"/>
                 <a:cs typeface="Trebuchet MS" pitchFamily="34" charset="-120"/>
               </a:rPr>
-              <a:t>detest</a:t>
+              <a:t>tested</a:t>
             </a:r>
             <a:endParaRPr lang="en-US" sz="1200" dirty="0"/>
           </a:p>
@@ -41128,7 +41572,7 @@
                 <a:ea typeface="Calibri" pitchFamily="34" charset="-122"/>
                 <a:cs typeface="Calibri" pitchFamily="34" charset="-120"/>
               </a:rPr>
-              <a:t>To dislike something very strongly; to hate it.</a:t>
+              <a:t>When something has already been checked or examined.</a:t>
             </a:r>
             <a:endParaRPr lang="en-US" sz="1200" dirty="0"/>
           </a:p>
@@ -41201,7 +41645,7 @@
                 <a:ea typeface="Trebuchet MS" pitchFamily="34" charset="-122"/>
                 <a:cs typeface="Trebuchet MS" pitchFamily="34" charset="-120"/>
               </a:rPr>
-              <a:t>testing</a:t>
+              <a:t>tester</a:t>
             </a:r>
             <a:endParaRPr lang="en-US" sz="1200" dirty="0"/>
           </a:p>
@@ -41267,7 +41711,7 @@
                 <a:ea typeface="Calibri" pitchFamily="34" charset="-122"/>
                 <a:cs typeface="Calibri" pitchFamily="34" charset="-120"/>
               </a:rPr>
-              <a:t>Something that shows clear proof or evidence that something is true.</a:t>
+              <a:t>A person who takes part in a competition or quiz.</a:t>
             </a:r>
             <a:endParaRPr lang="en-US" sz="1200" dirty="0"/>
           </a:p>
@@ -41340,7 +41784,7 @@
                 <a:ea typeface="Trebuchet MS" pitchFamily="34" charset="-122"/>
                 <a:cs typeface="Trebuchet MS" pitchFamily="34" charset="-120"/>
               </a:rPr>
-              <a:t>testament</a:t>
+              <a:t>contestant</a:t>
             </a:r>
             <a:endParaRPr lang="en-US" sz="1200" dirty="0"/>
           </a:p>
@@ -41406,7 +41850,7 @@
                 <a:ea typeface="Calibri" pitchFamily="34" charset="-122"/>
                 <a:cs typeface="Calibri" pitchFamily="34" charset="-120"/>
               </a:rPr>
-              <a:t>A competition where people try to win by being the best at something.</a:t>
+              <a:t>When people show they strongly disagree with something by speaking out or marching.</a:t>
             </a:r>
             <a:endParaRPr lang="en-US" sz="1200" dirty="0"/>
           </a:p>
@@ -41901,7 +42345,7 @@
                 <a:ea typeface="Calibri" pitchFamily="34" charset="-122"/>
                 <a:cs typeface="Calibri" pitchFamily="34" charset="-120"/>
               </a:rPr>
-              <a:t>The scientist ran a series of tests to find out which material was the strongest.</a:t>
+              <a:t>The students had to contest the answer they believed was wrong in the science quiz.</a:t>
             </a:r>
             <a:endParaRPr lang="en-US" sz="1500" dirty="0"/>
           </a:p>
@@ -42065,7 +42509,7 @@
                 <a:ea typeface="Calibri" pitchFamily="34" charset="-122"/>
                 <a:cs typeface="Calibri" pitchFamily="34" charset="-120"/>
               </a:rPr>
-              <a:t>The students decided to protest against the new school rule by writing a letter to the principal.</a:t>
+              <a:t>A large group gathered outside the town hall to protest against the new road being built through the park.</a:t>
             </a:r>
             <a:endParaRPr lang="en-US" sz="1500" dirty="0"/>
           </a:p>
@@ -42229,7 +42673,7 @@
                 <a:ea typeface="Calibri" pitchFamily="34" charset="-122"/>
                 <a:cs typeface="Calibri" pitchFamily="34" charset="-120"/>
               </a:rPr>
-              <a:t>Winning three competitions in a row is a true testament to how hard she has trained.</a:t>
+              <a:t>The tester carefully checked every part of the machine before it was sent to the shop.</a:t>
             </a:r>
             <a:endParaRPr lang="en-US" sz="1500" dirty="0"/>
           </a:p>
